--- a/tinyML/LambdaIDS_QatarWebSummit_Deck.pptx
+++ b/tinyML/LambdaIDS_QatarWebSummit_Deck.pptx
@@ -4,22 +4,25 @@
   <p:sldMasterIdLst>
     <p:sldMasterId id="2147483648" r:id="rId1"/>
   </p:sldMasterIdLst>
+  <p:notesMasterIdLst>
+    <p:notesMasterId r:id="rId17"/>
+  </p:notesMasterIdLst>
   <p:sldIdLst>
-    <p:sldId id="256" r:id="rId7"/>
-    <p:sldId id="257" r:id="rId9"/>
-    <p:sldId id="258" r:id="rId10"/>
-    <p:sldId id="259" r:id="rId11"/>
-    <p:sldId id="260" r:id="rId12"/>
-    <p:sldId id="261" r:id="rId13"/>
-    <p:sldId id="262" r:id="rId14"/>
-    <p:sldId id="263" r:id="rId15"/>
-    <p:sldId id="264" r:id="rId16"/>
-    <p:sldId id="265" r:id="rId17"/>
-    <p:sldId id="266" r:id="rId18"/>
-    <p:sldId id="267" r:id="rId19"/>
-    <p:sldId id="268" r:id="rId20"/>
+    <p:sldId id="256" r:id="rId22"/>
+    <p:sldId id="257" r:id="rId23"/>
+    <p:sldId id="258" r:id="rId24"/>
+    <p:sldId id="259" r:id="rId25"/>
+    <p:sldId id="260" r:id="rId26"/>
+    <p:sldId id="261" r:id="rId27"/>
+    <p:sldId id="262" r:id="rId28"/>
+    <p:sldId id="263" r:id="rId29"/>
+    <p:sldId id="264" r:id="rId30"/>
+    <p:sldId id="265" r:id="rId31"/>
+    <p:sldId id="266" r:id="rId32"/>
+    <p:sldId id="267" r:id="rId33"/>
+    <p:sldId id="268" r:id="rId34"/>
   </p:sldIdLst>
-  <p:sldSz cx="9144000" cy="6858000" type="screen4x3"/>
+  <p:sldSz cx="12188825" cy="6858000"/>
   <p:notesSz cx="6858000" cy="9144000"/>
   <p:defaultTextStyle>
     <a:defPPr>
@@ -116,11 +119,27 @@
       </a:defRPr>
     </a:lvl9pPr>
   </p:defaultTextStyle>
+  <p:extLst>
+    <p:ext uri="{EFAFB233-063F-42B5-8137-9DF3F51BA10A}">
+      <p15:sldGuideLst xmlns:p15="http://schemas.microsoft.com/office/powerpoint/2012/main">
+        <p15:guide id="1" orient="horz" pos="2160">
+          <p15:clr>
+            <a:srgbClr val="A4A3A4"/>
+          </p15:clr>
+        </p15:guide>
+        <p15:guide id="2" pos="2880">
+          <p15:clr>
+            <a:srgbClr val="A4A3A4"/>
+          </p15:clr>
+        </p15:guide>
+      </p15:sldGuideLst>
+    </p:ext>
+  </p:extLst>
 </p:presentation>
 </file>
 
 <file path=ppt/notesMasters/notesMaster1.xml><?xml version="1.0" encoding="utf-8"?>
-<p:notesMaster xmlns:a="http://schemas.openxmlformats.org/drawingml/2006/main" xmlns:p="http://schemas.openxmlformats.org/presentationml/2006/main" xmlns:r="http://schemas.openxmlformats.org/officeDocument/2006/relationships">
+<p:notesMaster xmlns:a="http://schemas.openxmlformats.org/drawingml/2006/main" xmlns:r="http://schemas.openxmlformats.org/officeDocument/2006/relationships" xmlns:p="http://schemas.openxmlformats.org/presentationml/2006/main">
   <p:cSld>
     <p:bg>
       <p:bgRef idx="1001">
@@ -141,241 +160,16 @@
           <a:chExt cx="0" cy="0"/>
         </a:xfrm>
       </p:grpSpPr>
-      <p:sp>
-        <p:nvSpPr>
-          <p:cNvPr id="2" name="Header Placeholder 1"/>
-          <p:cNvSpPr>
-            <a:spLocks noGrp="1"/>
-          </p:cNvSpPr>
-          <p:nvPr>
-            <p:ph type="hdr" sz="quarter"/>
-          </p:nvPr>
-        </p:nvSpPr>
-        <p:spPr>
-          <a:xfrm>
-            <a:off x="0" y="0"/>
-            <a:ext cx="2971800" cy="457200"/>
-          </a:xfrm>
-          <a:prstGeom prst="rect">
-            <a:avLst/>
-          </a:prstGeom>
-        </p:spPr>
-        <p:txBody>
-          <a:bodyPr vert="horz" lIns="91440" tIns="45720" rIns="91440" bIns="45720" rtlCol="0"/>
-          <a:lstStyle>
-            <a:lvl1pPr algn="l">
-              <a:defRPr sz="1200"/>
-            </a:lvl1pPr>
-          </a:lstStyle>
-          <a:p>
-            <a:endParaRPr lang="en-US"/>
-          </a:p>
-        </p:txBody>
-      </p:sp>
-      <p:sp>
-        <p:nvSpPr>
-          <p:cNvPr id="3" name="Date Placeholder 2"/>
-          <p:cNvSpPr>
-            <a:spLocks noGrp="1"/>
-          </p:cNvSpPr>
-          <p:nvPr>
-            <p:ph type="dt" idx="1"/>
-          </p:nvPr>
-        </p:nvSpPr>
-        <p:spPr>
-          <a:xfrm>
-            <a:off x="3884613" y="0"/>
-            <a:ext cx="2971800" cy="457200"/>
-          </a:xfrm>
-          <a:prstGeom prst="rect">
-            <a:avLst/>
-          </a:prstGeom>
-        </p:spPr>
-        <p:txBody>
-          <a:bodyPr vert="horz" lIns="91440" tIns="45720" rIns="91440" bIns="45720" rtlCol="0"/>
-          <a:lstStyle>
-            <a:lvl1pPr algn="r">
-              <a:defRPr sz="1200"/>
-            </a:lvl1pPr>
-          </a:lstStyle>
-          <a:p>
-            <a:fld id="{0F89C1C7-3DCD-1040-A9CF-14679D8B5DDD}" type="datetimeFigureOut">
-              <a:rPr lang="en-US" smtClean="0"/>
-              <a:t>10/17/16</a:t>
-            </a:fld>
-            <a:endParaRPr lang="en-US"/>
-          </a:p>
-        </p:txBody>
-      </p:sp>
-      <p:sp>
-        <p:nvSpPr>
-          <p:cNvPr id="4" name="Slide Image Placeholder 3"/>
-          <p:cNvSpPr>
-            <a:spLocks noGrp="1" noRot="1" noChangeAspect="1"/>
-          </p:cNvSpPr>
-          <p:nvPr>
-            <p:ph type="sldImg" idx="2"/>
-          </p:nvPr>
-        </p:nvSpPr>
-        <p:spPr>
-          <a:xfrm>
-            <a:off x="1143000" y="685800"/>
-            <a:ext cx="4572000" cy="3429000"/>
-          </a:xfrm>
-          <a:prstGeom prst="rect">
-            <a:avLst/>
-          </a:prstGeom>
-          <a:noFill/>
-          <a:ln w="12700">
-            <a:solidFill>
-              <a:prstClr val="black"/>
-            </a:solidFill>
-          </a:ln>
-        </p:spPr>
-        <p:txBody>
-          <a:bodyPr vert="horz" lIns="91440" tIns="45720" rIns="91440" bIns="45720" rtlCol="0" anchor="ctr"/>
-          <a:lstStyle/>
-          <a:p>
-            <a:endParaRPr lang="en-US"/>
-          </a:p>
-        </p:txBody>
-      </p:sp>
-      <p:sp>
-        <p:nvSpPr>
-          <p:cNvPr id="5" name="Notes Placeholder 4"/>
-          <p:cNvSpPr>
-            <a:spLocks noGrp="1"/>
-          </p:cNvSpPr>
-          <p:nvPr>
-            <p:ph type="body" sz="quarter" idx="3"/>
-          </p:nvPr>
-        </p:nvSpPr>
-        <p:spPr>
-          <a:xfrm>
-            <a:off x="685800" y="4343400"/>
-            <a:ext cx="5486400" cy="4114800"/>
-          </a:xfrm>
-          <a:prstGeom prst="rect">
-            <a:avLst/>
-          </a:prstGeom>
-        </p:spPr>
-        <p:txBody>
-          <a:bodyPr vert="horz" lIns="91440" tIns="45720" rIns="91440" bIns="45720" rtlCol="0"/>
-          <a:lstStyle/>
-          <a:p>
-            <a:pPr lvl="0"/>
-            <a:r>
-              <a:rPr lang="en-US" smtClean="0"/>
-              <a:t>Click to edit Master text styles</a:t>
-            </a:r>
-          </a:p>
-          <a:p>
-            <a:pPr lvl="1"/>
-            <a:r>
-              <a:rPr lang="en-US" smtClean="0"/>
-              <a:t>Second level</a:t>
-            </a:r>
-          </a:p>
-          <a:p>
-            <a:pPr lvl="2"/>
-            <a:r>
-              <a:rPr lang="en-US" smtClean="0"/>
-              <a:t>Third level</a:t>
-            </a:r>
-          </a:p>
-          <a:p>
-            <a:pPr lvl="3"/>
-            <a:r>
-              <a:rPr lang="en-US" smtClean="0"/>
-              <a:t>Fourth level</a:t>
-            </a:r>
-          </a:p>
-          <a:p>
-            <a:pPr lvl="4"/>
-            <a:r>
-              <a:rPr lang="en-US" smtClean="0"/>
-              <a:t>Fifth level</a:t>
-            </a:r>
-            <a:endParaRPr lang="en-US"/>
-          </a:p>
-        </p:txBody>
-      </p:sp>
-      <p:sp>
-        <p:nvSpPr>
-          <p:cNvPr id="6" name="Footer Placeholder 5"/>
-          <p:cNvSpPr>
-            <a:spLocks noGrp="1"/>
-          </p:cNvSpPr>
-          <p:nvPr>
-            <p:ph type="ftr" sz="quarter" idx="4"/>
-          </p:nvPr>
-        </p:nvSpPr>
-        <p:spPr>
-          <a:xfrm>
-            <a:off x="0" y="8685213"/>
-            <a:ext cx="2971800" cy="457200"/>
-          </a:xfrm>
-          <a:prstGeom prst="rect">
-            <a:avLst/>
-          </a:prstGeom>
-        </p:spPr>
-        <p:txBody>
-          <a:bodyPr vert="horz" lIns="91440" tIns="45720" rIns="91440" bIns="45720" rtlCol="0" anchor="b"/>
-          <a:lstStyle>
-            <a:lvl1pPr algn="l">
-              <a:defRPr sz="1200"/>
-            </a:lvl1pPr>
-          </a:lstStyle>
-          <a:p>
-            <a:endParaRPr lang="en-US"/>
-          </a:p>
-        </p:txBody>
-      </p:sp>
-      <p:sp>
-        <p:nvSpPr>
-          <p:cNvPr id="7" name="Slide Number Placeholder 6"/>
-          <p:cNvSpPr>
-            <a:spLocks noGrp="1"/>
-          </p:cNvSpPr>
-          <p:nvPr>
-            <p:ph type="sldNum" sz="quarter" idx="5"/>
-          </p:nvPr>
-        </p:nvSpPr>
-        <p:spPr>
-          <a:xfrm>
-            <a:off x="3884613" y="8685213"/>
-            <a:ext cx="2971800" cy="457200"/>
-          </a:xfrm>
-          <a:prstGeom prst="rect">
-            <a:avLst/>
-          </a:prstGeom>
-        </p:spPr>
-        <p:txBody>
-          <a:bodyPr vert="horz" lIns="91440" tIns="45720" rIns="91440" bIns="45720" rtlCol="0" anchor="b"/>
-          <a:lstStyle>
-            <a:lvl1pPr algn="r">
-              <a:defRPr sz="1200"/>
-            </a:lvl1pPr>
-          </a:lstStyle>
-          <a:p>
-            <a:fld id="{BB5E49A5-4136-284D-997B-48E1D791AD67}" type="slidenum">
-              <a:rPr lang="en-US" smtClean="0"/>
-              <a:t>‹#›</a:t>
-            </a:fld>
-            <a:endParaRPr lang="en-US"/>
-          </a:p>
-        </p:txBody>
-      </p:sp>
     </p:spTree>
     <p:extLst>
       <p:ext uri="{BB962C8B-B14F-4D97-AF65-F5344CB8AC3E}">
-        <p14:creationId xmlns:p14="http://schemas.microsoft.com/office/powerpoint/2010/main" val="2623252185"/>
+        <p14:creationId xmlns:p14="http://schemas.microsoft.com/office/powerpoint/2010/main" val="3608177624"/>
       </p:ext>
     </p:extLst>
   </p:cSld>
   <p:clrMap bg1="lt1" tx1="dk1" bg2="lt2" tx2="dk2" accent1="accent1" accent2="accent2" accent3="accent3" accent4="accent4" accent5="accent5" accent6="accent6" hlink="hlink" folHlink="folHlink"/>
   <p:notesStyle>
-    <a:lvl1pPr marL="0" algn="l" defTabSz="457200" rtl="0" eaLnBrk="1" latinLnBrk="0" hangingPunct="1">
+    <a:lvl1pPr marL="0" algn="l" defTabSz="914400" rtl="0" eaLnBrk="1" latinLnBrk="0" hangingPunct="1">
       <a:defRPr sz="1200" kern="1200">
         <a:solidFill>
           <a:schemeClr val="tx1"/>
@@ -385,7 +179,7 @@
         <a:cs typeface="+mn-cs"/>
       </a:defRPr>
     </a:lvl1pPr>
-    <a:lvl2pPr marL="457200" algn="l" defTabSz="457200" rtl="0" eaLnBrk="1" latinLnBrk="0" hangingPunct="1">
+    <a:lvl2pPr marL="457200" algn="l" defTabSz="914400" rtl="0" eaLnBrk="1" latinLnBrk="0" hangingPunct="1">
       <a:defRPr sz="1200" kern="1200">
         <a:solidFill>
           <a:schemeClr val="tx1"/>
@@ -395,7 +189,7 @@
         <a:cs typeface="+mn-cs"/>
       </a:defRPr>
     </a:lvl2pPr>
-    <a:lvl3pPr marL="914400" algn="l" defTabSz="457200" rtl="0" eaLnBrk="1" latinLnBrk="0" hangingPunct="1">
+    <a:lvl3pPr marL="914400" algn="l" defTabSz="914400" rtl="0" eaLnBrk="1" latinLnBrk="0" hangingPunct="1">
       <a:defRPr sz="1200" kern="1200">
         <a:solidFill>
           <a:schemeClr val="tx1"/>
@@ -405,7 +199,7 @@
         <a:cs typeface="+mn-cs"/>
       </a:defRPr>
     </a:lvl3pPr>
-    <a:lvl4pPr marL="1371600" algn="l" defTabSz="457200" rtl="0" eaLnBrk="1" latinLnBrk="0" hangingPunct="1">
+    <a:lvl4pPr marL="1371600" algn="l" defTabSz="914400" rtl="0" eaLnBrk="1" latinLnBrk="0" hangingPunct="1">
       <a:defRPr sz="1200" kern="1200">
         <a:solidFill>
           <a:schemeClr val="tx1"/>
@@ -415,7 +209,7 @@
         <a:cs typeface="+mn-cs"/>
       </a:defRPr>
     </a:lvl4pPr>
-    <a:lvl5pPr marL="1828800" algn="l" defTabSz="457200" rtl="0" eaLnBrk="1" latinLnBrk="0" hangingPunct="1">
+    <a:lvl5pPr marL="1828800" algn="l" defTabSz="914400" rtl="0" eaLnBrk="1" latinLnBrk="0" hangingPunct="1">
       <a:defRPr sz="1200" kern="1200">
         <a:solidFill>
           <a:schemeClr val="tx1"/>
@@ -425,7 +219,7 @@
         <a:cs typeface="+mn-cs"/>
       </a:defRPr>
     </a:lvl5pPr>
-    <a:lvl6pPr marL="2286000" algn="l" defTabSz="457200" rtl="0" eaLnBrk="1" latinLnBrk="0" hangingPunct="1">
+    <a:lvl6pPr marL="2286000" algn="l" defTabSz="914400" rtl="0" eaLnBrk="1" latinLnBrk="0" hangingPunct="1">
       <a:defRPr sz="1200" kern="1200">
         <a:solidFill>
           <a:schemeClr val="tx1"/>
@@ -435,7 +229,7 @@
         <a:cs typeface="+mn-cs"/>
       </a:defRPr>
     </a:lvl6pPr>
-    <a:lvl7pPr marL="2743200" algn="l" defTabSz="457200" rtl="0" eaLnBrk="1" latinLnBrk="0" hangingPunct="1">
+    <a:lvl7pPr marL="2743200" algn="l" defTabSz="914400" rtl="0" eaLnBrk="1" latinLnBrk="0" hangingPunct="1">
       <a:defRPr sz="1200" kern="1200">
         <a:solidFill>
           <a:schemeClr val="tx1"/>
@@ -445,7 +239,7 @@
         <a:cs typeface="+mn-cs"/>
       </a:defRPr>
     </a:lvl7pPr>
-    <a:lvl8pPr marL="3200400" algn="l" defTabSz="457200" rtl="0" eaLnBrk="1" latinLnBrk="0" hangingPunct="1">
+    <a:lvl8pPr marL="3200400" algn="l" defTabSz="914400" rtl="0" eaLnBrk="1" latinLnBrk="0" hangingPunct="1">
       <a:defRPr sz="1200" kern="1200">
         <a:solidFill>
           <a:schemeClr val="tx1"/>
@@ -455,7 +249,7 @@
         <a:cs typeface="+mn-cs"/>
       </a:defRPr>
     </a:lvl8pPr>
-    <a:lvl9pPr marL="3657600" algn="l" defTabSz="457200" rtl="0" eaLnBrk="1" latinLnBrk="0" hangingPunct="1">
+    <a:lvl9pPr marL="3657600" algn="l" defTabSz="914400" rtl="0" eaLnBrk="1" latinLnBrk="0" hangingPunct="1">
       <a:defRPr sz="1200" kern="1200">
         <a:solidFill>
           <a:schemeClr val="tx1"/>
@@ -470,6 +264,638 @@
 </file>
 
 <file path=ppt/notesSlides/notesSlide1.xml><?xml version="1.0" encoding="utf-8"?>
+<p:notes xmlns:a="http://schemas.openxmlformats.org/drawingml/2006/main" xmlns:r="http://schemas.openxmlformats.org/officeDocument/2006/relationships" xmlns:p="http://schemas.openxmlformats.org/presentationml/2006/main">
+  <p:cSld>
+    <p:spTree>
+      <p:nvGrpSpPr>
+        <p:cNvPr id="1" name=""/>
+        <p:cNvGrpSpPr/>
+        <p:nvPr/>
+      </p:nvGrpSpPr>
+      <p:grpSpPr>
+        <a:xfrm>
+          <a:off x="0" y="0"/>
+          <a:ext cx="0" cy="0"/>
+          <a:chOff x="0" y="0"/>
+          <a:chExt cx="0" cy="0"/>
+        </a:xfrm>
+      </p:grpSpPr>
+      <p:sp>
+        <p:nvSpPr>
+          <p:cNvPr id="2" name="Slide Image Placeholder 1"/>
+          <p:cNvSpPr>
+            <a:spLocks noGrp="1" noRot="1" noChangeAspect="1"/>
+          </p:cNvSpPr>
+          <p:nvPr>
+            <p:ph type="sldImg" idx="2"/>
+          </p:nvPr>
+        </p:nvSpPr>
+        <p:spPr/>
+      </p:sp>
+      <p:sp>
+        <p:nvSpPr>
+          <p:cNvPr id="3" name="Notes Placeholder 2"/>
+          <p:cNvSpPr>
+            <a:spLocks noGrp="1"/>
+          </p:cNvSpPr>
+          <p:nvPr>
+            <p:ph type="body" sz="quarter" idx="3"/>
+          </p:nvPr>
+        </p:nvSpPr>
+        <p:spPr/>
+        <p:txBody>
+          <a:bodyPr/>
+          <a:lstStyle/>
+          <a:p>
+            <a:r>
+              <a:t>We make every IoT device self-defending through embedded AI security.</a:t>
+            </a:r>
+          </a:p>
+          <a:p>
+            <a:endParaRPr/>
+          </a:p>
+          <a:p>
+            <a:r>
+              <a:t>General Speaker Notes:</a:t>
+            </a:r>
+          </a:p>
+          <a:p>
+            <a:r>
+              <a:t>- Keep tone conversational; stress how IEC 62443 and NIS2 drive demand.</a:t>
+            </a:r>
+          </a:p>
+          <a:p>
+            <a:r>
+              <a:t>- Emphasize Swedish research roots (MDU) and global scalability.</a:t>
+            </a:r>
+          </a:p>
+          <a:p>
+            <a:r>
+              <a:t>- Finish with a clear ask and pilot goal.</a:t>
+            </a:r>
+          </a:p>
+        </p:txBody>
+      </p:sp>
+      <p:sp>
+        <p:nvSpPr>
+          <p:cNvPr id="4" name="Slide Number Placeholder 3"/>
+          <p:cNvSpPr>
+            <a:spLocks noGrp="1"/>
+          </p:cNvSpPr>
+          <p:nvPr>
+            <p:ph type="sldNum" sz="quarter" idx="5"/>
+          </p:nvPr>
+        </p:nvSpPr>
+        <p:spPr/>
+      </p:sp>
+    </p:spTree>
+  </p:cSld>
+  <p:clrMapOvr>
+    <a:masterClrMapping/>
+  </p:clrMapOvr>
+</p:notes>
+</file>
+
+<file path=ppt/notesSlides/notesSlide10.xml><?xml version="1.0" encoding="utf-8"?>
+<p:notes xmlns:a="http://schemas.openxmlformats.org/drawingml/2006/main" xmlns:r="http://schemas.openxmlformats.org/officeDocument/2006/relationships" xmlns:p="http://schemas.openxmlformats.org/presentationml/2006/main">
+  <p:cSld>
+    <p:spTree>
+      <p:nvGrpSpPr>
+        <p:cNvPr id="1" name=""/>
+        <p:cNvGrpSpPr/>
+        <p:nvPr/>
+      </p:nvGrpSpPr>
+      <p:grpSpPr>
+        <a:xfrm>
+          <a:off x="0" y="0"/>
+          <a:ext cx="0" cy="0"/>
+          <a:chOff x="0" y="0"/>
+          <a:chExt cx="0" cy="0"/>
+        </a:xfrm>
+      </p:grpSpPr>
+      <p:sp>
+        <p:nvSpPr>
+          <p:cNvPr id="2" name="Slide Image Placeholder 1"/>
+          <p:cNvSpPr>
+            <a:spLocks noGrp="1" noRot="1" noChangeAspect="1"/>
+          </p:cNvSpPr>
+          <p:nvPr>
+            <p:ph type="sldImg" idx="2"/>
+          </p:nvPr>
+        </p:nvSpPr>
+        <p:spPr/>
+      </p:sp>
+      <p:sp>
+        <p:nvSpPr>
+          <p:cNvPr id="3" name="Notes Placeholder 2"/>
+          <p:cNvSpPr>
+            <a:spLocks noGrp="1"/>
+          </p:cNvSpPr>
+          <p:nvPr>
+            <p:ph type="body" sz="quarter" idx="3"/>
+          </p:nvPr>
+        </p:nvSpPr>
+        <p:spPr/>
+        <p:txBody>
+          <a:bodyPr/>
+          <a:lstStyle/>
+          <a:p>
+            <a:r>
+              <a:t>General Speaker Notes:</a:t>
+            </a:r>
+          </a:p>
+          <a:p>
+            <a:r>
+              <a:t>- Keep tone conversational; stress how IEC 62443 and NIS2 drive demand.</a:t>
+            </a:r>
+          </a:p>
+          <a:p>
+            <a:r>
+              <a:t>- Emphasize Swedish research roots (MDU) and global scalability.</a:t>
+            </a:r>
+          </a:p>
+          <a:p>
+            <a:r>
+              <a:t>- Finish with a clear ask and pilot goal.</a:t>
+            </a:r>
+          </a:p>
+        </p:txBody>
+      </p:sp>
+      <p:sp>
+        <p:nvSpPr>
+          <p:cNvPr id="4" name="Slide Number Placeholder 3"/>
+          <p:cNvSpPr>
+            <a:spLocks noGrp="1"/>
+          </p:cNvSpPr>
+          <p:nvPr>
+            <p:ph type="sldNum" sz="quarter" idx="5"/>
+          </p:nvPr>
+        </p:nvSpPr>
+        <p:spPr/>
+      </p:sp>
+    </p:spTree>
+  </p:cSld>
+  <p:clrMapOvr>
+    <a:masterClrMapping/>
+  </p:clrMapOvr>
+</p:notes>
+</file>
+
+<file path=ppt/notesSlides/notesSlide11.xml><?xml version="1.0" encoding="utf-8"?>
+<p:notes xmlns:a="http://schemas.openxmlformats.org/drawingml/2006/main" xmlns:r="http://schemas.openxmlformats.org/officeDocument/2006/relationships" xmlns:p="http://schemas.openxmlformats.org/presentationml/2006/main">
+  <p:cSld>
+    <p:spTree>
+      <p:nvGrpSpPr>
+        <p:cNvPr id="1" name=""/>
+        <p:cNvGrpSpPr/>
+        <p:nvPr/>
+      </p:nvGrpSpPr>
+      <p:grpSpPr>
+        <a:xfrm>
+          <a:off x="0" y="0"/>
+          <a:ext cx="0" cy="0"/>
+          <a:chOff x="0" y="0"/>
+          <a:chExt cx="0" cy="0"/>
+        </a:xfrm>
+      </p:grpSpPr>
+      <p:sp>
+        <p:nvSpPr>
+          <p:cNvPr id="2" name="Slide Image Placeholder 1"/>
+          <p:cNvSpPr>
+            <a:spLocks noGrp="1" noRot="1" noChangeAspect="1"/>
+          </p:cNvSpPr>
+          <p:nvPr>
+            <p:ph type="sldImg" idx="2"/>
+          </p:nvPr>
+        </p:nvSpPr>
+        <p:spPr/>
+      </p:sp>
+      <p:sp>
+        <p:nvSpPr>
+          <p:cNvPr id="3" name="Notes Placeholder 2"/>
+          <p:cNvSpPr>
+            <a:spLocks noGrp="1"/>
+          </p:cNvSpPr>
+          <p:nvPr>
+            <p:ph type="body" sz="quarter" idx="3"/>
+          </p:nvPr>
+        </p:nvSpPr>
+        <p:spPr/>
+        <p:txBody>
+          <a:bodyPr/>
+          <a:lstStyle/>
+          <a:p>
+            <a:r>
+              <a:t>General Speaker Notes:</a:t>
+            </a:r>
+          </a:p>
+          <a:p>
+            <a:r>
+              <a:t>- Keep tone conversational; stress how IEC 62443 and NIS2 drive demand.</a:t>
+            </a:r>
+          </a:p>
+          <a:p>
+            <a:r>
+              <a:t>- Emphasize Swedish research roots (MDU) and global scalability.</a:t>
+            </a:r>
+          </a:p>
+          <a:p>
+            <a:r>
+              <a:t>- Finish with a clear ask and pilot goal.</a:t>
+            </a:r>
+          </a:p>
+        </p:txBody>
+      </p:sp>
+      <p:sp>
+        <p:nvSpPr>
+          <p:cNvPr id="4" name="Slide Number Placeholder 3"/>
+          <p:cNvSpPr>
+            <a:spLocks noGrp="1"/>
+          </p:cNvSpPr>
+          <p:nvPr>
+            <p:ph type="sldNum" sz="quarter" idx="5"/>
+          </p:nvPr>
+        </p:nvSpPr>
+        <p:spPr/>
+      </p:sp>
+    </p:spTree>
+  </p:cSld>
+  <p:clrMapOvr>
+    <a:masterClrMapping/>
+  </p:clrMapOvr>
+</p:notes>
+</file>
+
+<file path=ppt/notesSlides/notesSlide12.xml><?xml version="1.0" encoding="utf-8"?>
+<p:notes xmlns:a="http://schemas.openxmlformats.org/drawingml/2006/main" xmlns:r="http://schemas.openxmlformats.org/officeDocument/2006/relationships" xmlns:p="http://schemas.openxmlformats.org/presentationml/2006/main">
+  <p:cSld>
+    <p:spTree>
+      <p:nvGrpSpPr>
+        <p:cNvPr id="1" name=""/>
+        <p:cNvGrpSpPr/>
+        <p:nvPr/>
+      </p:nvGrpSpPr>
+      <p:grpSpPr>
+        <a:xfrm>
+          <a:off x="0" y="0"/>
+          <a:ext cx="0" cy="0"/>
+          <a:chOff x="0" y="0"/>
+          <a:chExt cx="0" cy="0"/>
+        </a:xfrm>
+      </p:grpSpPr>
+      <p:sp>
+        <p:nvSpPr>
+          <p:cNvPr id="2" name="Slide Image Placeholder 1"/>
+          <p:cNvSpPr>
+            <a:spLocks noGrp="1" noRot="1" noChangeAspect="1"/>
+          </p:cNvSpPr>
+          <p:nvPr>
+            <p:ph type="sldImg" idx="2"/>
+          </p:nvPr>
+        </p:nvSpPr>
+        <p:spPr/>
+      </p:sp>
+      <p:sp>
+        <p:nvSpPr>
+          <p:cNvPr id="3" name="Notes Placeholder 2"/>
+          <p:cNvSpPr>
+            <a:spLocks noGrp="1"/>
+          </p:cNvSpPr>
+          <p:nvPr>
+            <p:ph type="body" sz="quarter" idx="3"/>
+          </p:nvPr>
+        </p:nvSpPr>
+        <p:spPr/>
+        <p:txBody>
+          <a:bodyPr/>
+          <a:lstStyle/>
+          <a:p>
+            <a:r>
+              <a:t>General Speaker Notes:</a:t>
+            </a:r>
+          </a:p>
+          <a:p>
+            <a:r>
+              <a:t>- Keep tone conversational; stress how IEC 62443 and NIS2 drive demand.</a:t>
+            </a:r>
+          </a:p>
+          <a:p>
+            <a:r>
+              <a:t>- Emphasize Swedish research roots (MDU) and global scalability.</a:t>
+            </a:r>
+          </a:p>
+          <a:p>
+            <a:r>
+              <a:t>- Finish with a clear ask and pilot goal.</a:t>
+            </a:r>
+          </a:p>
+        </p:txBody>
+      </p:sp>
+      <p:sp>
+        <p:nvSpPr>
+          <p:cNvPr id="4" name="Slide Number Placeholder 3"/>
+          <p:cNvSpPr>
+            <a:spLocks noGrp="1"/>
+          </p:cNvSpPr>
+          <p:nvPr>
+            <p:ph type="sldNum" sz="quarter" idx="5"/>
+          </p:nvPr>
+        </p:nvSpPr>
+        <p:spPr/>
+      </p:sp>
+    </p:spTree>
+  </p:cSld>
+  <p:clrMapOvr>
+    <a:masterClrMapping/>
+  </p:clrMapOvr>
+</p:notes>
+</file>
+
+<file path=ppt/notesSlides/notesSlide13.xml><?xml version="1.0" encoding="utf-8"?>
+<p:notes xmlns:a="http://schemas.openxmlformats.org/drawingml/2006/main" xmlns:r="http://schemas.openxmlformats.org/officeDocument/2006/relationships" xmlns:p="http://schemas.openxmlformats.org/presentationml/2006/main">
+  <p:cSld>
+    <p:spTree>
+      <p:nvGrpSpPr>
+        <p:cNvPr id="1" name=""/>
+        <p:cNvGrpSpPr/>
+        <p:nvPr/>
+      </p:nvGrpSpPr>
+      <p:grpSpPr>
+        <a:xfrm>
+          <a:off x="0" y="0"/>
+          <a:ext cx="0" cy="0"/>
+          <a:chOff x="0" y="0"/>
+          <a:chExt cx="0" cy="0"/>
+        </a:xfrm>
+      </p:grpSpPr>
+      <p:sp>
+        <p:nvSpPr>
+          <p:cNvPr id="2" name="Slide Image Placeholder 1"/>
+          <p:cNvSpPr>
+            <a:spLocks noGrp="1" noRot="1" noChangeAspect="1"/>
+          </p:cNvSpPr>
+          <p:nvPr>
+            <p:ph type="sldImg" idx="2"/>
+          </p:nvPr>
+        </p:nvSpPr>
+        <p:spPr/>
+      </p:sp>
+      <p:sp>
+        <p:nvSpPr>
+          <p:cNvPr id="3" name="Notes Placeholder 2"/>
+          <p:cNvSpPr>
+            <a:spLocks noGrp="1"/>
+          </p:cNvSpPr>
+          <p:nvPr>
+            <p:ph type="body" sz="quarter" idx="3"/>
+          </p:nvPr>
+        </p:nvSpPr>
+        <p:spPr/>
+        <p:txBody>
+          <a:bodyPr/>
+          <a:lstStyle/>
+          <a:p>
+            <a:r>
+              <a:t>General Speaker Notes:</a:t>
+            </a:r>
+          </a:p>
+          <a:p>
+            <a:r>
+              <a:t>- Keep tone conversational; stress how IEC 62443 and NIS2 drive demand.</a:t>
+            </a:r>
+          </a:p>
+          <a:p>
+            <a:r>
+              <a:t>- Emphasize Swedish research roots (MDU) and global scalability.</a:t>
+            </a:r>
+          </a:p>
+          <a:p>
+            <a:r>
+              <a:t>- Finish with a clear ask and pilot goal.</a:t>
+            </a:r>
+          </a:p>
+        </p:txBody>
+      </p:sp>
+      <p:sp>
+        <p:nvSpPr>
+          <p:cNvPr id="4" name="Slide Number Placeholder 3"/>
+          <p:cNvSpPr>
+            <a:spLocks noGrp="1"/>
+          </p:cNvSpPr>
+          <p:nvPr>
+            <p:ph type="sldNum" sz="quarter" idx="5"/>
+          </p:nvPr>
+        </p:nvSpPr>
+        <p:spPr/>
+      </p:sp>
+    </p:spTree>
+  </p:cSld>
+  <p:clrMapOvr>
+    <a:masterClrMapping/>
+  </p:clrMapOvr>
+</p:notes>
+</file>
+
+<file path=ppt/notesSlides/notesSlide14.xml><?xml version="1.0" encoding="utf-8"?>
+<p:notes xmlns:a="http://schemas.openxmlformats.org/drawingml/2006/main" xmlns:r="http://schemas.openxmlformats.org/officeDocument/2006/relationships" xmlns:p="http://schemas.openxmlformats.org/presentationml/2006/main">
+  <p:cSld>
+    <p:spTree>
+      <p:nvGrpSpPr>
+        <p:cNvPr id="1" name=""/>
+        <p:cNvGrpSpPr/>
+        <p:nvPr/>
+      </p:nvGrpSpPr>
+      <p:grpSpPr>
+        <a:xfrm>
+          <a:off x="0" y="0"/>
+          <a:ext cx="0" cy="0"/>
+          <a:chOff x="0" y="0"/>
+          <a:chExt cx="0" cy="0"/>
+        </a:xfrm>
+      </p:grpSpPr>
+      <p:sp>
+        <p:nvSpPr>
+          <p:cNvPr id="2" name="Slide Image Placeholder 1"/>
+          <p:cNvSpPr>
+            <a:spLocks noGrp="1" noRot="1" noChangeAspect="1"/>
+          </p:cNvSpPr>
+          <p:nvPr>
+            <p:ph type="sldImg" idx="2"/>
+          </p:nvPr>
+        </p:nvSpPr>
+        <p:spPr/>
+      </p:sp>
+      <p:sp>
+        <p:nvSpPr>
+          <p:cNvPr id="3" name="Notes Placeholder 2"/>
+          <p:cNvSpPr>
+            <a:spLocks noGrp="1"/>
+          </p:cNvSpPr>
+          <p:nvPr>
+            <p:ph type="body" sz="quarter" idx="3"/>
+          </p:nvPr>
+        </p:nvSpPr>
+        <p:spPr/>
+        <p:txBody>
+          <a:bodyPr/>
+          <a:lstStyle/>
+          <a:p>
+            <a:r>
+              <a:t>General Speaker Notes:</a:t>
+            </a:r>
+          </a:p>
+          <a:p>
+            <a:r>
+              <a:t>- Keep tone conversational; stress how IEC 62443 and NIS2 drive demand.</a:t>
+            </a:r>
+          </a:p>
+          <a:p>
+            <a:r>
+              <a:t>- Emphasize Swedish research roots (MDU) and global scalability.</a:t>
+            </a:r>
+          </a:p>
+          <a:p>
+            <a:r>
+              <a:t>- Finish with a clear ask and pilot goal.</a:t>
+            </a:r>
+          </a:p>
+        </p:txBody>
+      </p:sp>
+      <p:sp>
+        <p:nvSpPr>
+          <p:cNvPr id="4" name="Slide Number Placeholder 3"/>
+          <p:cNvSpPr>
+            <a:spLocks noGrp="1"/>
+          </p:cNvSpPr>
+          <p:nvPr>
+            <p:ph type="sldNum" sz="quarter" idx="5"/>
+          </p:nvPr>
+        </p:nvSpPr>
+        <p:spPr/>
+      </p:sp>
+    </p:spTree>
+  </p:cSld>
+  <p:clrMapOvr>
+    <a:masterClrMapping/>
+  </p:clrMapOvr>
+</p:notes>
+</file>
+
+<file path=ppt/notesSlides/notesSlide15.xml><?xml version="1.0" encoding="utf-8"?>
+<p:notes xmlns:a="http://schemas.openxmlformats.org/drawingml/2006/main" xmlns:r="http://schemas.openxmlformats.org/officeDocument/2006/relationships" xmlns:p="http://schemas.openxmlformats.org/presentationml/2006/main">
+  <p:cSld>
+    <p:spTree>
+      <p:nvGrpSpPr>
+        <p:cNvPr id="1" name="">
+          <a:extLst>
+            <a:ext uri="{FF2B5EF4-FFF2-40B4-BE49-F238E27FC236}">
+              <a16:creationId xmlns:a16="http://schemas.microsoft.com/office/drawing/2014/main" id="{1CB9DA56-83C0-9E24-8A4E-E33229301819}"/>
+            </a:ext>
+          </a:extLst>
+        </p:cNvPr>
+        <p:cNvGrpSpPr/>
+        <p:nvPr/>
+      </p:nvGrpSpPr>
+      <p:grpSpPr>
+        <a:xfrm>
+          <a:off x="0" y="0"/>
+          <a:ext cx="0" cy="0"/>
+          <a:chOff x="0" y="0"/>
+          <a:chExt cx="0" cy="0"/>
+        </a:xfrm>
+      </p:grpSpPr>
+      <p:sp>
+        <p:nvSpPr>
+          <p:cNvPr id="2" name="Slide Image Placeholder 1">
+            <a:extLst>
+              <a:ext uri="{FF2B5EF4-FFF2-40B4-BE49-F238E27FC236}">
+                <a16:creationId xmlns:a16="http://schemas.microsoft.com/office/drawing/2014/main" id="{DE3E5215-79EB-2286-609A-CEFFA4769F6B}"/>
+              </a:ext>
+            </a:extLst>
+          </p:cNvPr>
+          <p:cNvSpPr>
+            <a:spLocks noGrp="1" noRot="1" noChangeAspect="1"/>
+          </p:cNvSpPr>
+          <p:nvPr>
+            <p:ph type="sldImg" idx="2"/>
+          </p:nvPr>
+        </p:nvSpPr>
+        <p:spPr/>
+      </p:sp>
+      <p:sp>
+        <p:nvSpPr>
+          <p:cNvPr id="3" name="Notes Placeholder 2">
+            <a:extLst>
+              <a:ext uri="{FF2B5EF4-FFF2-40B4-BE49-F238E27FC236}">
+                <a16:creationId xmlns:a16="http://schemas.microsoft.com/office/drawing/2014/main" id="{B2D97879-534C-9136-5280-6B6701EC11FD}"/>
+              </a:ext>
+            </a:extLst>
+          </p:cNvPr>
+          <p:cNvSpPr>
+            <a:spLocks noGrp="1"/>
+          </p:cNvSpPr>
+          <p:nvPr>
+            <p:ph type="body" sz="quarter" idx="3"/>
+          </p:nvPr>
+        </p:nvSpPr>
+        <p:spPr/>
+        <p:txBody>
+          <a:bodyPr/>
+          <a:lstStyle/>
+          <a:p>
+            <a:r>
+              <a:t>General Speaker Notes:</a:t>
+            </a:r>
+          </a:p>
+          <a:p>
+            <a:r>
+              <a:t>- Keep tone conversational; stress how IEC 62443 and NIS2 drive demand.</a:t>
+            </a:r>
+          </a:p>
+          <a:p>
+            <a:r>
+              <a:t>- Emphasize Swedish research roots (MDU) and global scalability.</a:t>
+            </a:r>
+          </a:p>
+          <a:p>
+            <a:r>
+              <a:t>- Finish with a clear ask and pilot goal.</a:t>
+            </a:r>
+          </a:p>
+        </p:txBody>
+      </p:sp>
+      <p:sp>
+        <p:nvSpPr>
+          <p:cNvPr id="4" name="Slide Number Placeholder 3">
+            <a:extLst>
+              <a:ext uri="{FF2B5EF4-FFF2-40B4-BE49-F238E27FC236}">
+                <a16:creationId xmlns:a16="http://schemas.microsoft.com/office/drawing/2014/main" id="{995E08E2-9A0E-A9C2-0F36-4B6960099084}"/>
+              </a:ext>
+            </a:extLst>
+          </p:cNvPr>
+          <p:cNvSpPr>
+            <a:spLocks noGrp="1"/>
+          </p:cNvSpPr>
+          <p:nvPr>
+            <p:ph type="sldNum" sz="quarter" idx="5"/>
+          </p:nvPr>
+        </p:nvSpPr>
+        <p:spPr/>
+      </p:sp>
+    </p:spTree>
+    <p:extLst>
+      <p:ext uri="{BB962C8B-B14F-4D97-AF65-F5344CB8AC3E}">
+        <p14:creationId xmlns:p14="http://schemas.microsoft.com/office/powerpoint/2010/main" val="4276866863"/>
+      </p:ext>
+    </p:extLst>
+  </p:cSld>
+  <p:clrMapOvr>
+    <a:masterClrMapping/>
+  </p:clrMapOvr>
+</p:notes>
+</file>
+
+<file path=ppt/notesSlides/notesSlide16.xml><?xml version="1.0" encoding="utf-8"?>
 <p:notes xmlns:a="http://schemas.openxmlformats.org/drawingml/2006/main" xmlns:p="http://schemas.openxmlformats.org/presentationml/2006/main" xmlns:r="http://schemas.openxmlformats.org/officeDocument/2006/relationships">
   <p:cSld>
     <p:spTree>
@@ -486,68 +912,6 @@
           <a:chExt cx="0" cy="0"/>
         </a:xfrm>
       </p:grpSpPr>
-      <p:sp>
-        <p:nvSpPr>
-          <p:cNvPr id="2" name="Slide Image Placeholder 1"/>
-          <p:cNvSpPr>
-            <a:spLocks noGrp="1"/>
-          </p:cNvSpPr>
-          <p:nvPr>
-            <p:ph type="sldImg" idx="2"/>
-          </p:nvPr>
-        </p:nvSpPr>
-        <p:spPr/>
-      </p:sp>
-      <p:sp>
-        <p:nvSpPr>
-          <p:cNvPr id="3" name="Notes Placeholder 2"/>
-          <p:cNvSpPr>
-            <a:spLocks noGrp="1"/>
-          </p:cNvSpPr>
-          <p:nvPr>
-            <p:ph type="body" idx="3" sz="quarter"/>
-          </p:nvPr>
-        </p:nvSpPr>
-        <p:spPr/>
-        <p:txBody>
-          <a:bodyPr/>
-          <a:lstStyle/>
-          <a:p>
-            <a:r>
-              <a:t>Good morning. We are LambdaIDS.</a:t>
-            </a:r>
-          </a:p>
-          <a:p/>
-          <a:p>
-            <a:r>
-              <a:t>We are building the immune system for the IoT edge.</a:t>
-            </a:r>
-          </a:p>
-          <a:p/>
-          <a:p>
-            <a:r>
-              <a:t>Every day, we connect more critical infrastructure to the internet—from factories to power grids.</a:t>
-            </a:r>
-          </a:p>
-          <a:p>
-            <a:r>
-              <a:t>But the devices running them are vulnerable. We are here to change that.</a:t>
-            </a:r>
-          </a:p>
-        </p:txBody>
-      </p:sp>
-      <p:sp>
-        <p:nvSpPr>
-          <p:cNvPr id="4" name="Slide Number Placeholder 3"/>
-          <p:cNvSpPr>
-            <a:spLocks noGrp="1"/>
-          </p:cNvSpPr>
-          <p:nvPr>
-            <p:ph type="sldNum" idx="5" sz="quarter"/>
-          </p:nvPr>
-        </p:nvSpPr>
-        <p:spPr/>
-      </p:sp>
     </p:spTree>
   </p:cSld>
   <p:clrMapOvr>
@@ -556,7 +920,7 @@
 </p:notes>
 </file>
 
-<file path=ppt/notesSlides/notesSlide10.xml><?xml version="1.0" encoding="utf-8"?>
+<file path=ppt/notesSlides/notesSlide17.xml><?xml version="1.0" encoding="utf-8"?>
 <p:notes xmlns:a="http://schemas.openxmlformats.org/drawingml/2006/main" xmlns:p="http://schemas.openxmlformats.org/presentationml/2006/main" xmlns:r="http://schemas.openxmlformats.org/officeDocument/2006/relationships">
   <p:cSld>
     <p:spTree>
@@ -573,69 +937,6 @@
           <a:chExt cx="0" cy="0"/>
         </a:xfrm>
       </p:grpSpPr>
-      <p:sp>
-        <p:nvSpPr>
-          <p:cNvPr id="2" name="Slide Image Placeholder 1"/>
-          <p:cNvSpPr>
-            <a:spLocks noGrp="1"/>
-          </p:cNvSpPr>
-          <p:nvPr>
-            <p:ph type="sldImg" idx="2"/>
-          </p:nvPr>
-        </p:nvSpPr>
-        <p:spPr/>
-      </p:sp>
-      <p:sp>
-        <p:nvSpPr>
-          <p:cNvPr id="3" name="Notes Placeholder 2"/>
-          <p:cNvSpPr>
-            <a:spLocks noGrp="1"/>
-          </p:cNvSpPr>
-          <p:nvPr>
-            <p:ph type="body" idx="3" sz="quarter"/>
-          </p:nvPr>
-        </p:nvSpPr>
-        <p:spPr/>
-        <p:txBody>
-          <a:bodyPr/>
-          <a:lstStyle/>
-          <a:p>
-            <a:r>
-              <a:t>Here is our plan for the next 18 months.</a:t>
-            </a:r>
-          </a:p>
-          <a:p/>
-          <a:p>
-            <a:r>
-              <a:t>By mid-2025, we will finalize our SDK and complete our key pilots.</a:t>
-            </a:r>
-          </a:p>
-          <a:p/>
-          <a:p>
-            <a:r>
-              <a:t>By the end of the year, we aim for our first commercial deployments and full certification.</a:t>
-            </a:r>
-          </a:p>
-          <a:p/>
-          <a:p>
-            <a:r>
-              <a:t>In 2026, we expand aggressively into the MENA region and look towards a Series A to scale globally.</a:t>
-            </a:r>
-          </a:p>
-        </p:txBody>
-      </p:sp>
-      <p:sp>
-        <p:nvSpPr>
-          <p:cNvPr id="4" name="Slide Number Placeholder 3"/>
-          <p:cNvSpPr>
-            <a:spLocks noGrp="1"/>
-          </p:cNvSpPr>
-          <p:nvPr>
-            <p:ph type="sldNum" idx="5" sz="quarter"/>
-          </p:nvPr>
-        </p:nvSpPr>
-        <p:spPr/>
-      </p:sp>
     </p:spTree>
   </p:cSld>
   <p:clrMapOvr>
@@ -644,7 +945,7 @@
 </p:notes>
 </file>
 
-<file path=ppt/notesSlides/notesSlide11.xml><?xml version="1.0" encoding="utf-8"?>
+<file path=ppt/notesSlides/notesSlide18.xml><?xml version="1.0" encoding="utf-8"?>
 <p:notes xmlns:a="http://schemas.openxmlformats.org/drawingml/2006/main" xmlns:p="http://schemas.openxmlformats.org/presentationml/2006/main" xmlns:r="http://schemas.openxmlformats.org/officeDocument/2006/relationships">
   <p:cSld>
     <p:spTree>
@@ -661,63 +962,6 @@
           <a:chExt cx="0" cy="0"/>
         </a:xfrm>
       </p:grpSpPr>
-      <p:sp>
-        <p:nvSpPr>
-          <p:cNvPr id="2" name="Slide Image Placeholder 1"/>
-          <p:cNvSpPr>
-            <a:spLocks noGrp="1"/>
-          </p:cNvSpPr>
-          <p:nvPr>
-            <p:ph type="sldImg" idx="2"/>
-          </p:nvPr>
-        </p:nvSpPr>
-        <p:spPr/>
-      </p:sp>
-      <p:sp>
-        <p:nvSpPr>
-          <p:cNvPr id="3" name="Notes Placeholder 2"/>
-          <p:cNvSpPr>
-            <a:spLocks noGrp="1"/>
-          </p:cNvSpPr>
-          <p:nvPr>
-            <p:ph type="body" idx="3" sz="quarter"/>
-          </p:nvPr>
-        </p:nvSpPr>
-        <p:spPr/>
-        <p:txBody>
-          <a:bodyPr/>
-          <a:lstStyle/>
-          <a:p>
-            <a:r>
-              <a:t>Our team is built for this challenge.</a:t>
-            </a:r>
-          </a:p>
-          <a:p/>
-          <a:p>
-            <a:r>
-              <a:t>Soroush leads our strategy, Ahmad drives our deep tech innovation, and Hossein ensures our scientific rigor.</a:t>
-            </a:r>
-          </a:p>
-          <a:p/>
-          <a:p>
-            <a:r>
-              <a:t>Together, we live at the intersection of hardware constraints and software intelligence.</a:t>
-            </a:r>
-          </a:p>
-        </p:txBody>
-      </p:sp>
-      <p:sp>
-        <p:nvSpPr>
-          <p:cNvPr id="4" name="Slide Number Placeholder 3"/>
-          <p:cNvSpPr>
-            <a:spLocks noGrp="1"/>
-          </p:cNvSpPr>
-          <p:nvPr>
-            <p:ph type="sldNum" idx="5" sz="quarter"/>
-          </p:nvPr>
-        </p:nvSpPr>
-        <p:spPr/>
-      </p:sp>
     </p:spTree>
   </p:cSld>
   <p:clrMapOvr>
@@ -726,7 +970,7 @@
 </p:notes>
 </file>
 
-<file path=ppt/notesSlides/notesSlide12.xml><?xml version="1.0" encoding="utf-8"?>
+<file path=ppt/notesSlides/notesSlide19.xml><?xml version="1.0" encoding="utf-8"?>
 <p:notes xmlns:a="http://schemas.openxmlformats.org/drawingml/2006/main" xmlns:p="http://schemas.openxmlformats.org/presentationml/2006/main" xmlns:r="http://schemas.openxmlformats.org/officeDocument/2006/relationships">
   <p:cSld>
     <p:spTree>
@@ -743,69 +987,6 @@
           <a:chExt cx="0" cy="0"/>
         </a:xfrm>
       </p:grpSpPr>
-      <p:sp>
-        <p:nvSpPr>
-          <p:cNvPr id="2" name="Slide Image Placeholder 1"/>
-          <p:cNvSpPr>
-            <a:spLocks noGrp="1"/>
-          </p:cNvSpPr>
-          <p:nvPr>
-            <p:ph type="sldImg" idx="2"/>
-          </p:nvPr>
-        </p:nvSpPr>
-        <p:spPr/>
-      </p:sp>
-      <p:sp>
-        <p:nvSpPr>
-          <p:cNvPr id="3" name="Notes Placeholder 2"/>
-          <p:cNvSpPr>
-            <a:spLocks noGrp="1"/>
-          </p:cNvSpPr>
-          <p:nvPr>
-            <p:ph type="body" idx="3" sz="quarter"/>
-          </p:nvPr>
-        </p:nvSpPr>
-        <p:spPr/>
-        <p:txBody>
-          <a:bodyPr/>
-          <a:lstStyle/>
-          <a:p>
-            <a:r>
-              <a:t>We are raising between 500k and 1 million dollars.</a:t>
-            </a:r>
-          </a:p>
-          <a:p/>
-          <a:p>
-            <a:r>
-              <a:t>This capital will take us from validated tech to commercial product.</a:t>
-            </a:r>
-          </a:p>
-          <a:p/>
-          <a:p>
-            <a:r>
-              <a:t>The majority will go into R&amp;D and securing those critical certifications.</a:t>
-            </a:r>
-          </a:p>
-          <a:p/>
-          <a:p>
-            <a:r>
-              <a:t>We invite you to join us. Let's define the standard for secure AI at the edge.</a:t>
-            </a:r>
-          </a:p>
-        </p:txBody>
-      </p:sp>
-      <p:sp>
-        <p:nvSpPr>
-          <p:cNvPr id="4" name="Slide Number Placeholder 3"/>
-          <p:cNvSpPr>
-            <a:spLocks noGrp="1"/>
-          </p:cNvSpPr>
-          <p:nvPr>
-            <p:ph type="sldNum" idx="5" sz="quarter"/>
-          </p:nvPr>
-        </p:nvSpPr>
-        <p:spPr/>
-      </p:sp>
     </p:spTree>
   </p:cSld>
   <p:clrMapOvr>
@@ -814,7 +995,100 @@
 </p:notes>
 </file>
 
-<file path=ppt/notesSlides/notesSlide13.xml><?xml version="1.0" encoding="utf-8"?>
+<file path=ppt/notesSlides/notesSlide2.xml><?xml version="1.0" encoding="utf-8"?>
+<p:notes xmlns:a="http://schemas.openxmlformats.org/drawingml/2006/main" xmlns:r="http://schemas.openxmlformats.org/officeDocument/2006/relationships" xmlns:p="http://schemas.openxmlformats.org/presentationml/2006/main">
+  <p:cSld>
+    <p:spTree>
+      <p:nvGrpSpPr>
+        <p:cNvPr id="1" name=""/>
+        <p:cNvGrpSpPr/>
+        <p:nvPr/>
+      </p:nvGrpSpPr>
+      <p:grpSpPr>
+        <a:xfrm>
+          <a:off x="0" y="0"/>
+          <a:ext cx="0" cy="0"/>
+          <a:chOff x="0" y="0"/>
+          <a:chExt cx="0" cy="0"/>
+        </a:xfrm>
+      </p:grpSpPr>
+      <p:sp>
+        <p:nvSpPr>
+          <p:cNvPr id="2" name="Slide Image Placeholder 1"/>
+          <p:cNvSpPr>
+            <a:spLocks noGrp="1" noRot="1" noChangeAspect="1"/>
+          </p:cNvSpPr>
+          <p:nvPr>
+            <p:ph type="sldImg" idx="2"/>
+          </p:nvPr>
+        </p:nvSpPr>
+        <p:spPr/>
+      </p:sp>
+      <p:sp>
+        <p:nvSpPr>
+          <p:cNvPr id="3" name="Notes Placeholder 2"/>
+          <p:cNvSpPr>
+            <a:spLocks noGrp="1"/>
+          </p:cNvSpPr>
+          <p:nvPr>
+            <p:ph type="body" sz="quarter" idx="3"/>
+          </p:nvPr>
+        </p:nvSpPr>
+        <p:spPr/>
+        <p:txBody>
+          <a:bodyPr/>
+          <a:lstStyle/>
+          <a:p>
+            <a:r>
+              <a:t>Regulatory pressure (IEC 62443, NIS2) is a market pull.</a:t>
+            </a:r>
+          </a:p>
+          <a:p>
+            <a:endParaRPr/>
+          </a:p>
+          <a:p>
+            <a:r>
+              <a:t>General Speaker Notes:</a:t>
+            </a:r>
+          </a:p>
+          <a:p>
+            <a:r>
+              <a:t>- Keep tone conversational; stress how IEC 62443 and NIS2 drive demand.</a:t>
+            </a:r>
+          </a:p>
+          <a:p>
+            <a:r>
+              <a:t>- Emphasize Swedish research roots (MDU) and global scalability.</a:t>
+            </a:r>
+          </a:p>
+          <a:p>
+            <a:r>
+              <a:t>- Finish with a clear ask and pilot goal.</a:t>
+            </a:r>
+          </a:p>
+        </p:txBody>
+      </p:sp>
+      <p:sp>
+        <p:nvSpPr>
+          <p:cNvPr id="4" name="Slide Number Placeholder 3"/>
+          <p:cNvSpPr>
+            <a:spLocks noGrp="1"/>
+          </p:cNvSpPr>
+          <p:nvPr>
+            <p:ph type="sldNum" sz="quarter" idx="5"/>
+          </p:nvPr>
+        </p:nvSpPr>
+        <p:spPr/>
+      </p:sp>
+    </p:spTree>
+  </p:cSld>
+  <p:clrMapOvr>
+    <a:masterClrMapping/>
+  </p:clrMapOvr>
+</p:notes>
+</file>
+
+<file path=ppt/notesSlides/notesSlide20.xml><?xml version="1.0" encoding="utf-8"?>
 <p:notes xmlns:a="http://schemas.openxmlformats.org/drawingml/2006/main" xmlns:p="http://schemas.openxmlformats.org/presentationml/2006/main" xmlns:r="http://schemas.openxmlformats.org/officeDocument/2006/relationships">
   <p:cSld>
     <p:spTree>
@@ -831,57 +1105,6 @@
           <a:chExt cx="0" cy="0"/>
         </a:xfrm>
       </p:grpSpPr>
-      <p:sp>
-        <p:nvSpPr>
-          <p:cNvPr id="2" name="Slide Image Placeholder 1"/>
-          <p:cNvSpPr>
-            <a:spLocks noGrp="1"/>
-          </p:cNvSpPr>
-          <p:nvPr>
-            <p:ph type="sldImg" idx="2"/>
-          </p:nvPr>
-        </p:nvSpPr>
-        <p:spPr/>
-      </p:sp>
-      <p:sp>
-        <p:nvSpPr>
-          <p:cNvPr id="3" name="Notes Placeholder 2"/>
-          <p:cNvSpPr>
-            <a:spLocks noGrp="1"/>
-          </p:cNvSpPr>
-          <p:nvPr>
-            <p:ph type="body" idx="3" sz="quarter"/>
-          </p:nvPr>
-        </p:nvSpPr>
-        <p:spPr/>
-        <p:txBody>
-          <a:bodyPr/>
-          <a:lstStyle/>
-          <a:p>
-            <a:r>
-              <a:t>Thank you. Let's build a secure future together.</a:t>
-            </a:r>
-          </a:p>
-          <a:p/>
-          <a:p>
-            <a:r>
-              <a:t>I'm happy to take your questions.</a:t>
-            </a:r>
-          </a:p>
-        </p:txBody>
-      </p:sp>
-      <p:sp>
-        <p:nvSpPr>
-          <p:cNvPr id="4" name="Slide Number Placeholder 3"/>
-          <p:cNvSpPr>
-            <a:spLocks noGrp="1"/>
-          </p:cNvSpPr>
-          <p:nvPr>
-            <p:ph type="sldNum" idx="5" sz="quarter"/>
-          </p:nvPr>
-        </p:nvSpPr>
-        <p:spPr/>
-      </p:sp>
     </p:spTree>
   </p:cSld>
   <p:clrMapOvr>
@@ -890,7 +1113,7 @@
 </p:notes>
 </file>
 
-<file path=ppt/notesSlides/notesSlide2.xml><?xml version="1.0" encoding="utf-8"?>
+<file path=ppt/notesSlides/notesSlide21.xml><?xml version="1.0" encoding="utf-8"?>
 <p:notes xmlns:a="http://schemas.openxmlformats.org/drawingml/2006/main" xmlns:p="http://schemas.openxmlformats.org/presentationml/2006/main" xmlns:r="http://schemas.openxmlformats.org/officeDocument/2006/relationships">
   <p:cSld>
     <p:spTree>
@@ -907,68 +1130,6 @@
           <a:chExt cx="0" cy="0"/>
         </a:xfrm>
       </p:grpSpPr>
-      <p:sp>
-        <p:nvSpPr>
-          <p:cNvPr id="2" name="Slide Image Placeholder 1"/>
-          <p:cNvSpPr>
-            <a:spLocks noGrp="1"/>
-          </p:cNvSpPr>
-          <p:nvPr>
-            <p:ph type="sldImg" idx="2"/>
-          </p:nvPr>
-        </p:nvSpPr>
-        <p:spPr/>
-      </p:sp>
-      <p:sp>
-        <p:nvSpPr>
-          <p:cNvPr id="3" name="Notes Placeholder 2"/>
-          <p:cNvSpPr>
-            <a:spLocks noGrp="1"/>
-          </p:cNvSpPr>
-          <p:nvPr>
-            <p:ph type="body" idx="3" sz="quarter"/>
-          </p:nvPr>
-        </p:nvSpPr>
-        <p:spPr/>
-        <p:txBody>
-          <a:bodyPr/>
-          <a:lstStyle/>
-          <a:p>
-            <a:r>
-              <a:t>We are racing towards a world with 75 billion connected devices.</a:t>
-            </a:r>
-          </a:p>
-          <a:p/>
-          <a:p>
-            <a:r>
-              <a:t>But here is the problem: The security tools we use for laptops and servers simply do not fit on these tiny chips.</a:t>
-            </a:r>
-          </a:p>
-          <a:p/>
-          <a:p>
-            <a:r>
-              <a:t>This leaves our most critical infrastructure—energy grids, hospitals, factories—wide open to attack.</a:t>
-            </a:r>
-          </a:p>
-          <a:p>
-            <a:r>
-              <a:t>Current solutions are too heavy, too expensive, or simply non-existent for the edge.</a:t>
-            </a:r>
-          </a:p>
-        </p:txBody>
-      </p:sp>
-      <p:sp>
-        <p:nvSpPr>
-          <p:cNvPr id="4" name="Slide Number Placeholder 3"/>
-          <p:cNvSpPr>
-            <a:spLocks noGrp="1"/>
-          </p:cNvSpPr>
-          <p:nvPr>
-            <p:ph type="sldNum" idx="5" sz="quarter"/>
-          </p:nvPr>
-        </p:nvSpPr>
-        <p:spPr/>
-      </p:sp>
     </p:spTree>
   </p:cSld>
   <p:clrMapOvr>
@@ -977,7 +1138,7 @@
 </p:notes>
 </file>
 
-<file path=ppt/notesSlides/notesSlide3.xml><?xml version="1.0" encoding="utf-8"?>
+<file path=ppt/notesSlides/notesSlide22.xml><?xml version="1.0" encoding="utf-8"?>
 <p:notes xmlns:a="http://schemas.openxmlformats.org/drawingml/2006/main" xmlns:p="http://schemas.openxmlformats.org/presentationml/2006/main" xmlns:r="http://schemas.openxmlformats.org/officeDocument/2006/relationships">
   <p:cSld>
     <p:spTree>
@@ -994,69 +1155,6 @@
           <a:chExt cx="0" cy="0"/>
         </a:xfrm>
       </p:grpSpPr>
-      <p:sp>
-        <p:nvSpPr>
-          <p:cNvPr id="2" name="Slide Image Placeholder 1"/>
-          <p:cNvSpPr>
-            <a:spLocks noGrp="1"/>
-          </p:cNvSpPr>
-          <p:nvPr>
-            <p:ph type="sldImg" idx="2"/>
-          </p:nvPr>
-        </p:nvSpPr>
-        <p:spPr/>
-      </p:sp>
-      <p:sp>
-        <p:nvSpPr>
-          <p:cNvPr id="3" name="Notes Placeholder 2"/>
-          <p:cNvSpPr>
-            <a:spLocks noGrp="1"/>
-          </p:cNvSpPr>
-          <p:nvPr>
-            <p:ph type="body" idx="3" sz="quarter"/>
-          </p:nvPr>
-        </p:nvSpPr>
-        <p:spPr/>
-        <p:txBody>
-          <a:bodyPr/>
-          <a:lstStyle/>
-          <a:p>
-            <a:r>
-              <a:t>So, why is this the right time for LambdaIDS? Because the rules of the game have changed.</a:t>
-            </a:r>
-          </a:p>
-          <a:p/>
-          <a:p>
-            <a:r>
-              <a:t>With the EU Cyber Resilience Act, security is no longer a 'nice-to-have'. It is the law.</a:t>
-            </a:r>
-          </a:p>
-          <a:p/>
-          <a:p>
-            <a:r>
-              <a:t>If a device is not secure by design, it cannot be sold in the EU. Period.</a:t>
-            </a:r>
-          </a:p>
-          <a:p/>
-          <a:p>
-            <a:r>
-              <a:t>Manufacturers are panicking. They are hardware experts, not security experts. They need a drop-in solution to stay in business.</a:t>
-            </a:r>
-          </a:p>
-        </p:txBody>
-      </p:sp>
-      <p:sp>
-        <p:nvSpPr>
-          <p:cNvPr id="4" name="Slide Number Placeholder 3"/>
-          <p:cNvSpPr>
-            <a:spLocks noGrp="1"/>
-          </p:cNvSpPr>
-          <p:nvPr>
-            <p:ph type="sldNum" idx="5" sz="quarter"/>
-          </p:nvPr>
-        </p:nvSpPr>
-        <p:spPr/>
-      </p:sp>
     </p:spTree>
   </p:cSld>
   <p:clrMapOvr>
@@ -1065,7 +1163,7 @@
 </p:notes>
 </file>
 
-<file path=ppt/notesSlides/notesSlide4.xml><?xml version="1.0" encoding="utf-8"?>
+<file path=ppt/notesSlides/notesSlide23.xml><?xml version="1.0" encoding="utf-8"?>
 <p:notes xmlns:a="http://schemas.openxmlformats.org/drawingml/2006/main" xmlns:p="http://schemas.openxmlformats.org/presentationml/2006/main" xmlns:r="http://schemas.openxmlformats.org/officeDocument/2006/relationships">
   <p:cSld>
     <p:spTree>
@@ -1082,69 +1180,6 @@
           <a:chExt cx="0" cy="0"/>
         </a:xfrm>
       </p:grpSpPr>
-      <p:sp>
-        <p:nvSpPr>
-          <p:cNvPr id="2" name="Slide Image Placeholder 1"/>
-          <p:cNvSpPr>
-            <a:spLocks noGrp="1"/>
-          </p:cNvSpPr>
-          <p:nvPr>
-            <p:ph type="sldImg" idx="2"/>
-          </p:nvPr>
-        </p:nvSpPr>
-        <p:spPr/>
-      </p:sp>
-      <p:sp>
-        <p:nvSpPr>
-          <p:cNvPr id="3" name="Notes Placeholder 2"/>
-          <p:cNvSpPr>
-            <a:spLocks noGrp="1"/>
-          </p:cNvSpPr>
-          <p:nvPr>
-            <p:ph type="body" idx="3" sz="quarter"/>
-          </p:nvPr>
-        </p:nvSpPr>
-        <p:spPr/>
-        <p:txBody>
-          <a:bodyPr/>
-          <a:lstStyle/>
-          <a:p>
-            <a:r>
-              <a:t>Enter LambdaIDS.</a:t>
-            </a:r>
-          </a:p>
-          <a:p/>
-          <a:p>
-            <a:r>
-              <a:t>Think of it as an autonomous immune system for every device.</a:t>
-            </a:r>
-          </a:p>
-          <a:p/>
-          <a:p>
-            <a:r>
-              <a:t>It sits right on the microcontroller. It learns what 'normal' looks like and blocks anomalies in real-time.</a:t>
-            </a:r>
-          </a:p>
-          <a:p/>
-          <a:p>
-            <a:r>
-              <a:t>It doesn't need the cloud. It doesn't drain the battery. And most importantly, it makes compliance easy for the manufacturer.</a:t>
-            </a:r>
-          </a:p>
-        </p:txBody>
-      </p:sp>
-      <p:sp>
-        <p:nvSpPr>
-          <p:cNvPr id="4" name="Slide Number Placeholder 3"/>
-          <p:cNvSpPr>
-            <a:spLocks noGrp="1"/>
-          </p:cNvSpPr>
-          <p:nvPr>
-            <p:ph type="sldNum" idx="5" sz="quarter"/>
-          </p:nvPr>
-        </p:nvSpPr>
-        <p:spPr/>
-      </p:sp>
     </p:spTree>
   </p:cSld>
   <p:clrMapOvr>
@@ -1153,7 +1188,7 @@
 </p:notes>
 </file>
 
-<file path=ppt/notesSlides/notesSlide5.xml><?xml version="1.0" encoding="utf-8"?>
+<file path=ppt/notesSlides/notesSlide24.xml><?xml version="1.0" encoding="utf-8"?>
 <p:notes xmlns:a="http://schemas.openxmlformats.org/drawingml/2006/main" xmlns:p="http://schemas.openxmlformats.org/presentationml/2006/main" xmlns:r="http://schemas.openxmlformats.org/officeDocument/2006/relationships">
   <p:cSld>
     <p:spTree>
@@ -1170,69 +1205,6 @@
           <a:chExt cx="0" cy="0"/>
         </a:xfrm>
       </p:grpSpPr>
-      <p:sp>
-        <p:nvSpPr>
-          <p:cNvPr id="2" name="Slide Image Placeholder 1"/>
-          <p:cNvSpPr>
-            <a:spLocks noGrp="1"/>
-          </p:cNvSpPr>
-          <p:nvPr>
-            <p:ph type="sldImg" idx="2"/>
-          </p:nvPr>
-        </p:nvSpPr>
-        <p:spPr/>
-      </p:sp>
-      <p:sp>
-        <p:nvSpPr>
-          <p:cNvPr id="3" name="Notes Placeholder 2"/>
-          <p:cNvSpPr>
-            <a:spLocks noGrp="1"/>
-          </p:cNvSpPr>
-          <p:nvPr>
-            <p:ph type="body" idx="3" sz="quarter"/>
-          </p:nvPr>
-        </p:nvSpPr>
-        <p:spPr/>
-        <p:txBody>
-          <a:bodyPr/>
-          <a:lstStyle/>
-          <a:p>
-            <a:r>
-              <a:t>Traditional security sends data to the cloud to be checked. That's slow, expensive, and risky.</a:t>
-            </a:r>
-          </a:p>
-          <a:p/>
-          <a:p>
-            <a:r>
-              <a:t>LambdaIDS processes everything locally.</a:t>
-            </a:r>
-          </a:p>
-          <a:p/>
-          <a:p>
-            <a:r>
-              <a:t>This means we catch attacks in milliseconds, not minutes. We work even when the internet is down.</a:t>
-            </a:r>
-          </a:p>
-          <a:p/>
-          <a:p>
-            <a:r>
-              <a:t>And we do it with a fraction of the energy.</a:t>
-            </a:r>
-          </a:p>
-        </p:txBody>
-      </p:sp>
-      <p:sp>
-        <p:nvSpPr>
-          <p:cNvPr id="4" name="Slide Number Placeholder 3"/>
-          <p:cNvSpPr>
-            <a:spLocks noGrp="1"/>
-          </p:cNvSpPr>
-          <p:nvPr>
-            <p:ph type="sldNum" idx="5" sz="quarter"/>
-          </p:nvPr>
-        </p:nvSpPr>
-        <p:spPr/>
-      </p:sp>
     </p:spTree>
   </p:cSld>
   <p:clrMapOvr>
@@ -1241,7 +1213,7 @@
 </p:notes>
 </file>
 
-<file path=ppt/notesSlides/notesSlide6.xml><?xml version="1.0" encoding="utf-8"?>
+<file path=ppt/notesSlides/notesSlide25.xml><?xml version="1.0" encoding="utf-8"?>
 <p:notes xmlns:a="http://schemas.openxmlformats.org/drawingml/2006/main" xmlns:p="http://schemas.openxmlformats.org/presentationml/2006/main" xmlns:r="http://schemas.openxmlformats.org/officeDocument/2006/relationships">
   <p:cSld>
     <p:spTree>
@@ -1258,69 +1230,6 @@
           <a:chExt cx="0" cy="0"/>
         </a:xfrm>
       </p:grpSpPr>
-      <p:sp>
-        <p:nvSpPr>
-          <p:cNvPr id="2" name="Slide Image Placeholder 1"/>
-          <p:cNvSpPr>
-            <a:spLocks noGrp="1"/>
-          </p:cNvSpPr>
-          <p:nvPr>
-            <p:ph type="sldImg" idx="2"/>
-          </p:nvPr>
-        </p:nvSpPr>
-        <p:spPr/>
-      </p:sp>
-      <p:sp>
-        <p:nvSpPr>
-          <p:cNvPr id="3" name="Notes Placeholder 2"/>
-          <p:cNvSpPr>
-            <a:spLocks noGrp="1"/>
-          </p:cNvSpPr>
-          <p:nvPr>
-            <p:ph type="body" idx="3" sz="quarter"/>
-          </p:nvPr>
-        </p:nvSpPr>
-        <p:spPr/>
-        <p:txBody>
-          <a:bodyPr/>
-          <a:lstStyle/>
-          <a:p>
-            <a:r>
-              <a:t>The market opportunity is massive.</a:t>
-            </a:r>
-          </a:p>
-          <a:p/>
-          <a:p>
-            <a:r>
-              <a:t>The global IoT security market is over 30 billion dollars and growing fast.</a:t>
-            </a:r>
-          </a:p>
-          <a:p/>
-          <a:p>
-            <a:r>
-              <a:t>We are laser-focused on the high-value Industrial and Utility sectors first—our SAM is around 4 billion.</a:t>
-            </a:r>
-          </a:p>
-          <a:p/>
-          <a:p>
-            <a:r>
-              <a:t>Starting with the Nordics and expanding to MENA, we are targeting a reachable market of 100 million in the next 3 years.</a:t>
-            </a:r>
-          </a:p>
-        </p:txBody>
-      </p:sp>
-      <p:sp>
-        <p:nvSpPr>
-          <p:cNvPr id="4" name="Slide Number Placeholder 3"/>
-          <p:cNvSpPr>
-            <a:spLocks noGrp="1"/>
-          </p:cNvSpPr>
-          <p:nvPr>
-            <p:ph type="sldNum" idx="5" sz="quarter"/>
-          </p:nvPr>
-        </p:nvSpPr>
-        <p:spPr/>
-      </p:sp>
     </p:spTree>
   </p:cSld>
   <p:clrMapOvr>
@@ -1329,7 +1238,7 @@
 </p:notes>
 </file>
 
-<file path=ppt/notesSlides/notesSlide7.xml><?xml version="1.0" encoding="utf-8"?>
+<file path=ppt/notesSlides/notesSlide26.xml><?xml version="1.0" encoding="utf-8"?>
 <p:notes xmlns:a="http://schemas.openxmlformats.org/drawingml/2006/main" xmlns:p="http://schemas.openxmlformats.org/presentationml/2006/main" xmlns:r="http://schemas.openxmlformats.org/officeDocument/2006/relationships">
   <p:cSld>
     <p:spTree>
@@ -1346,69 +1255,6 @@
           <a:chExt cx="0" cy="0"/>
         </a:xfrm>
       </p:grpSpPr>
-      <p:sp>
-        <p:nvSpPr>
-          <p:cNvPr id="2" name="Slide Image Placeholder 1"/>
-          <p:cNvSpPr>
-            <a:spLocks noGrp="1"/>
-          </p:cNvSpPr>
-          <p:nvPr>
-            <p:ph type="sldImg" idx="2"/>
-          </p:nvPr>
-        </p:nvSpPr>
-        <p:spPr/>
-      </p:sp>
-      <p:sp>
-        <p:nvSpPr>
-          <p:cNvPr id="3" name="Notes Placeholder 2"/>
-          <p:cNvSpPr>
-            <a:spLocks noGrp="1"/>
-          </p:cNvSpPr>
-          <p:nvPr>
-            <p:ph type="body" idx="3" sz="quarter"/>
-          </p:nvPr>
-        </p:nvSpPr>
-        <p:spPr/>
-        <p:txBody>
-          <a:bodyPr/>
-          <a:lstStyle/>
-          <a:p>
-            <a:r>
-              <a:t>How do we make money?</a:t>
-            </a:r>
-          </a:p>
-          <a:p/>
-          <a:p>
-            <a:r>
-              <a:t>We are a software company. We license our SDK to device manufacturers.</a:t>
-            </a:r>
-          </a:p>
-          <a:p/>
-          <a:p>
-            <a:r>
-              <a:t>It's a scalable B2B model with high margins. We charge a per-device fee, or an annual subscription for advanced fleet analytics.</a:t>
-            </a:r>
-          </a:p>
-          <a:p/>
-          <a:p>
-            <a:r>
-              <a:t>Currently, we are engaging in paid pilots to fine-tune the product with top-tier industrial partners.</a:t>
-            </a:r>
-          </a:p>
-        </p:txBody>
-      </p:sp>
-      <p:sp>
-        <p:nvSpPr>
-          <p:cNvPr id="4" name="Slide Number Placeholder 3"/>
-          <p:cNvSpPr>
-            <a:spLocks noGrp="1"/>
-          </p:cNvSpPr>
-          <p:nvPr>
-            <p:ph type="sldNum" idx="5" sz="quarter"/>
-          </p:nvPr>
-        </p:nvSpPr>
-        <p:spPr/>
-      </p:sp>
     </p:spTree>
   </p:cSld>
   <p:clrMapOvr>
@@ -1417,7 +1263,7 @@
 </p:notes>
 </file>
 
-<file path=ppt/notesSlides/notesSlide8.xml><?xml version="1.0" encoding="utf-8"?>
+<file path=ppt/notesSlides/notesSlide27.xml><?xml version="1.0" encoding="utf-8"?>
 <p:notes xmlns:a="http://schemas.openxmlformats.org/drawingml/2006/main" xmlns:p="http://schemas.openxmlformats.org/presentationml/2006/main" xmlns:r="http://schemas.openxmlformats.org/officeDocument/2006/relationships">
   <p:cSld>
     <p:spTree>
@@ -1434,69 +1280,6 @@
           <a:chExt cx="0" cy="0"/>
         </a:xfrm>
       </p:grpSpPr>
-      <p:sp>
-        <p:nvSpPr>
-          <p:cNvPr id="2" name="Slide Image Placeholder 1"/>
-          <p:cNvSpPr>
-            <a:spLocks noGrp="1"/>
-          </p:cNvSpPr>
-          <p:nvPr>
-            <p:ph type="sldImg" idx="2"/>
-          </p:nvPr>
-        </p:nvSpPr>
-        <p:spPr/>
-      </p:sp>
-      <p:sp>
-        <p:nvSpPr>
-          <p:cNvPr id="3" name="Notes Placeholder 2"/>
-          <p:cNvSpPr>
-            <a:spLocks noGrp="1"/>
-          </p:cNvSpPr>
-          <p:nvPr>
-            <p:ph type="body" idx="3" sz="quarter"/>
-          </p:nvPr>
-        </p:nvSpPr>
-        <p:spPr/>
-        <p:txBody>
-          <a:bodyPr/>
-          <a:lstStyle/>
-          <a:p>
-            <a:r>
-              <a:t>We aren't just an idea. We have real traction.</a:t>
-            </a:r>
-          </a:p>
-          <a:p/>
-          <a:p>
-            <a:r>
-              <a:t>We are collaborating with Combitech and RISE, validating our tech against the toughest standards.</a:t>
-            </a:r>
-          </a:p>
-          <a:p/>
-          <a:p>
-            <a:r>
-              <a:t>We have secured grant funding, proving the novelty of our technology.</a:t>
-            </a:r>
-          </a:p>
-          <a:p/>
-          <a:p>
-            <a:r>
-              <a:t>And we are already in talks with major players in the industrial automation space.</a:t>
-            </a:r>
-          </a:p>
-        </p:txBody>
-      </p:sp>
-      <p:sp>
-        <p:nvSpPr>
-          <p:cNvPr id="4" name="Slide Number Placeholder 3"/>
-          <p:cNvSpPr>
-            <a:spLocks noGrp="1"/>
-          </p:cNvSpPr>
-          <p:nvPr>
-            <p:ph type="sldNum" idx="5" sz="quarter"/>
-          </p:nvPr>
-        </p:nvSpPr>
-        <p:spPr/>
-      </p:sp>
     </p:spTree>
   </p:cSld>
   <p:clrMapOvr>
@@ -1505,7 +1288,7 @@
 </p:notes>
 </file>
 
-<file path=ppt/notesSlides/notesSlide9.xml><?xml version="1.0" encoding="utf-8"?>
+<file path=ppt/notesSlides/notesSlide28.xml><?xml version="1.0" encoding="utf-8"?>
 <p:notes xmlns:a="http://schemas.openxmlformats.org/drawingml/2006/main" xmlns:p="http://schemas.openxmlformats.org/presentationml/2006/main" xmlns:r="http://schemas.openxmlformats.org/officeDocument/2006/relationships">
   <p:cSld>
     <p:spTree>
@@ -1522,11 +1305,36 @@
           <a:chExt cx="0" cy="0"/>
         </a:xfrm>
       </p:grpSpPr>
+    </p:spTree>
+  </p:cSld>
+  <p:clrMapOvr>
+    <a:masterClrMapping/>
+  </p:clrMapOvr>
+</p:notes>
+</file>
+
+<file path=ppt/notesSlides/notesSlide3.xml><?xml version="1.0" encoding="utf-8"?>
+<p:notes xmlns:a="http://schemas.openxmlformats.org/drawingml/2006/main" xmlns:r="http://schemas.openxmlformats.org/officeDocument/2006/relationships" xmlns:p="http://schemas.openxmlformats.org/presentationml/2006/main">
+  <p:cSld>
+    <p:spTree>
+      <p:nvGrpSpPr>
+        <p:cNvPr id="1" name=""/>
+        <p:cNvGrpSpPr/>
+        <p:nvPr/>
+      </p:nvGrpSpPr>
+      <p:grpSpPr>
+        <a:xfrm>
+          <a:off x="0" y="0"/>
+          <a:ext cx="0" cy="0"/>
+          <a:chOff x="0" y="0"/>
+          <a:chExt cx="0" cy="0"/>
+        </a:xfrm>
+      </p:grpSpPr>
       <p:sp>
         <p:nvSpPr>
           <p:cNvPr id="2" name="Slide Image Placeholder 1"/>
           <p:cNvSpPr>
-            <a:spLocks noGrp="1"/>
+            <a:spLocks noGrp="1" noRot="1" noChangeAspect="1"/>
           </p:cNvSpPr>
           <p:nvPr>
             <p:ph type="sldImg" idx="2"/>
@@ -1541,34 +1349,31 @@
             <a:spLocks noGrp="1"/>
           </p:cNvSpPr>
           <p:nvPr>
-            <p:ph type="body" idx="3" sz="quarter"/>
-          </p:nvPr>
-        </p:nvSpPr>
-        <p:spPr/>
-        <p:txBody>
-          <a:bodyPr/>
-          <a:lstStyle/>
-          <a:p>
-            <a:r>
-              <a:t>When you look at the competition, there is a clear gap.</a:t>
-            </a:r>
-          </a:p>
-          <a:p/>
-          <a:p>
-            <a:r>
-              <a:t>Cloud solutions like Darktrace are too heavy. Legacy firewalls are too dumb—they can't stop new attacks.</a:t>
-            </a:r>
-          </a:p>
-          <a:p/>
-          <a:p>
-            <a:r>
-              <a:t>LambdaIDS is the only solution that brings smart, adaptive AI to the smallest chips.</a:t>
-            </a:r>
-          </a:p>
-          <a:p/>
-          <a:p>
-            <a:r>
-              <a:t>Our moat lies in our proprietary algorithms that squeeze this intelligence into less than 100 kilobytes.</a:t>
+            <p:ph type="body" sz="quarter" idx="3"/>
+          </p:nvPr>
+        </p:nvSpPr>
+        <p:spPr/>
+        <p:txBody>
+          <a:bodyPr/>
+          <a:lstStyle/>
+          <a:p>
+            <a:r>
+              <a:t>General Speaker Notes:</a:t>
+            </a:r>
+          </a:p>
+          <a:p>
+            <a:r>
+              <a:t>- Keep tone conversational; stress how IEC 62443 and NIS2 drive demand.</a:t>
+            </a:r>
+          </a:p>
+          <a:p>
+            <a:r>
+              <a:t>- Emphasize Swedish research roots (MDU) and global scalability.</a:t>
+            </a:r>
+          </a:p>
+          <a:p>
+            <a:r>
+              <a:t>- Finish with a clear ask and pilot goal.</a:t>
             </a:r>
           </a:p>
         </p:txBody>
@@ -1580,7 +1385,612 @@
             <a:spLocks noGrp="1"/>
           </p:cNvSpPr>
           <p:nvPr>
-            <p:ph type="sldNum" idx="5" sz="quarter"/>
+            <p:ph type="sldNum" sz="quarter" idx="5"/>
+          </p:nvPr>
+        </p:nvSpPr>
+        <p:spPr/>
+      </p:sp>
+    </p:spTree>
+  </p:cSld>
+  <p:clrMapOvr>
+    <a:masterClrMapping/>
+  </p:clrMapOvr>
+</p:notes>
+</file>
+
+<file path=ppt/notesSlides/notesSlide4.xml><?xml version="1.0" encoding="utf-8"?>
+<p:notes xmlns:a="http://schemas.openxmlformats.org/drawingml/2006/main" xmlns:r="http://schemas.openxmlformats.org/officeDocument/2006/relationships" xmlns:p="http://schemas.openxmlformats.org/presentationml/2006/main">
+  <p:cSld>
+    <p:spTree>
+      <p:nvGrpSpPr>
+        <p:cNvPr id="1" name=""/>
+        <p:cNvGrpSpPr/>
+        <p:nvPr/>
+      </p:nvGrpSpPr>
+      <p:grpSpPr>
+        <a:xfrm>
+          <a:off x="0" y="0"/>
+          <a:ext cx="0" cy="0"/>
+          <a:chOff x="0" y="0"/>
+          <a:chExt cx="0" cy="0"/>
+        </a:xfrm>
+      </p:grpSpPr>
+      <p:sp>
+        <p:nvSpPr>
+          <p:cNvPr id="2" name="Slide Image Placeholder 1"/>
+          <p:cNvSpPr>
+            <a:spLocks noGrp="1" noRot="1" noChangeAspect="1"/>
+          </p:cNvSpPr>
+          <p:nvPr>
+            <p:ph type="sldImg" idx="2"/>
+          </p:nvPr>
+        </p:nvSpPr>
+        <p:spPr/>
+      </p:sp>
+      <p:sp>
+        <p:nvSpPr>
+          <p:cNvPr id="3" name="Notes Placeholder 2"/>
+          <p:cNvSpPr>
+            <a:spLocks noGrp="1"/>
+          </p:cNvSpPr>
+          <p:nvPr>
+            <p:ph type="body" sz="quarter" idx="3"/>
+          </p:nvPr>
+        </p:nvSpPr>
+        <p:spPr/>
+        <p:txBody>
+          <a:bodyPr/>
+          <a:lstStyle/>
+          <a:p>
+            <a:r>
+              <a:t>General Speaker Notes:</a:t>
+            </a:r>
+          </a:p>
+          <a:p>
+            <a:r>
+              <a:t>- Keep tone conversational; stress how IEC 62443 and NIS2 drive demand.</a:t>
+            </a:r>
+          </a:p>
+          <a:p>
+            <a:r>
+              <a:t>- Emphasize Swedish research roots (MDU) and global scalability.</a:t>
+            </a:r>
+          </a:p>
+          <a:p>
+            <a:r>
+              <a:t>- Finish with a clear ask and pilot goal.</a:t>
+            </a:r>
+          </a:p>
+        </p:txBody>
+      </p:sp>
+      <p:sp>
+        <p:nvSpPr>
+          <p:cNvPr id="4" name="Slide Number Placeholder 3"/>
+          <p:cNvSpPr>
+            <a:spLocks noGrp="1"/>
+          </p:cNvSpPr>
+          <p:nvPr>
+            <p:ph type="sldNum" sz="quarter" idx="5"/>
+          </p:nvPr>
+        </p:nvSpPr>
+        <p:spPr/>
+      </p:sp>
+    </p:spTree>
+  </p:cSld>
+  <p:clrMapOvr>
+    <a:masterClrMapping/>
+  </p:clrMapOvr>
+</p:notes>
+</file>
+
+<file path=ppt/notesSlides/notesSlide5.xml><?xml version="1.0" encoding="utf-8"?>
+<p:notes xmlns:a="http://schemas.openxmlformats.org/drawingml/2006/main" xmlns:r="http://schemas.openxmlformats.org/officeDocument/2006/relationships" xmlns:p="http://schemas.openxmlformats.org/presentationml/2006/main">
+  <p:cSld>
+    <p:spTree>
+      <p:nvGrpSpPr>
+        <p:cNvPr id="1" name="">
+          <a:extLst>
+            <a:ext uri="{FF2B5EF4-FFF2-40B4-BE49-F238E27FC236}">
+              <a16:creationId xmlns:a16="http://schemas.microsoft.com/office/drawing/2014/main" id="{A70EF8FA-7524-5448-F851-753A113015EB}"/>
+            </a:ext>
+          </a:extLst>
+        </p:cNvPr>
+        <p:cNvGrpSpPr/>
+        <p:nvPr/>
+      </p:nvGrpSpPr>
+      <p:grpSpPr>
+        <a:xfrm>
+          <a:off x="0" y="0"/>
+          <a:ext cx="0" cy="0"/>
+          <a:chOff x="0" y="0"/>
+          <a:chExt cx="0" cy="0"/>
+        </a:xfrm>
+      </p:grpSpPr>
+      <p:sp>
+        <p:nvSpPr>
+          <p:cNvPr id="2" name="Slide Image Placeholder 1">
+            <a:extLst>
+              <a:ext uri="{FF2B5EF4-FFF2-40B4-BE49-F238E27FC236}">
+                <a16:creationId xmlns:a16="http://schemas.microsoft.com/office/drawing/2014/main" id="{AD7866BD-B664-70DF-FD95-ABAF2C47F403}"/>
+              </a:ext>
+            </a:extLst>
+          </p:cNvPr>
+          <p:cNvSpPr>
+            <a:spLocks noGrp="1" noRot="1" noChangeAspect="1"/>
+          </p:cNvSpPr>
+          <p:nvPr>
+            <p:ph type="sldImg" idx="2"/>
+          </p:nvPr>
+        </p:nvSpPr>
+        <p:spPr/>
+      </p:sp>
+      <p:sp>
+        <p:nvSpPr>
+          <p:cNvPr id="3" name="Notes Placeholder 2">
+            <a:extLst>
+              <a:ext uri="{FF2B5EF4-FFF2-40B4-BE49-F238E27FC236}">
+                <a16:creationId xmlns:a16="http://schemas.microsoft.com/office/drawing/2014/main" id="{A2E2B804-89FB-C034-4C9E-5C597487E054}"/>
+              </a:ext>
+            </a:extLst>
+          </p:cNvPr>
+          <p:cNvSpPr>
+            <a:spLocks noGrp="1"/>
+          </p:cNvSpPr>
+          <p:nvPr>
+            <p:ph type="body" sz="quarter" idx="3"/>
+          </p:nvPr>
+        </p:nvSpPr>
+        <p:spPr/>
+        <p:txBody>
+          <a:bodyPr/>
+          <a:lstStyle/>
+          <a:p>
+            <a:r>
+              <a:t>General Speaker Notes:</a:t>
+            </a:r>
+          </a:p>
+          <a:p>
+            <a:r>
+              <a:t>- Keep tone conversational; stress how IEC 62443 and NIS2 drive demand.</a:t>
+            </a:r>
+          </a:p>
+          <a:p>
+            <a:r>
+              <a:t>- Emphasize Swedish research roots (MDU) and global scalability.</a:t>
+            </a:r>
+          </a:p>
+          <a:p>
+            <a:r>
+              <a:t>- Finish with a clear ask and pilot goal.</a:t>
+            </a:r>
+          </a:p>
+        </p:txBody>
+      </p:sp>
+      <p:sp>
+        <p:nvSpPr>
+          <p:cNvPr id="4" name="Slide Number Placeholder 3">
+            <a:extLst>
+              <a:ext uri="{FF2B5EF4-FFF2-40B4-BE49-F238E27FC236}">
+                <a16:creationId xmlns:a16="http://schemas.microsoft.com/office/drawing/2014/main" id="{D2BF97A7-4522-4C0D-30FB-E74852B05DB8}"/>
+              </a:ext>
+            </a:extLst>
+          </p:cNvPr>
+          <p:cNvSpPr>
+            <a:spLocks noGrp="1"/>
+          </p:cNvSpPr>
+          <p:nvPr>
+            <p:ph type="sldNum" sz="quarter" idx="5"/>
+          </p:nvPr>
+        </p:nvSpPr>
+        <p:spPr/>
+      </p:sp>
+    </p:spTree>
+    <p:extLst>
+      <p:ext uri="{BB962C8B-B14F-4D97-AF65-F5344CB8AC3E}">
+        <p14:creationId xmlns:p14="http://schemas.microsoft.com/office/powerpoint/2010/main" val="3386208232"/>
+      </p:ext>
+    </p:extLst>
+  </p:cSld>
+  <p:clrMapOvr>
+    <a:masterClrMapping/>
+  </p:clrMapOvr>
+</p:notes>
+</file>
+
+<file path=ppt/notesSlides/notesSlide6.xml><?xml version="1.0" encoding="utf-8"?>
+<p:notes xmlns:a="http://schemas.openxmlformats.org/drawingml/2006/main" xmlns:r="http://schemas.openxmlformats.org/officeDocument/2006/relationships" xmlns:p="http://schemas.openxmlformats.org/presentationml/2006/main">
+  <p:cSld>
+    <p:spTree>
+      <p:nvGrpSpPr>
+        <p:cNvPr id="1" name="">
+          <a:extLst>
+            <a:ext uri="{FF2B5EF4-FFF2-40B4-BE49-F238E27FC236}">
+              <a16:creationId xmlns:a16="http://schemas.microsoft.com/office/drawing/2014/main" id="{CFBA00A1-B4B6-BC62-D192-C9EF6F63181B}"/>
+            </a:ext>
+          </a:extLst>
+        </p:cNvPr>
+        <p:cNvGrpSpPr/>
+        <p:nvPr/>
+      </p:nvGrpSpPr>
+      <p:grpSpPr>
+        <a:xfrm>
+          <a:off x="0" y="0"/>
+          <a:ext cx="0" cy="0"/>
+          <a:chOff x="0" y="0"/>
+          <a:chExt cx="0" cy="0"/>
+        </a:xfrm>
+      </p:grpSpPr>
+      <p:sp>
+        <p:nvSpPr>
+          <p:cNvPr id="2" name="Slide Image Placeholder 1">
+            <a:extLst>
+              <a:ext uri="{FF2B5EF4-FFF2-40B4-BE49-F238E27FC236}">
+                <a16:creationId xmlns:a16="http://schemas.microsoft.com/office/drawing/2014/main" id="{BD1E596B-FFC2-46BB-14E1-DAEF905B7C0E}"/>
+              </a:ext>
+            </a:extLst>
+          </p:cNvPr>
+          <p:cNvSpPr>
+            <a:spLocks noGrp="1" noRot="1" noChangeAspect="1"/>
+          </p:cNvSpPr>
+          <p:nvPr>
+            <p:ph type="sldImg" idx="2"/>
+          </p:nvPr>
+        </p:nvSpPr>
+        <p:spPr/>
+      </p:sp>
+      <p:sp>
+        <p:nvSpPr>
+          <p:cNvPr id="3" name="Notes Placeholder 2">
+            <a:extLst>
+              <a:ext uri="{FF2B5EF4-FFF2-40B4-BE49-F238E27FC236}">
+                <a16:creationId xmlns:a16="http://schemas.microsoft.com/office/drawing/2014/main" id="{7C4DB174-32E7-65C6-79E4-CAC6E24D2046}"/>
+              </a:ext>
+            </a:extLst>
+          </p:cNvPr>
+          <p:cNvSpPr>
+            <a:spLocks noGrp="1"/>
+          </p:cNvSpPr>
+          <p:nvPr>
+            <p:ph type="body" sz="quarter" idx="3"/>
+          </p:nvPr>
+        </p:nvSpPr>
+        <p:spPr/>
+        <p:txBody>
+          <a:bodyPr/>
+          <a:lstStyle/>
+          <a:p>
+            <a:r>
+              <a:t>General Speaker Notes:</a:t>
+            </a:r>
+          </a:p>
+          <a:p>
+            <a:r>
+              <a:t>- Keep tone conversational; stress how IEC 62443 and NIS2 drive demand.</a:t>
+            </a:r>
+          </a:p>
+          <a:p>
+            <a:r>
+              <a:t>- Emphasize Swedish research roots (MDU) and global scalability.</a:t>
+            </a:r>
+          </a:p>
+          <a:p>
+            <a:r>
+              <a:t>- Finish with a clear ask and pilot goal.</a:t>
+            </a:r>
+          </a:p>
+        </p:txBody>
+      </p:sp>
+      <p:sp>
+        <p:nvSpPr>
+          <p:cNvPr id="4" name="Slide Number Placeholder 3">
+            <a:extLst>
+              <a:ext uri="{FF2B5EF4-FFF2-40B4-BE49-F238E27FC236}">
+                <a16:creationId xmlns:a16="http://schemas.microsoft.com/office/drawing/2014/main" id="{B4042439-07A7-ECAC-CE10-6C372CB8EBA1}"/>
+              </a:ext>
+            </a:extLst>
+          </p:cNvPr>
+          <p:cNvSpPr>
+            <a:spLocks noGrp="1"/>
+          </p:cNvSpPr>
+          <p:nvPr>
+            <p:ph type="sldNum" sz="quarter" idx="5"/>
+          </p:nvPr>
+        </p:nvSpPr>
+        <p:spPr/>
+      </p:sp>
+    </p:spTree>
+    <p:extLst>
+      <p:ext uri="{BB962C8B-B14F-4D97-AF65-F5344CB8AC3E}">
+        <p14:creationId xmlns:p14="http://schemas.microsoft.com/office/powerpoint/2010/main" val="112583684"/>
+      </p:ext>
+    </p:extLst>
+  </p:cSld>
+  <p:clrMapOvr>
+    <a:masterClrMapping/>
+  </p:clrMapOvr>
+</p:notes>
+</file>
+
+<file path=ppt/notesSlides/notesSlide7.xml><?xml version="1.0" encoding="utf-8"?>
+<p:notes xmlns:a="http://schemas.openxmlformats.org/drawingml/2006/main" xmlns:r="http://schemas.openxmlformats.org/officeDocument/2006/relationships" xmlns:p="http://schemas.openxmlformats.org/presentationml/2006/main">
+  <p:cSld>
+    <p:spTree>
+      <p:nvGrpSpPr>
+        <p:cNvPr id="1" name="">
+          <a:extLst>
+            <a:ext uri="{FF2B5EF4-FFF2-40B4-BE49-F238E27FC236}">
+              <a16:creationId xmlns:a16="http://schemas.microsoft.com/office/drawing/2014/main" id="{2A67EE72-A653-2ED5-5EF4-0191EA6D0041}"/>
+            </a:ext>
+          </a:extLst>
+        </p:cNvPr>
+        <p:cNvGrpSpPr/>
+        <p:nvPr/>
+      </p:nvGrpSpPr>
+      <p:grpSpPr>
+        <a:xfrm>
+          <a:off x="0" y="0"/>
+          <a:ext cx="0" cy="0"/>
+          <a:chOff x="0" y="0"/>
+          <a:chExt cx="0" cy="0"/>
+        </a:xfrm>
+      </p:grpSpPr>
+      <p:sp>
+        <p:nvSpPr>
+          <p:cNvPr id="2" name="Slide Image Placeholder 1">
+            <a:extLst>
+              <a:ext uri="{FF2B5EF4-FFF2-40B4-BE49-F238E27FC236}">
+                <a16:creationId xmlns:a16="http://schemas.microsoft.com/office/drawing/2014/main" id="{E2F63D59-8222-66C0-12C1-ED654ECC27EC}"/>
+              </a:ext>
+            </a:extLst>
+          </p:cNvPr>
+          <p:cNvSpPr>
+            <a:spLocks noGrp="1" noRot="1" noChangeAspect="1"/>
+          </p:cNvSpPr>
+          <p:nvPr>
+            <p:ph type="sldImg" idx="2"/>
+          </p:nvPr>
+        </p:nvSpPr>
+        <p:spPr/>
+      </p:sp>
+      <p:sp>
+        <p:nvSpPr>
+          <p:cNvPr id="3" name="Notes Placeholder 2">
+            <a:extLst>
+              <a:ext uri="{FF2B5EF4-FFF2-40B4-BE49-F238E27FC236}">
+                <a16:creationId xmlns:a16="http://schemas.microsoft.com/office/drawing/2014/main" id="{E995F9C0-42EE-5F3B-33C4-8DCD2F9458F7}"/>
+              </a:ext>
+            </a:extLst>
+          </p:cNvPr>
+          <p:cNvSpPr>
+            <a:spLocks noGrp="1"/>
+          </p:cNvSpPr>
+          <p:nvPr>
+            <p:ph type="body" sz="quarter" idx="3"/>
+          </p:nvPr>
+        </p:nvSpPr>
+        <p:spPr/>
+        <p:txBody>
+          <a:bodyPr/>
+          <a:lstStyle/>
+          <a:p>
+            <a:r>
+              <a:t>General Speaker Notes:</a:t>
+            </a:r>
+          </a:p>
+          <a:p>
+            <a:r>
+              <a:t>- Keep tone conversational; stress how IEC 62443 and NIS2 drive demand.</a:t>
+            </a:r>
+          </a:p>
+          <a:p>
+            <a:r>
+              <a:t>- Emphasize Swedish research roots (MDU) and global scalability.</a:t>
+            </a:r>
+          </a:p>
+          <a:p>
+            <a:r>
+              <a:t>- Finish with a clear ask and pilot goal.</a:t>
+            </a:r>
+          </a:p>
+        </p:txBody>
+      </p:sp>
+      <p:sp>
+        <p:nvSpPr>
+          <p:cNvPr id="4" name="Slide Number Placeholder 3">
+            <a:extLst>
+              <a:ext uri="{FF2B5EF4-FFF2-40B4-BE49-F238E27FC236}">
+                <a16:creationId xmlns:a16="http://schemas.microsoft.com/office/drawing/2014/main" id="{CA2A9B9F-BB9C-09D9-7ECE-8B3B1A463B08}"/>
+              </a:ext>
+            </a:extLst>
+          </p:cNvPr>
+          <p:cNvSpPr>
+            <a:spLocks noGrp="1"/>
+          </p:cNvSpPr>
+          <p:nvPr>
+            <p:ph type="sldNum" sz="quarter" idx="5"/>
+          </p:nvPr>
+        </p:nvSpPr>
+        <p:spPr/>
+      </p:sp>
+    </p:spTree>
+    <p:extLst>
+      <p:ext uri="{BB962C8B-B14F-4D97-AF65-F5344CB8AC3E}">
+        <p14:creationId xmlns:p14="http://schemas.microsoft.com/office/powerpoint/2010/main" val="3537758579"/>
+      </p:ext>
+    </p:extLst>
+  </p:cSld>
+  <p:clrMapOvr>
+    <a:masterClrMapping/>
+  </p:clrMapOvr>
+</p:notes>
+</file>
+
+<file path=ppt/notesSlides/notesSlide8.xml><?xml version="1.0" encoding="utf-8"?>
+<p:notes xmlns:a="http://schemas.openxmlformats.org/drawingml/2006/main" xmlns:r="http://schemas.openxmlformats.org/officeDocument/2006/relationships" xmlns:p="http://schemas.openxmlformats.org/presentationml/2006/main">
+  <p:cSld>
+    <p:spTree>
+      <p:nvGrpSpPr>
+        <p:cNvPr id="1" name=""/>
+        <p:cNvGrpSpPr/>
+        <p:nvPr/>
+      </p:nvGrpSpPr>
+      <p:grpSpPr>
+        <a:xfrm>
+          <a:off x="0" y="0"/>
+          <a:ext cx="0" cy="0"/>
+          <a:chOff x="0" y="0"/>
+          <a:chExt cx="0" cy="0"/>
+        </a:xfrm>
+      </p:grpSpPr>
+      <p:sp>
+        <p:nvSpPr>
+          <p:cNvPr id="2" name="Slide Image Placeholder 1"/>
+          <p:cNvSpPr>
+            <a:spLocks noGrp="1" noRot="1" noChangeAspect="1"/>
+          </p:cNvSpPr>
+          <p:nvPr>
+            <p:ph type="sldImg" idx="2"/>
+          </p:nvPr>
+        </p:nvSpPr>
+        <p:spPr/>
+      </p:sp>
+      <p:sp>
+        <p:nvSpPr>
+          <p:cNvPr id="3" name="Notes Placeholder 2"/>
+          <p:cNvSpPr>
+            <a:spLocks noGrp="1"/>
+          </p:cNvSpPr>
+          <p:nvPr>
+            <p:ph type="body" sz="quarter" idx="3"/>
+          </p:nvPr>
+        </p:nvSpPr>
+        <p:spPr/>
+        <p:txBody>
+          <a:bodyPr/>
+          <a:lstStyle/>
+          <a:p>
+            <a:r>
+              <a:t>Shows academic rigor and industrial readiness.</a:t>
+            </a:r>
+          </a:p>
+          <a:p>
+            <a:endParaRPr/>
+          </a:p>
+          <a:p>
+            <a:r>
+              <a:t>General Speaker Notes:</a:t>
+            </a:r>
+          </a:p>
+          <a:p>
+            <a:r>
+              <a:t>- Keep tone conversational; stress how IEC 62443 and NIS2 drive demand.</a:t>
+            </a:r>
+          </a:p>
+          <a:p>
+            <a:r>
+              <a:t>- Emphasize Swedish research roots (MDU) and global scalability.</a:t>
+            </a:r>
+          </a:p>
+          <a:p>
+            <a:r>
+              <a:t>- Finish with a clear ask and pilot goal.</a:t>
+            </a:r>
+          </a:p>
+        </p:txBody>
+      </p:sp>
+      <p:sp>
+        <p:nvSpPr>
+          <p:cNvPr id="4" name="Slide Number Placeholder 3"/>
+          <p:cNvSpPr>
+            <a:spLocks noGrp="1"/>
+          </p:cNvSpPr>
+          <p:nvPr>
+            <p:ph type="sldNum" sz="quarter" idx="5"/>
+          </p:nvPr>
+        </p:nvSpPr>
+        <p:spPr/>
+      </p:sp>
+    </p:spTree>
+  </p:cSld>
+  <p:clrMapOvr>
+    <a:masterClrMapping/>
+  </p:clrMapOvr>
+</p:notes>
+</file>
+
+<file path=ppt/notesSlides/notesSlide9.xml><?xml version="1.0" encoding="utf-8"?>
+<p:notes xmlns:a="http://schemas.openxmlformats.org/drawingml/2006/main" xmlns:r="http://schemas.openxmlformats.org/officeDocument/2006/relationships" xmlns:p="http://schemas.openxmlformats.org/presentationml/2006/main">
+  <p:cSld>
+    <p:spTree>
+      <p:nvGrpSpPr>
+        <p:cNvPr id="1" name=""/>
+        <p:cNvGrpSpPr/>
+        <p:nvPr/>
+      </p:nvGrpSpPr>
+      <p:grpSpPr>
+        <a:xfrm>
+          <a:off x="0" y="0"/>
+          <a:ext cx="0" cy="0"/>
+          <a:chOff x="0" y="0"/>
+          <a:chExt cx="0" cy="0"/>
+        </a:xfrm>
+      </p:grpSpPr>
+      <p:sp>
+        <p:nvSpPr>
+          <p:cNvPr id="2" name="Slide Image Placeholder 1"/>
+          <p:cNvSpPr>
+            <a:spLocks noGrp="1" noRot="1" noChangeAspect="1"/>
+          </p:cNvSpPr>
+          <p:nvPr>
+            <p:ph type="sldImg" idx="2"/>
+          </p:nvPr>
+        </p:nvSpPr>
+        <p:spPr/>
+      </p:sp>
+      <p:sp>
+        <p:nvSpPr>
+          <p:cNvPr id="3" name="Notes Placeholder 2"/>
+          <p:cNvSpPr>
+            <a:spLocks noGrp="1"/>
+          </p:cNvSpPr>
+          <p:nvPr>
+            <p:ph type="body" sz="quarter" idx="3"/>
+          </p:nvPr>
+        </p:nvSpPr>
+        <p:spPr/>
+        <p:txBody>
+          <a:bodyPr/>
+          <a:lstStyle/>
+          <a:p>
+            <a:r>
+              <a:t>General Speaker Notes:</a:t>
+            </a:r>
+          </a:p>
+          <a:p>
+            <a:r>
+              <a:t>- Keep tone conversational; stress how IEC 62443 and NIS2 drive demand.</a:t>
+            </a:r>
+          </a:p>
+          <a:p>
+            <a:r>
+              <a:t>- Emphasize Swedish research roots (MDU) and global scalability.</a:t>
+            </a:r>
+          </a:p>
+          <a:p>
+            <a:r>
+              <a:t>- Finish with a clear ask and pilot goal.</a:t>
+            </a:r>
+          </a:p>
+        </p:txBody>
+      </p:sp>
+      <p:sp>
+        <p:nvSpPr>
+          <p:cNvPr id="4" name="Slide Number Placeholder 3"/>
+          <p:cNvSpPr>
+            <a:spLocks noGrp="1"/>
+          </p:cNvSpPr>
+          <p:nvPr>
+            <p:ph type="sldNum" sz="quarter" idx="5"/>
           </p:nvPr>
         </p:nvSpPr>
         <p:spPr/>
@@ -1631,10 +2041,9 @@
           <a:lstStyle/>
           <a:p>
             <a:r>
-              <a:rPr lang="en-US" smtClean="0"/>
+              <a:rPr lang="en-US"/>
               <a:t>Click to edit Master title style</a:t>
             </a:r>
-            <a:endParaRPr lang="en-US"/>
           </a:p>
         </p:txBody>
       </p:sp>
@@ -1750,10 +2159,9 @@
           </a:lstStyle>
           <a:p>
             <a:r>
-              <a:rPr lang="en-US" smtClean="0"/>
+              <a:rPr lang="en-US"/>
               <a:t>Click to edit Master subtitle style</a:t>
             </a:r>
-            <a:endParaRPr lang="en-US"/>
           </a:p>
         </p:txBody>
       </p:sp>
@@ -1774,7 +2182,7 @@
           <a:p>
             <a:fld id="{5BCAD085-E8A6-8845-BD4E-CB4CCA059FC4}" type="datetimeFigureOut">
               <a:rPr lang="en-US" smtClean="0"/>
-              <a:t>1/27/13</a:t>
+              <a:t>11/6/2025</a:t>
             </a:fld>
             <a:endParaRPr lang="en-US"/>
           </a:p>
@@ -1868,10 +2276,9 @@
           <a:lstStyle/>
           <a:p>
             <a:r>
-              <a:rPr lang="en-US" smtClean="0"/>
+              <a:rPr lang="en-US"/>
               <a:t>Click to edit Master title style</a:t>
             </a:r>
-            <a:endParaRPr lang="en-US"/>
           </a:p>
         </p:txBody>
       </p:sp>
@@ -1892,38 +2299,37 @@
           <a:p>
             <a:pPr lvl="0"/>
             <a:r>
-              <a:rPr lang="en-US" smtClean="0"/>
+              <a:rPr lang="en-US"/>
               <a:t>Click to edit Master text styles</a:t>
             </a:r>
           </a:p>
           <a:p>
             <a:pPr lvl="1"/>
             <a:r>
-              <a:rPr lang="en-US" smtClean="0"/>
+              <a:rPr lang="en-US"/>
               <a:t>Second level</a:t>
             </a:r>
           </a:p>
           <a:p>
             <a:pPr lvl="2"/>
             <a:r>
-              <a:rPr lang="en-US" smtClean="0"/>
+              <a:rPr lang="en-US"/>
               <a:t>Third level</a:t>
             </a:r>
           </a:p>
           <a:p>
             <a:pPr lvl="3"/>
             <a:r>
-              <a:rPr lang="en-US" smtClean="0"/>
+              <a:rPr lang="en-US"/>
               <a:t>Fourth level</a:t>
             </a:r>
           </a:p>
           <a:p>
             <a:pPr lvl="4"/>
             <a:r>
-              <a:rPr lang="en-US" smtClean="0"/>
+              <a:rPr lang="en-US"/>
               <a:t>Fifth level</a:t>
             </a:r>
-            <a:endParaRPr lang="en-US"/>
           </a:p>
         </p:txBody>
       </p:sp>
@@ -1944,7 +2350,7 @@
           <a:p>
             <a:fld id="{5BCAD085-E8A6-8845-BD4E-CB4CCA059FC4}" type="datetimeFigureOut">
               <a:rPr lang="en-US" smtClean="0"/>
-              <a:t>1/27/13</a:t>
+              <a:t>11/6/2025</a:t>
             </a:fld>
             <a:endParaRPr lang="en-US"/>
           </a:p>
@@ -2043,10 +2449,9 @@
           <a:lstStyle/>
           <a:p>
             <a:r>
-              <a:rPr lang="en-US" smtClean="0"/>
+              <a:rPr lang="en-US"/>
               <a:t>Click to edit Master title style</a:t>
             </a:r>
-            <a:endParaRPr lang="en-US"/>
           </a:p>
         </p:txBody>
       </p:sp>
@@ -2072,38 +2477,37 @@
           <a:p>
             <a:pPr lvl="0"/>
             <a:r>
-              <a:rPr lang="en-US" smtClean="0"/>
+              <a:rPr lang="en-US"/>
               <a:t>Click to edit Master text styles</a:t>
             </a:r>
           </a:p>
           <a:p>
             <a:pPr lvl="1"/>
             <a:r>
-              <a:rPr lang="en-US" smtClean="0"/>
+              <a:rPr lang="en-US"/>
               <a:t>Second level</a:t>
             </a:r>
           </a:p>
           <a:p>
             <a:pPr lvl="2"/>
             <a:r>
-              <a:rPr lang="en-US" smtClean="0"/>
+              <a:rPr lang="en-US"/>
               <a:t>Third level</a:t>
             </a:r>
           </a:p>
           <a:p>
             <a:pPr lvl="3"/>
             <a:r>
-              <a:rPr lang="en-US" smtClean="0"/>
+              <a:rPr lang="en-US"/>
               <a:t>Fourth level</a:t>
             </a:r>
           </a:p>
           <a:p>
             <a:pPr lvl="4"/>
             <a:r>
-              <a:rPr lang="en-US" smtClean="0"/>
+              <a:rPr lang="en-US"/>
               <a:t>Fifth level</a:t>
             </a:r>
-            <a:endParaRPr lang="en-US"/>
           </a:p>
         </p:txBody>
       </p:sp>
@@ -2124,7 +2528,7 @@
           <a:p>
             <a:fld id="{5BCAD085-E8A6-8845-BD4E-CB4CCA059FC4}" type="datetimeFigureOut">
               <a:rPr lang="en-US" smtClean="0"/>
-              <a:t>1/27/13</a:t>
+              <a:t>11/6/2025</a:t>
             </a:fld>
             <a:endParaRPr lang="en-US"/>
           </a:p>
@@ -2218,10 +2622,9 @@
           <a:lstStyle/>
           <a:p>
             <a:r>
-              <a:rPr lang="en-US" smtClean="0"/>
+              <a:rPr lang="en-US"/>
               <a:t>Click to edit Master title style</a:t>
             </a:r>
-            <a:endParaRPr lang="en-US"/>
           </a:p>
         </p:txBody>
       </p:sp>
@@ -2242,38 +2645,37 @@
           <a:p>
             <a:pPr lvl="0"/>
             <a:r>
-              <a:rPr lang="en-US" smtClean="0"/>
+              <a:rPr lang="en-US"/>
               <a:t>Click to edit Master text styles</a:t>
             </a:r>
           </a:p>
           <a:p>
             <a:pPr lvl="1"/>
             <a:r>
-              <a:rPr lang="en-US" smtClean="0"/>
+              <a:rPr lang="en-US"/>
               <a:t>Second level</a:t>
             </a:r>
           </a:p>
           <a:p>
             <a:pPr lvl="2"/>
             <a:r>
-              <a:rPr lang="en-US" smtClean="0"/>
+              <a:rPr lang="en-US"/>
               <a:t>Third level</a:t>
             </a:r>
           </a:p>
           <a:p>
             <a:pPr lvl="3"/>
             <a:r>
-              <a:rPr lang="en-US" smtClean="0"/>
+              <a:rPr lang="en-US"/>
               <a:t>Fourth level</a:t>
             </a:r>
           </a:p>
           <a:p>
             <a:pPr lvl="4"/>
             <a:r>
-              <a:rPr lang="en-US" smtClean="0"/>
+              <a:rPr lang="en-US"/>
               <a:t>Fifth level</a:t>
             </a:r>
-            <a:endParaRPr lang="en-US"/>
           </a:p>
         </p:txBody>
       </p:sp>
@@ -2294,7 +2696,7 @@
           <a:p>
             <a:fld id="{5BCAD085-E8A6-8845-BD4E-CB4CCA059FC4}" type="datetimeFigureOut">
               <a:rPr lang="en-US" smtClean="0"/>
-              <a:t>1/27/13</a:t>
+              <a:t>11/6/2025</a:t>
             </a:fld>
             <a:endParaRPr lang="en-US"/>
           </a:p>
@@ -2397,10 +2799,9 @@
           </a:lstStyle>
           <a:p>
             <a:r>
-              <a:rPr lang="en-US" smtClean="0"/>
+              <a:rPr lang="en-US"/>
               <a:t>Click to edit Master title style</a:t>
             </a:r>
-            <a:endParaRPr lang="en-US"/>
           </a:p>
         </p:txBody>
       </p:sp>
@@ -2517,7 +2918,7 @@
           <a:p>
             <a:pPr lvl="0"/>
             <a:r>
-              <a:rPr lang="en-US" smtClean="0"/>
+              <a:rPr lang="en-US"/>
               <a:t>Click to edit Master text styles</a:t>
             </a:r>
           </a:p>
@@ -2540,7 +2941,7 @@
           <a:p>
             <a:fld id="{5BCAD085-E8A6-8845-BD4E-CB4CCA059FC4}" type="datetimeFigureOut">
               <a:rPr lang="en-US" smtClean="0"/>
-              <a:t>1/27/13</a:t>
+              <a:t>11/6/2025</a:t>
             </a:fld>
             <a:endParaRPr lang="en-US"/>
           </a:p>
@@ -2634,10 +3035,9 @@
           <a:lstStyle/>
           <a:p>
             <a:r>
-              <a:rPr lang="en-US" smtClean="0"/>
+              <a:rPr lang="en-US"/>
               <a:t>Click to edit Master title style</a:t>
             </a:r>
-            <a:endParaRPr lang="en-US"/>
           </a:p>
         </p:txBody>
       </p:sp>
@@ -2691,38 +3091,37 @@
           <a:p>
             <a:pPr lvl="0"/>
             <a:r>
-              <a:rPr lang="en-US" smtClean="0"/>
+              <a:rPr lang="en-US"/>
               <a:t>Click to edit Master text styles</a:t>
             </a:r>
           </a:p>
           <a:p>
             <a:pPr lvl="1"/>
             <a:r>
-              <a:rPr lang="en-US" smtClean="0"/>
+              <a:rPr lang="en-US"/>
               <a:t>Second level</a:t>
             </a:r>
           </a:p>
           <a:p>
             <a:pPr lvl="2"/>
             <a:r>
-              <a:rPr lang="en-US" smtClean="0"/>
+              <a:rPr lang="en-US"/>
               <a:t>Third level</a:t>
             </a:r>
           </a:p>
           <a:p>
             <a:pPr lvl="3"/>
             <a:r>
-              <a:rPr lang="en-US" smtClean="0"/>
+              <a:rPr lang="en-US"/>
               <a:t>Fourth level</a:t>
             </a:r>
           </a:p>
           <a:p>
             <a:pPr lvl="4"/>
             <a:r>
-              <a:rPr lang="en-US" smtClean="0"/>
+              <a:rPr lang="en-US"/>
               <a:t>Fifth level</a:t>
             </a:r>
-            <a:endParaRPr lang="en-US"/>
           </a:p>
         </p:txBody>
       </p:sp>
@@ -2776,38 +3175,37 @@
           <a:p>
             <a:pPr lvl="0"/>
             <a:r>
-              <a:rPr lang="en-US" smtClean="0"/>
+              <a:rPr lang="en-US"/>
               <a:t>Click to edit Master text styles</a:t>
             </a:r>
           </a:p>
           <a:p>
             <a:pPr lvl="1"/>
             <a:r>
-              <a:rPr lang="en-US" smtClean="0"/>
+              <a:rPr lang="en-US"/>
               <a:t>Second level</a:t>
             </a:r>
           </a:p>
           <a:p>
             <a:pPr lvl="2"/>
             <a:r>
-              <a:rPr lang="en-US" smtClean="0"/>
+              <a:rPr lang="en-US"/>
               <a:t>Third level</a:t>
             </a:r>
           </a:p>
           <a:p>
             <a:pPr lvl="3"/>
             <a:r>
-              <a:rPr lang="en-US" smtClean="0"/>
+              <a:rPr lang="en-US"/>
               <a:t>Fourth level</a:t>
             </a:r>
           </a:p>
           <a:p>
             <a:pPr lvl="4"/>
             <a:r>
-              <a:rPr lang="en-US" smtClean="0"/>
+              <a:rPr lang="en-US"/>
               <a:t>Fifth level</a:t>
             </a:r>
-            <a:endParaRPr lang="en-US"/>
           </a:p>
         </p:txBody>
       </p:sp>
@@ -2828,7 +3226,7 @@
           <a:p>
             <a:fld id="{5BCAD085-E8A6-8845-BD4E-CB4CCA059FC4}" type="datetimeFigureOut">
               <a:rPr lang="en-US" smtClean="0"/>
-              <a:t>1/27/13</a:t>
+              <a:t>11/6/2025</a:t>
             </a:fld>
             <a:endParaRPr lang="en-US"/>
           </a:p>
@@ -2926,10 +3324,9 @@
           </a:lstStyle>
           <a:p>
             <a:r>
-              <a:rPr lang="en-US" smtClean="0"/>
+              <a:rPr lang="en-US"/>
               <a:t>Click to edit Master title style</a:t>
             </a:r>
-            <a:endParaRPr lang="en-US"/>
           </a:p>
         </p:txBody>
       </p:sp>
@@ -2992,7 +3389,7 @@
           <a:p>
             <a:pPr lvl="0"/>
             <a:r>
-              <a:rPr lang="en-US" smtClean="0"/>
+              <a:rPr lang="en-US"/>
               <a:t>Click to edit Master text styles</a:t>
             </a:r>
           </a:p>
@@ -3048,38 +3445,37 @@
           <a:p>
             <a:pPr lvl="0"/>
             <a:r>
-              <a:rPr lang="en-US" smtClean="0"/>
+              <a:rPr lang="en-US"/>
               <a:t>Click to edit Master text styles</a:t>
             </a:r>
           </a:p>
           <a:p>
             <a:pPr lvl="1"/>
             <a:r>
-              <a:rPr lang="en-US" smtClean="0"/>
+              <a:rPr lang="en-US"/>
               <a:t>Second level</a:t>
             </a:r>
           </a:p>
           <a:p>
             <a:pPr lvl="2"/>
             <a:r>
-              <a:rPr lang="en-US" smtClean="0"/>
+              <a:rPr lang="en-US"/>
               <a:t>Third level</a:t>
             </a:r>
           </a:p>
           <a:p>
             <a:pPr lvl="3"/>
             <a:r>
-              <a:rPr lang="en-US" smtClean="0"/>
+              <a:rPr lang="en-US"/>
               <a:t>Fourth level</a:t>
             </a:r>
           </a:p>
           <a:p>
             <a:pPr lvl="4"/>
             <a:r>
-              <a:rPr lang="en-US" smtClean="0"/>
+              <a:rPr lang="en-US"/>
               <a:t>Fifth level</a:t>
             </a:r>
-            <a:endParaRPr lang="en-US"/>
           </a:p>
         </p:txBody>
       </p:sp>
@@ -3142,7 +3538,7 @@
           <a:p>
             <a:pPr lvl="0"/>
             <a:r>
-              <a:rPr lang="en-US" smtClean="0"/>
+              <a:rPr lang="en-US"/>
               <a:t>Click to edit Master text styles</a:t>
             </a:r>
           </a:p>
@@ -3198,38 +3594,37 @@
           <a:p>
             <a:pPr lvl="0"/>
             <a:r>
-              <a:rPr lang="en-US" smtClean="0"/>
+              <a:rPr lang="en-US"/>
               <a:t>Click to edit Master text styles</a:t>
             </a:r>
           </a:p>
           <a:p>
             <a:pPr lvl="1"/>
             <a:r>
-              <a:rPr lang="en-US" smtClean="0"/>
+              <a:rPr lang="en-US"/>
               <a:t>Second level</a:t>
             </a:r>
           </a:p>
           <a:p>
             <a:pPr lvl="2"/>
             <a:r>
-              <a:rPr lang="en-US" smtClean="0"/>
+              <a:rPr lang="en-US"/>
               <a:t>Third level</a:t>
             </a:r>
           </a:p>
           <a:p>
             <a:pPr lvl="3"/>
             <a:r>
-              <a:rPr lang="en-US" smtClean="0"/>
+              <a:rPr lang="en-US"/>
               <a:t>Fourth level</a:t>
             </a:r>
           </a:p>
           <a:p>
             <a:pPr lvl="4"/>
             <a:r>
-              <a:rPr lang="en-US" smtClean="0"/>
+              <a:rPr lang="en-US"/>
               <a:t>Fifth level</a:t>
             </a:r>
-            <a:endParaRPr lang="en-US"/>
           </a:p>
         </p:txBody>
       </p:sp>
@@ -3250,7 +3645,7 @@
           <a:p>
             <a:fld id="{5BCAD085-E8A6-8845-BD4E-CB4CCA059FC4}" type="datetimeFigureOut">
               <a:rPr lang="en-US" smtClean="0"/>
-              <a:t>1/27/13</a:t>
+              <a:t>11/6/2025</a:t>
             </a:fld>
             <a:endParaRPr lang="en-US"/>
           </a:p>
@@ -3344,10 +3739,9 @@
           <a:lstStyle/>
           <a:p>
             <a:r>
-              <a:rPr lang="en-US" smtClean="0"/>
+              <a:rPr lang="en-US"/>
               <a:t>Click to edit Master title style</a:t>
             </a:r>
-            <a:endParaRPr lang="en-US"/>
           </a:p>
         </p:txBody>
       </p:sp>
@@ -3368,7 +3762,7 @@
           <a:p>
             <a:fld id="{5BCAD085-E8A6-8845-BD4E-CB4CCA059FC4}" type="datetimeFigureOut">
               <a:rPr lang="en-US" smtClean="0"/>
-              <a:t>1/27/13</a:t>
+              <a:t>11/6/2025</a:t>
             </a:fld>
             <a:endParaRPr lang="en-US"/>
           </a:p>
@@ -3463,7 +3857,7 @@
           <a:p>
             <a:fld id="{5BCAD085-E8A6-8845-BD4E-CB4CCA059FC4}" type="datetimeFigureOut">
               <a:rPr lang="en-US" smtClean="0"/>
-              <a:t>1/27/13</a:t>
+              <a:t>11/6/2025</a:t>
             </a:fld>
             <a:endParaRPr lang="en-US"/>
           </a:p>
@@ -3566,10 +3960,9 @@
           </a:lstStyle>
           <a:p>
             <a:r>
-              <a:rPr lang="en-US" smtClean="0"/>
+              <a:rPr lang="en-US"/>
               <a:t>Click to edit Master title style</a:t>
             </a:r>
-            <a:endParaRPr lang="en-US"/>
           </a:p>
         </p:txBody>
       </p:sp>
@@ -3623,38 +4016,37 @@
           <a:p>
             <a:pPr lvl="0"/>
             <a:r>
-              <a:rPr lang="en-US" smtClean="0"/>
+              <a:rPr lang="en-US"/>
               <a:t>Click to edit Master text styles</a:t>
             </a:r>
           </a:p>
           <a:p>
             <a:pPr lvl="1"/>
             <a:r>
-              <a:rPr lang="en-US" smtClean="0"/>
+              <a:rPr lang="en-US"/>
               <a:t>Second level</a:t>
             </a:r>
           </a:p>
           <a:p>
             <a:pPr lvl="2"/>
             <a:r>
-              <a:rPr lang="en-US" smtClean="0"/>
+              <a:rPr lang="en-US"/>
               <a:t>Third level</a:t>
             </a:r>
           </a:p>
           <a:p>
             <a:pPr lvl="3"/>
             <a:r>
-              <a:rPr lang="en-US" smtClean="0"/>
+              <a:rPr lang="en-US"/>
               <a:t>Fourth level</a:t>
             </a:r>
           </a:p>
           <a:p>
             <a:pPr lvl="4"/>
             <a:r>
-              <a:rPr lang="en-US" smtClean="0"/>
+              <a:rPr lang="en-US"/>
               <a:t>Fifth level</a:t>
             </a:r>
-            <a:endParaRPr lang="en-US"/>
           </a:p>
         </p:txBody>
       </p:sp>
@@ -3717,7 +4109,7 @@
           <a:p>
             <a:pPr lvl="0"/>
             <a:r>
-              <a:rPr lang="en-US" smtClean="0"/>
+              <a:rPr lang="en-US"/>
               <a:t>Click to edit Master text styles</a:t>
             </a:r>
           </a:p>
@@ -3740,7 +4132,7 @@
           <a:p>
             <a:fld id="{5BCAD085-E8A6-8845-BD4E-CB4CCA059FC4}" type="datetimeFigureOut">
               <a:rPr lang="en-US" smtClean="0"/>
-              <a:t>1/27/13</a:t>
+              <a:t>11/6/2025</a:t>
             </a:fld>
             <a:endParaRPr lang="en-US"/>
           </a:p>
@@ -3843,10 +4235,9 @@
           </a:lstStyle>
           <a:p>
             <a:r>
-              <a:rPr lang="en-US" smtClean="0"/>
+              <a:rPr lang="en-US"/>
               <a:t>Click to edit Master title style</a:t>
             </a:r>
-            <a:endParaRPr lang="en-US"/>
           </a:p>
         </p:txBody>
       </p:sp>
@@ -3970,7 +4361,7 @@
           <a:p>
             <a:pPr lvl="0"/>
             <a:r>
-              <a:rPr lang="en-US" smtClean="0"/>
+              <a:rPr lang="en-US"/>
               <a:t>Click to edit Master text styles</a:t>
             </a:r>
           </a:p>
@@ -3993,7 +4384,7 @@
           <a:p>
             <a:fld id="{5BCAD085-E8A6-8845-BD4E-CB4CCA059FC4}" type="datetimeFigureOut">
               <a:rPr lang="en-US" smtClean="0"/>
-              <a:t>1/27/13</a:t>
+              <a:t>11/6/2025</a:t>
             </a:fld>
             <a:endParaRPr lang="en-US"/>
           </a:p>
@@ -4102,10 +4493,9 @@
           <a:lstStyle/>
           <a:p>
             <a:r>
-              <a:rPr lang="en-US" smtClean="0"/>
+              <a:rPr lang="en-US"/>
               <a:t>Click to edit Master title style</a:t>
             </a:r>
-            <a:endParaRPr lang="en-US"/>
           </a:p>
         </p:txBody>
       </p:sp>
@@ -4136,38 +4526,37 @@
           <a:p>
             <a:pPr lvl="0"/>
             <a:r>
-              <a:rPr lang="en-US" smtClean="0"/>
+              <a:rPr lang="en-US"/>
               <a:t>Click to edit Master text styles</a:t>
             </a:r>
           </a:p>
           <a:p>
             <a:pPr lvl="1"/>
             <a:r>
-              <a:rPr lang="en-US" smtClean="0"/>
+              <a:rPr lang="en-US"/>
               <a:t>Second level</a:t>
             </a:r>
           </a:p>
           <a:p>
             <a:pPr lvl="2"/>
             <a:r>
-              <a:rPr lang="en-US" smtClean="0"/>
+              <a:rPr lang="en-US"/>
               <a:t>Third level</a:t>
             </a:r>
           </a:p>
           <a:p>
             <a:pPr lvl="3"/>
             <a:r>
-              <a:rPr lang="en-US" smtClean="0"/>
+              <a:rPr lang="en-US"/>
               <a:t>Fourth level</a:t>
             </a:r>
           </a:p>
           <a:p>
             <a:pPr lvl="4"/>
             <a:r>
-              <a:rPr lang="en-US" smtClean="0"/>
+              <a:rPr lang="en-US"/>
               <a:t>Fifth level</a:t>
             </a:r>
-            <a:endParaRPr lang="en-US"/>
           </a:p>
         </p:txBody>
       </p:sp>
@@ -4206,7 +4595,7 @@
           <a:p>
             <a:fld id="{5BCAD085-E8A6-8845-BD4E-CB4CCA059FC4}" type="datetimeFigureOut">
               <a:rPr lang="en-US" smtClean="0"/>
-              <a:t>1/27/13</a:t>
+              <a:t>11/6/2025</a:t>
             </a:fld>
             <a:endParaRPr lang="en-US"/>
           </a:p>
@@ -4684,6 +5073,262 @@
 </p:sld>
 </file>
 
+<file path=ppt/slides/slide1.xml><?xml version="1.0" encoding="utf-8"?>
+<p:sld xmlns:a="http://schemas.openxmlformats.org/drawingml/2006/main" xmlns:p="http://schemas.openxmlformats.org/presentationml/2006/main" xmlns:r="http://schemas.openxmlformats.org/officeDocument/2006/relationships">
+  <p:cSld>
+    <p:bg>
+      <p:bgPr>
+        <a:solidFill>
+          <a:srgbClr val="E8DCC4"/>
+        </a:solidFill>
+        <a:effectLst/>
+      </p:bgPr>
+    </p:bg>
+    <p:spTree>
+      <p:nvGrpSpPr>
+        <p:cNvPr id="1" name=""/>
+        <p:cNvGrpSpPr/>
+        <p:nvPr/>
+      </p:nvGrpSpPr>
+      <p:grpSpPr/>
+      <p:sp>
+        <p:nvSpPr>
+          <p:cNvPr id="2" name="Title 1"/>
+          <p:cNvSpPr>
+            <a:spLocks noGrp="1"/>
+          </p:cNvSpPr>
+          <p:nvPr>
+            <p:ph type="ctrTitle"/>
+          </p:nvPr>
+        </p:nvSpPr>
+        <p:spPr/>
+        <p:txBody>
+          <a:bodyPr/>
+          <a:lstStyle/>
+          <a:p>
+            <a:pPr>
+              <a:defRPr b="1">
+                <a:solidFill>
+                  <a:srgbClr val="8B7355"/>
+                </a:solidFill>
+                <a:latin typeface="Arial"/>
+              </a:defRPr>
+            </a:pPr>
+            <a:r>
+              <a:t>LambdaIDS: The Immune System for the Edge</a:t>
+            </a:r>
+          </a:p>
+        </p:txBody>
+      </p:sp>
+      <p:sp>
+        <p:nvSpPr>
+          <p:cNvPr id="3" name="Subtitle 2"/>
+          <p:cNvSpPr>
+            <a:spLocks noGrp="1"/>
+          </p:cNvSpPr>
+          <p:nvPr>
+            <p:ph type="subTitle" idx="1"/>
+          </p:nvPr>
+        </p:nvSpPr>
+        <p:spPr/>
+        <p:txBody>
+          <a:bodyPr/>
+          <a:lstStyle/>
+          <a:p>
+            <a:pPr>
+              <a:defRPr sz="2400">
+                <a:solidFill>
+                  <a:srgbClr val="333333"/>
+                </a:solidFill>
+                <a:latin typeface="Arial"/>
+              </a:defRPr>
+            </a:pPr>
+            <a:r>
+              <a:t>Securing the Critical Infrastructure of Tomorrow with TinyML</a:t>
+            </a:r>
+          </a:p>
+          <a:p>
+            <a:pPr>
+              <a:defRPr sz="2400">
+                <a:solidFill>
+                  <a:srgbClr val="333333"/>
+                </a:solidFill>
+                <a:latin typeface="Arial"/>
+              </a:defRPr>
+            </a:pPr>
+          </a:p>
+          <a:p>
+            <a:pPr>
+              <a:defRPr sz="2400">
+                <a:solidFill>
+                  <a:srgbClr val="333333"/>
+                </a:solidFill>
+                <a:latin typeface="Arial"/>
+              </a:defRPr>
+            </a:pPr>
+            <a:r>
+              <a:t>We enable secure, autonomous, and compliant IoT at the edge.</a:t>
+            </a:r>
+          </a:p>
+          <a:p>
+            <a:pPr>
+              <a:defRPr sz="2400">
+                <a:solidFill>
+                  <a:srgbClr val="333333"/>
+                </a:solidFill>
+                <a:latin typeface="Arial"/>
+              </a:defRPr>
+            </a:pPr>
+            <a:r>
+              <a:t>Contact: Soroush Safaei | Ahmad Mostafavi | Hossein Fotouhi</a:t>
+            </a:r>
+          </a:p>
+        </p:txBody>
+      </p:sp>
+    </p:spTree>
+  </p:cSld>
+  <p:clrMapOvr>
+    <a:masterClrMapping/>
+  </p:clrMapOvr>
+</p:sld>
+</file>
+
+<file path=ppt/slides/slide10.xml><?xml version="1.0" encoding="utf-8"?>
+<p:sld xmlns:a="http://schemas.openxmlformats.org/drawingml/2006/main" xmlns:p="http://schemas.openxmlformats.org/presentationml/2006/main" xmlns:r="http://schemas.openxmlformats.org/officeDocument/2006/relationships">
+  <p:cSld>
+    <p:bg>
+      <p:bgPr>
+        <a:solidFill>
+          <a:srgbClr val="E8DCC4"/>
+        </a:solidFill>
+        <a:effectLst/>
+      </p:bgPr>
+    </p:bg>
+    <p:spTree>
+      <p:nvGrpSpPr>
+        <p:cNvPr id="1" name=""/>
+        <p:cNvGrpSpPr/>
+        <p:nvPr/>
+      </p:nvGrpSpPr>
+      <p:grpSpPr/>
+      <p:sp>
+        <p:nvSpPr>
+          <p:cNvPr id="2" name="Title 1"/>
+          <p:cNvSpPr>
+            <a:spLocks noGrp="1"/>
+          </p:cNvSpPr>
+          <p:nvPr>
+            <p:ph type="title"/>
+          </p:nvPr>
+        </p:nvSpPr>
+        <p:spPr/>
+        <p:txBody>
+          <a:bodyPr/>
+          <a:lstStyle/>
+          <a:p>
+            <a:pPr>
+              <a:defRPr b="1">
+                <a:solidFill>
+                  <a:srgbClr val="8B7355"/>
+                </a:solidFill>
+                <a:latin typeface="Arial"/>
+              </a:defRPr>
+            </a:pPr>
+            <a:r>
+              <a:t>Roadmap: Path to Scale</a:t>
+            </a:r>
+          </a:p>
+        </p:txBody>
+      </p:sp>
+      <p:sp>
+        <p:nvSpPr>
+          <p:cNvPr id="3" name="Content Placeholder 2"/>
+          <p:cNvSpPr>
+            <a:spLocks noGrp="1"/>
+          </p:cNvSpPr>
+          <p:nvPr>
+            <p:ph idx="1"/>
+          </p:nvPr>
+        </p:nvSpPr>
+        <p:spPr/>
+        <p:txBody>
+          <a:bodyPr/>
+          <a:lstStyle/>
+          <a:p/>
+          <a:p>
+            <a:pPr>
+              <a:spcAft>
+                <a:spcPts val="1400"/>
+              </a:spcAft>
+              <a:defRPr sz="2000">
+                <a:solidFill>
+                  <a:srgbClr val="333333"/>
+                </a:solidFill>
+                <a:latin typeface="Arial"/>
+              </a:defRPr>
+            </a:pPr>
+            <a:r>
+              <a:t>• Q1-Q2 2025: Finalize SDK v1.0. Complete Pilot with Combitech/RISE.</a:t>
+            </a:r>
+          </a:p>
+          <a:p>
+            <a:pPr>
+              <a:spcAft>
+                <a:spcPts val="1400"/>
+              </a:spcAft>
+              <a:defRPr sz="2000">
+                <a:solidFill>
+                  <a:srgbClr val="333333"/>
+                </a:solidFill>
+                <a:latin typeface="Arial"/>
+              </a:defRPr>
+            </a:pPr>
+            <a:r>
+              <a:t>• Q3-Q4 2025: First Commercial Deployments (Industrial Sector). Achieve IEC 62443 Cert.</a:t>
+            </a:r>
+          </a:p>
+          <a:p>
+            <a:pPr>
+              <a:spcAft>
+                <a:spcPts val="1400"/>
+              </a:spcAft>
+              <a:defRPr sz="2000">
+                <a:solidFill>
+                  <a:srgbClr val="333333"/>
+                </a:solidFill>
+                <a:latin typeface="Arial"/>
+              </a:defRPr>
+            </a:pPr>
+            <a:r>
+              <a:t>• 2026: Expansion to MENA region. Series A for Global Scale.</a:t>
+            </a:r>
+          </a:p>
+          <a:p>
+            <a:pPr>
+              <a:spcAft>
+                <a:spcPts val="1400"/>
+              </a:spcAft>
+              <a:defRPr sz="2000">
+                <a:solidFill>
+                  <a:srgbClr val="333333"/>
+                </a:solidFill>
+                <a:latin typeface="Arial"/>
+              </a:defRPr>
+            </a:pPr>
+            <a:r>
+              <a:t>• 2027: Integration with major Chip Vendors (ST, NXP).</a:t>
+            </a:r>
+          </a:p>
+        </p:txBody>
+      </p:sp>
+    </p:spTree>
+  </p:cSld>
+  <p:clrMapOvr>
+    <a:masterClrMapping/>
+  </p:clrMapOvr>
+</p:sld>
+</file>
+
 <file path=ppt/slides/slide10.xml><?xml version="1.0" encoding="utf-8"?>
 <p:sld xmlns:a="http://schemas.openxmlformats.org/drawingml/2006/main" xmlns:p="http://schemas.openxmlformats.org/presentationml/2006/main" xmlns:r="http://schemas.openxmlformats.org/officeDocument/2006/relationships">
   <p:cSld>
@@ -4956,6 +5601,310 @@
 </p:sld>
 </file>
 
+<file path=ppt/slides/slide11.xml><?xml version="1.0" encoding="utf-8"?>
+<p:sld xmlns:a="http://schemas.openxmlformats.org/drawingml/2006/main" xmlns:p="http://schemas.openxmlformats.org/presentationml/2006/main" xmlns:r="http://schemas.openxmlformats.org/officeDocument/2006/relationships">
+  <p:cSld>
+    <p:bg>
+      <p:bgPr>
+        <a:solidFill>
+          <a:srgbClr val="E8DCC4"/>
+        </a:solidFill>
+        <a:effectLst/>
+      </p:bgPr>
+    </p:bg>
+    <p:spTree>
+      <p:nvGrpSpPr>
+        <p:cNvPr id="1" name=""/>
+        <p:cNvGrpSpPr/>
+        <p:nvPr/>
+      </p:nvGrpSpPr>
+      <p:grpSpPr/>
+      <p:sp>
+        <p:nvSpPr>
+          <p:cNvPr id="2" name="Title 1"/>
+          <p:cNvSpPr>
+            <a:spLocks noGrp="1"/>
+          </p:cNvSpPr>
+          <p:nvPr>
+            <p:ph type="title"/>
+          </p:nvPr>
+        </p:nvSpPr>
+        <p:spPr/>
+        <p:txBody>
+          <a:bodyPr/>
+          <a:lstStyle/>
+          <a:p>
+            <a:pPr>
+              <a:defRPr b="1">
+                <a:solidFill>
+                  <a:srgbClr val="8B7355"/>
+                </a:solidFill>
+                <a:latin typeface="Arial"/>
+              </a:defRPr>
+            </a:pPr>
+            <a:r>
+              <a:t>The Team</a:t>
+            </a:r>
+          </a:p>
+        </p:txBody>
+      </p:sp>
+      <p:sp>
+        <p:nvSpPr>
+          <p:cNvPr id="3" name="Content Placeholder 2"/>
+          <p:cNvSpPr>
+            <a:spLocks noGrp="1"/>
+          </p:cNvSpPr>
+          <p:nvPr>
+            <p:ph idx="1"/>
+          </p:nvPr>
+        </p:nvSpPr>
+        <p:spPr/>
+        <p:txBody>
+          <a:bodyPr/>
+          <a:lstStyle/>
+          <a:p/>
+          <a:p>
+            <a:pPr>
+              <a:spcAft>
+                <a:spcPts val="1400"/>
+              </a:spcAft>
+              <a:defRPr sz="2000">
+                <a:solidFill>
+                  <a:srgbClr val="333333"/>
+                </a:solidFill>
+                <a:latin typeface="Arial"/>
+              </a:defRPr>
+            </a:pPr>
+            <a:r>
+              <a:t>• Soroush Safaei: Co-Founder &amp; CEO. Expertise in AI &amp; Business Strategy.</a:t>
+            </a:r>
+          </a:p>
+          <a:p>
+            <a:pPr>
+              <a:spcAft>
+                <a:spcPts val="1400"/>
+              </a:spcAft>
+              <a:defRPr sz="2000">
+                <a:solidFill>
+                  <a:srgbClr val="333333"/>
+                </a:solidFill>
+                <a:latin typeface="Arial"/>
+              </a:defRPr>
+            </a:pPr>
+            <a:r>
+              <a:t>• Ahmad Mostafavi: Co-Founder &amp; CTO. Deep tech expert in Embedded Systems.</a:t>
+            </a:r>
+          </a:p>
+          <a:p>
+            <a:pPr>
+              <a:spcAft>
+                <a:spcPts val="1400"/>
+              </a:spcAft>
+              <a:defRPr sz="2000">
+                <a:solidFill>
+                  <a:srgbClr val="333333"/>
+                </a:solidFill>
+                <a:latin typeface="Arial"/>
+              </a:defRPr>
+            </a:pPr>
+            <a:r>
+              <a:t>• Hossein Fotouhi: Co-Founder &amp; Scientific Lead. Professor in IoT &amp; Networks.</a:t>
+            </a:r>
+          </a:p>
+          <a:p>
+            <a:pPr>
+              <a:spcAft>
+                <a:spcPts val="1400"/>
+              </a:spcAft>
+              <a:defRPr sz="2000">
+                <a:solidFill>
+                  <a:srgbClr val="333333"/>
+                </a:solidFill>
+                <a:latin typeface="Arial"/>
+              </a:defRPr>
+            </a:pPr>
+            <a:r>
+              <a:t>• Why Us: We bridge the gap between Data Science and Hardware constraints.</a:t>
+            </a:r>
+          </a:p>
+        </p:txBody>
+      </p:sp>
+    </p:spTree>
+  </p:cSld>
+  <p:clrMapOvr>
+    <a:masterClrMapping/>
+  </p:clrMapOvr>
+</p:sld>
+</file>
+
+<file path=ppt/slides/slide12.xml><?xml version="1.0" encoding="utf-8"?>
+<p:sld xmlns:a="http://schemas.openxmlformats.org/drawingml/2006/main" xmlns:p="http://schemas.openxmlformats.org/presentationml/2006/main" xmlns:r="http://schemas.openxmlformats.org/officeDocument/2006/relationships">
+  <p:cSld>
+    <p:bg>
+      <p:bgPr>
+        <a:solidFill>
+          <a:srgbClr val="E8DCC4"/>
+        </a:solidFill>
+        <a:effectLst/>
+      </p:bgPr>
+    </p:bg>
+    <p:spTree>
+      <p:nvGrpSpPr>
+        <p:cNvPr id="1" name=""/>
+        <p:cNvGrpSpPr/>
+        <p:nvPr/>
+      </p:nvGrpSpPr>
+      <p:grpSpPr/>
+      <p:sp>
+        <p:nvSpPr>
+          <p:cNvPr id="2" name="Title 1"/>
+          <p:cNvSpPr>
+            <a:spLocks noGrp="1"/>
+          </p:cNvSpPr>
+          <p:nvPr>
+            <p:ph type="title"/>
+          </p:nvPr>
+        </p:nvSpPr>
+        <p:spPr/>
+        <p:txBody>
+          <a:bodyPr/>
+          <a:lstStyle/>
+          <a:p>
+            <a:pPr>
+              <a:defRPr b="1">
+                <a:solidFill>
+                  <a:srgbClr val="8B7355"/>
+                </a:solidFill>
+                <a:latin typeface="Arial"/>
+              </a:defRPr>
+            </a:pPr>
+            <a:r>
+              <a:t>The Ask</a:t>
+            </a:r>
+          </a:p>
+        </p:txBody>
+      </p:sp>
+      <p:sp>
+        <p:nvSpPr>
+          <p:cNvPr id="3" name="Content Placeholder 2"/>
+          <p:cNvSpPr>
+            <a:spLocks noGrp="1"/>
+          </p:cNvSpPr>
+          <p:nvPr>
+            <p:ph idx="1"/>
+          </p:nvPr>
+        </p:nvSpPr>
+        <p:spPr/>
+        <p:txBody>
+          <a:bodyPr/>
+          <a:lstStyle/>
+          <a:p/>
+          <a:p>
+            <a:pPr>
+              <a:spcAft>
+                <a:spcPts val="1400"/>
+              </a:spcAft>
+              <a:defRPr sz="2000">
+                <a:solidFill>
+                  <a:srgbClr val="333333"/>
+                </a:solidFill>
+                <a:latin typeface="Arial"/>
+              </a:defRPr>
+            </a:pPr>
+            <a:r>
+              <a:t>• Seeking: $500K - $1M (Seed / Pre-Seed).</a:t>
+            </a:r>
+          </a:p>
+          <a:p>
+            <a:pPr>
+              <a:spcAft>
+                <a:spcPts val="1400"/>
+              </a:spcAft>
+              <a:defRPr sz="2000">
+                <a:solidFill>
+                  <a:srgbClr val="333333"/>
+                </a:solidFill>
+                <a:latin typeface="Arial"/>
+              </a:defRPr>
+            </a:pPr>
+            <a:r>
+              <a:t>• Use of Funds:</a:t>
+            </a:r>
+          </a:p>
+          <a:p>
+            <a:pPr>
+              <a:spcAft>
+                <a:spcPts val="1400"/>
+              </a:spcAft>
+              <a:defRPr sz="2000">
+                <a:solidFill>
+                  <a:srgbClr val="333333"/>
+                </a:solidFill>
+                <a:latin typeface="Arial"/>
+              </a:defRPr>
+            </a:pPr>
+            <a:r>
+              <a:t>  - 40% R&amp;D (SDK refinement, Certification).</a:t>
+            </a:r>
+          </a:p>
+          <a:p>
+            <a:pPr>
+              <a:spcAft>
+                <a:spcPts val="1400"/>
+              </a:spcAft>
+              <a:defRPr sz="2000">
+                <a:solidFill>
+                  <a:srgbClr val="333333"/>
+                </a:solidFill>
+                <a:latin typeface="Arial"/>
+              </a:defRPr>
+            </a:pPr>
+            <a:r>
+              <a:t>  - 30% Business Dev (Pilot execution, Partnership management).</a:t>
+            </a:r>
+          </a:p>
+          <a:p>
+            <a:pPr>
+              <a:spcAft>
+                <a:spcPts val="1400"/>
+              </a:spcAft>
+              <a:defRPr sz="2000">
+                <a:solidFill>
+                  <a:srgbClr val="333333"/>
+                </a:solidFill>
+                <a:latin typeface="Arial"/>
+              </a:defRPr>
+            </a:pPr>
+            <a:r>
+              <a:t>  - 30% Operations &amp; Legal (IP Protection).</a:t>
+            </a:r>
+          </a:p>
+          <a:p>
+            <a:pPr>
+              <a:spcAft>
+                <a:spcPts val="1400"/>
+              </a:spcAft>
+              <a:defRPr sz="2000">
+                <a:solidFill>
+                  <a:srgbClr val="333333"/>
+                </a:solidFill>
+                <a:latin typeface="Arial"/>
+              </a:defRPr>
+            </a:pPr>
+            <a:r>
+              <a:t>• Opportunity: Join us in defining the standard for Edge AI Security.</a:t>
+            </a:r>
+          </a:p>
+        </p:txBody>
+      </p:sp>
+    </p:spTree>
+  </p:cSld>
+  <p:clrMapOvr>
+    <a:masterClrMapping/>
+  </p:clrMapOvr>
+</p:sld>
+</file>
+
 <file path=ppt/slides/slide12.xml><?xml version="1.0" encoding="utf-8"?>
 <p:sld xmlns:a="http://schemas.openxmlformats.org/drawingml/2006/main" xmlns:p="http://schemas.openxmlformats.org/presentationml/2006/main" xmlns:r="http://schemas.openxmlformats.org/officeDocument/2006/relationships">
   <p:cSld>
@@ -5257,6 +6206,707 @@
 </p:sld>
 </file>
 
+<file path=ppt/slides/slide13.xml><?xml version="1.0" encoding="utf-8"?>
+<p:sld xmlns:a="http://schemas.openxmlformats.org/drawingml/2006/main" xmlns:p="http://schemas.openxmlformats.org/presentationml/2006/main" xmlns:r="http://schemas.openxmlformats.org/officeDocument/2006/relationships">
+  <p:cSld>
+    <p:bg>
+      <p:bgPr>
+        <a:solidFill>
+          <a:srgbClr val="E8DCC4"/>
+        </a:solidFill>
+        <a:effectLst/>
+      </p:bgPr>
+    </p:bg>
+    <p:spTree>
+      <p:nvGrpSpPr>
+        <p:cNvPr id="1" name=""/>
+        <p:cNvGrpSpPr/>
+        <p:nvPr/>
+      </p:nvGrpSpPr>
+      <p:grpSpPr/>
+      <p:sp>
+        <p:nvSpPr>
+          <p:cNvPr id="2" name="Title 1"/>
+          <p:cNvSpPr>
+            <a:spLocks noGrp="1"/>
+          </p:cNvSpPr>
+          <p:nvPr>
+            <p:ph type="ctrTitle"/>
+          </p:nvPr>
+        </p:nvSpPr>
+        <p:spPr/>
+        <p:txBody>
+          <a:bodyPr/>
+          <a:lstStyle/>
+          <a:p>
+            <a:pPr>
+              <a:defRPr b="1">
+                <a:solidFill>
+                  <a:srgbClr val="8B7355"/>
+                </a:solidFill>
+                <a:latin typeface="Arial"/>
+              </a:defRPr>
+            </a:pPr>
+            <a:r>
+              <a:t>Contact</a:t>
+            </a:r>
+          </a:p>
+        </p:txBody>
+      </p:sp>
+      <p:sp>
+        <p:nvSpPr>
+          <p:cNvPr id="3" name="Subtitle 2"/>
+          <p:cNvSpPr>
+            <a:spLocks noGrp="1"/>
+          </p:cNvSpPr>
+          <p:nvPr>
+            <p:ph type="subTitle" idx="1"/>
+          </p:nvPr>
+        </p:nvSpPr>
+        <p:spPr/>
+        <p:txBody>
+          <a:bodyPr/>
+          <a:lstStyle/>
+          <a:p>
+            <a:pPr>
+              <a:defRPr sz="2400">
+                <a:solidFill>
+                  <a:srgbClr val="333333"/>
+                </a:solidFill>
+                <a:latin typeface="Arial"/>
+              </a:defRPr>
+            </a:pPr>
+            <a:r>
+              <a:t>Let's build a secure future together.</a:t>
+            </a:r>
+          </a:p>
+          <a:p>
+            <a:pPr>
+              <a:defRPr sz="2400">
+                <a:solidFill>
+                  <a:srgbClr val="333333"/>
+                </a:solidFill>
+                <a:latin typeface="Arial"/>
+              </a:defRPr>
+            </a:pPr>
+          </a:p>
+          <a:p>
+            <a:pPr>
+              <a:defRPr sz="2400">
+                <a:solidFill>
+                  <a:srgbClr val="333333"/>
+                </a:solidFill>
+                <a:latin typeface="Arial"/>
+              </a:defRPr>
+            </a:pPr>
+            <a:r>
+              <a:t>Soroush Safaei, Ahmad Mostafavi, Hossein Fotouhi</a:t>
+            </a:r>
+          </a:p>
+          <a:p>
+            <a:pPr>
+              <a:defRPr sz="2400">
+                <a:solidFill>
+                  <a:srgbClr val="333333"/>
+                </a:solidFill>
+                <a:latin typeface="Arial"/>
+              </a:defRPr>
+            </a:pPr>
+            <a:r>
+              <a:t>LambdaIDS</a:t>
+            </a:r>
+          </a:p>
+          <a:p>
+            <a:pPr>
+              <a:defRPr sz="2400">
+                <a:solidFill>
+                  <a:srgbClr val="333333"/>
+                </a:solidFill>
+                <a:latin typeface="Arial"/>
+              </a:defRPr>
+            </a:pPr>
+            <a:r>
+              <a:t>www.lambdaids.se</a:t>
+            </a:r>
+          </a:p>
+        </p:txBody>
+      </p:sp>
+    </p:spTree>
+  </p:cSld>
+  <p:clrMapOvr>
+    <a:masterClrMapping/>
+  </p:clrMapOvr>
+</p:sld>
+</file>
+
+<file path=ppt/slides/slide14.xml><?xml version="1.0" encoding="utf-8"?>
+<p:sld xmlns:a="http://schemas.openxmlformats.org/drawingml/2006/main" xmlns:r="http://schemas.openxmlformats.org/officeDocument/2006/relationships" xmlns:p="http://schemas.openxmlformats.org/presentationml/2006/main">
+  <p:cSld>
+    <p:spTree>
+      <p:nvGrpSpPr>
+        <p:cNvPr id="1" name=""/>
+        <p:cNvGrpSpPr/>
+        <p:nvPr/>
+      </p:nvGrpSpPr>
+      <p:grpSpPr>
+        <a:xfrm>
+          <a:off x="0" y="0"/>
+          <a:ext cx="0" cy="0"/>
+          <a:chOff x="0" y="0"/>
+          <a:chExt cx="0" cy="0"/>
+        </a:xfrm>
+      </p:grpSpPr>
+      <p:pic>
+        <p:nvPicPr>
+          <p:cNvPr id="2" name="Picture 1" descr="bg_gradient.png"/>
+          <p:cNvPicPr>
+            <a:picLocks noChangeAspect="1"/>
+          </p:cNvPicPr>
+          <p:nvPr/>
+        </p:nvPicPr>
+        <p:blipFill>
+          <a:blip r:embed="rId3"/>
+          <a:stretch>
+            <a:fillRect/>
+          </a:stretch>
+        </p:blipFill>
+        <p:spPr>
+          <a:xfrm>
+            <a:off x="0" y="0"/>
+            <a:ext cx="12188952" cy="6858000"/>
+          </a:xfrm>
+          <a:prstGeom prst="rect">
+            <a:avLst/>
+          </a:prstGeom>
+        </p:spPr>
+      </p:pic>
+      <p:pic>
+        <p:nvPicPr>
+          <p:cNvPr id="3" name="Picture 2" descr="ai_shield_cyan.png"/>
+          <p:cNvPicPr>
+            <a:picLocks noChangeAspect="1"/>
+          </p:cNvPicPr>
+          <p:nvPr/>
+        </p:nvPicPr>
+        <p:blipFill>
+          <a:blip r:embed="rId4"/>
+          <a:stretch>
+            <a:fillRect/>
+          </a:stretch>
+        </p:blipFill>
+        <p:spPr>
+          <a:xfrm>
+            <a:off x="11036952" y="360000"/>
+            <a:ext cx="792000" cy="924000"/>
+          </a:xfrm>
+          <a:prstGeom prst="rect">
+            <a:avLst/>
+          </a:prstGeom>
+        </p:spPr>
+      </p:pic>
+      <p:sp>
+        <p:nvSpPr>
+          <p:cNvPr id="4" name="TextBox 3"/>
+          <p:cNvSpPr txBox="1"/>
+          <p:nvPr/>
+        </p:nvSpPr>
+        <p:spPr>
+          <a:xfrm>
+            <a:off x="914400" y="822960"/>
+            <a:ext cx="10058400" cy="1280160"/>
+          </a:xfrm>
+          <a:prstGeom prst="rect">
+            <a:avLst/>
+          </a:prstGeom>
+          <a:noFill/>
+        </p:spPr>
+        <p:txBody>
+          <a:bodyPr wrap="none">
+            <a:spAutoFit/>
+          </a:bodyPr>
+          <a:lstStyle/>
+          <a:p>
+            <a:pPr>
+              <a:defRPr sz="3800" b="1">
+                <a:solidFill>
+                  <a:srgbClr val="00B6C9"/>
+                </a:solidFill>
+                <a:latin typeface="Arial Rounded MT Bold"/>
+              </a:defRPr>
+            </a:pPr>
+            <a:r>
+              <a:t>Vision &amp; Impact</a:t>
+            </a:r>
+          </a:p>
+        </p:txBody>
+      </p:sp>
+      <p:sp>
+        <p:nvSpPr>
+          <p:cNvPr id="5" name="TextBox 4"/>
+          <p:cNvSpPr txBox="1"/>
+          <p:nvPr/>
+        </p:nvSpPr>
+        <p:spPr>
+          <a:xfrm>
+            <a:off x="914400" y="1828800"/>
+            <a:ext cx="10515600" cy="2369880"/>
+          </a:xfrm>
+          <a:prstGeom prst="rect">
+            <a:avLst/>
+          </a:prstGeom>
+          <a:noFill/>
+        </p:spPr>
+        <p:txBody>
+          <a:bodyPr wrap="square">
+            <a:spAutoFit/>
+          </a:bodyPr>
+          <a:lstStyle/>
+          <a:p>
+            <a:pPr algn="ctr">
+              <a:defRPr sz="2000">
+                <a:solidFill>
+                  <a:srgbClr val="FFFFFF"/>
+                </a:solidFill>
+                <a:latin typeface="Segoe UI"/>
+              </a:defRPr>
+            </a:pPr>
+            <a:r>
+              <a:rPr sz="2400" b="1" dirty="0"/>
+              <a:t>“Enabling secure and autonomous IoT - everywhere.”</a:t>
+            </a:r>
+          </a:p>
+          <a:p>
+            <a:pPr>
+              <a:defRPr sz="2000">
+                <a:solidFill>
+                  <a:srgbClr val="FFFFFF"/>
+                </a:solidFill>
+                <a:latin typeface="Segoe UI"/>
+              </a:defRPr>
+            </a:pPr>
+            <a:endParaRPr sz="2400" dirty="0"/>
+          </a:p>
+          <a:p>
+            <a:pPr>
+              <a:defRPr sz="2000">
+                <a:solidFill>
+                  <a:srgbClr val="FFFFFF"/>
+                </a:solidFill>
+                <a:latin typeface="Segoe UI"/>
+              </a:defRPr>
+            </a:pPr>
+            <a:r>
+              <a:rPr lang="en-SE" b="1"/>
+              <a:t>Terneshk</a:t>
+            </a:r>
+            <a:r>
+              <a:rPr lang="en-US"/>
+              <a:t> </a:t>
+            </a:r>
+            <a:r>
+              <a:rPr lang="en-US" dirty="0"/>
+              <a:t>aims to become a </a:t>
+            </a:r>
+            <a:r>
+              <a:rPr lang="en-US" b="1" dirty="0"/>
+              <a:t>key enabler for IEC 62443-compliant embedded devices.</a:t>
+            </a:r>
+            <a:endParaRPr lang="en-SE" b="1" dirty="0"/>
+          </a:p>
+          <a:p>
+            <a:pPr>
+              <a:defRPr sz="2000">
+                <a:solidFill>
+                  <a:srgbClr val="FFFFFF"/>
+                </a:solidFill>
+                <a:latin typeface="Segoe UI"/>
+              </a:defRPr>
+            </a:pPr>
+            <a:br>
+              <a:rPr lang="en-US" dirty="0"/>
+            </a:br>
+            <a:r>
+              <a:rPr lang="en-US" b="1" dirty="0"/>
+              <a:t>Exit strategy:</a:t>
+            </a:r>
+            <a:r>
+              <a:rPr lang="en-US" dirty="0"/>
+              <a:t> potential acquisition by a </a:t>
+            </a:r>
+            <a:r>
+              <a:rPr lang="en-US" b="1" dirty="0"/>
+              <a:t>security or industrial automation leader.</a:t>
+            </a:r>
+            <a:endParaRPr lang="en-SE" b="1" dirty="0"/>
+          </a:p>
+          <a:p>
+            <a:pPr>
+              <a:defRPr sz="2000">
+                <a:solidFill>
+                  <a:srgbClr val="FFFFFF"/>
+                </a:solidFill>
+                <a:latin typeface="Segoe UI"/>
+              </a:defRPr>
+            </a:pPr>
+            <a:br>
+              <a:rPr lang="en-US" dirty="0"/>
+            </a:br>
+            <a:r>
+              <a:rPr lang="en-US" b="1" dirty="0"/>
+              <a:t>Call to action:</a:t>
+            </a:r>
+            <a:r>
+              <a:rPr lang="en-US" dirty="0"/>
+              <a:t> </a:t>
+            </a:r>
+            <a:r>
+              <a:rPr lang="en-US" i="1" dirty="0"/>
+              <a:t>Join us in building Sweden’s first</a:t>
+            </a:r>
+            <a:r>
+              <a:rPr lang="en-SE" i="1" dirty="0"/>
+              <a:t>/Next(?)</a:t>
+            </a:r>
+            <a:r>
+              <a:rPr lang="en-US" i="1" dirty="0"/>
+              <a:t> embedded AI security platform.</a:t>
+            </a:r>
+            <a:endParaRPr dirty="0"/>
+          </a:p>
+        </p:txBody>
+      </p:sp>
+    </p:spTree>
+  </p:cSld>
+  <p:clrMapOvr>
+    <a:masterClrMapping/>
+  </p:clrMapOvr>
+</p:sld>
+</file>
+
+<file path=ppt/slides/slide15.xml><?xml version="1.0" encoding="utf-8"?>
+<p:sld xmlns:a="http://schemas.openxmlformats.org/drawingml/2006/main" xmlns:r="http://schemas.openxmlformats.org/officeDocument/2006/relationships" xmlns:p="http://schemas.openxmlformats.org/presentationml/2006/main">
+  <p:cSld>
+    <p:spTree>
+      <p:nvGrpSpPr>
+        <p:cNvPr id="1" name="">
+          <a:extLst>
+            <a:ext uri="{FF2B5EF4-FFF2-40B4-BE49-F238E27FC236}">
+              <a16:creationId xmlns:a16="http://schemas.microsoft.com/office/drawing/2014/main" id="{54BFC23C-D799-1B53-8C27-21D2EC77E0D5}"/>
+            </a:ext>
+          </a:extLst>
+        </p:cNvPr>
+        <p:cNvGrpSpPr/>
+        <p:nvPr/>
+      </p:nvGrpSpPr>
+      <p:grpSpPr>
+        <a:xfrm>
+          <a:off x="0" y="0"/>
+          <a:ext cx="0" cy="0"/>
+          <a:chOff x="0" y="0"/>
+          <a:chExt cx="0" cy="0"/>
+        </a:xfrm>
+      </p:grpSpPr>
+      <p:pic>
+        <p:nvPicPr>
+          <p:cNvPr id="2" name="Picture 1" descr="bg_gradient.png">
+            <a:extLst>
+              <a:ext uri="{FF2B5EF4-FFF2-40B4-BE49-F238E27FC236}">
+                <a16:creationId xmlns:a16="http://schemas.microsoft.com/office/drawing/2014/main" id="{A9A57A92-F9AA-F07D-83F8-0E6E647C3842}"/>
+              </a:ext>
+            </a:extLst>
+          </p:cNvPr>
+          <p:cNvPicPr>
+            <a:picLocks noChangeAspect="1"/>
+          </p:cNvPicPr>
+          <p:nvPr/>
+        </p:nvPicPr>
+        <p:blipFill>
+          <a:blip r:embed="rId3"/>
+          <a:stretch>
+            <a:fillRect/>
+          </a:stretch>
+        </p:blipFill>
+        <p:spPr>
+          <a:xfrm>
+            <a:off x="0" y="0"/>
+            <a:ext cx="12188952" cy="6858000"/>
+          </a:xfrm>
+          <a:prstGeom prst="rect">
+            <a:avLst/>
+          </a:prstGeom>
+        </p:spPr>
+      </p:pic>
+      <p:pic>
+        <p:nvPicPr>
+          <p:cNvPr id="3" name="Picture 2" descr="ai_shield_cyan.png">
+            <a:extLst>
+              <a:ext uri="{FF2B5EF4-FFF2-40B4-BE49-F238E27FC236}">
+                <a16:creationId xmlns:a16="http://schemas.microsoft.com/office/drawing/2014/main" id="{96E7D972-4A3E-AB53-6815-7F6A3E5122D8}"/>
+              </a:ext>
+            </a:extLst>
+          </p:cNvPr>
+          <p:cNvPicPr>
+            <a:picLocks noChangeAspect="1"/>
+          </p:cNvPicPr>
+          <p:nvPr/>
+        </p:nvPicPr>
+        <p:blipFill>
+          <a:blip r:embed="rId4"/>
+          <a:stretch>
+            <a:fillRect/>
+          </a:stretch>
+        </p:blipFill>
+        <p:spPr>
+          <a:xfrm>
+            <a:off x="11036952" y="360000"/>
+            <a:ext cx="792000" cy="924000"/>
+          </a:xfrm>
+          <a:prstGeom prst="rect">
+            <a:avLst/>
+          </a:prstGeom>
+        </p:spPr>
+      </p:pic>
+      <p:sp>
+        <p:nvSpPr>
+          <p:cNvPr id="4" name="TextBox 3">
+            <a:extLst>
+              <a:ext uri="{FF2B5EF4-FFF2-40B4-BE49-F238E27FC236}">
+                <a16:creationId xmlns:a16="http://schemas.microsoft.com/office/drawing/2014/main" id="{7E16D2CC-6512-BF2F-D74F-DE8E5915EB43}"/>
+              </a:ext>
+            </a:extLst>
+          </p:cNvPr>
+          <p:cNvSpPr txBox="1"/>
+          <p:nvPr/>
+        </p:nvSpPr>
+        <p:spPr>
+          <a:xfrm>
+            <a:off x="2968590" y="1284000"/>
+            <a:ext cx="6147881" cy="677108"/>
+          </a:xfrm>
+          <a:prstGeom prst="rect">
+            <a:avLst/>
+          </a:prstGeom>
+          <a:noFill/>
+        </p:spPr>
+        <p:txBody>
+          <a:bodyPr wrap="square">
+            <a:spAutoFit/>
+          </a:bodyPr>
+          <a:lstStyle/>
+          <a:p>
+            <a:pPr>
+              <a:defRPr sz="3800" b="1">
+                <a:solidFill>
+                  <a:srgbClr val="00B6C9"/>
+                </a:solidFill>
+                <a:latin typeface="Arial Rounded MT Bold"/>
+              </a:defRPr>
+            </a:pPr>
+            <a:r>
+              <a:rPr lang="en-US" dirty="0"/>
+              <a:t>Thanks for your attention</a:t>
+            </a:r>
+            <a:endParaRPr dirty="0"/>
+          </a:p>
+        </p:txBody>
+      </p:sp>
+      <p:sp>
+        <p:nvSpPr>
+          <p:cNvPr id="5" name="TextBox 4">
+            <a:extLst>
+              <a:ext uri="{FF2B5EF4-FFF2-40B4-BE49-F238E27FC236}">
+                <a16:creationId xmlns:a16="http://schemas.microsoft.com/office/drawing/2014/main" id="{E3D20457-5BEE-7901-9F81-AD74670134F9}"/>
+              </a:ext>
+            </a:extLst>
+          </p:cNvPr>
+          <p:cNvSpPr txBox="1"/>
+          <p:nvPr/>
+        </p:nvSpPr>
+        <p:spPr>
+          <a:xfrm>
+            <a:off x="4991291" y="3013501"/>
+            <a:ext cx="2206242" cy="830997"/>
+          </a:xfrm>
+          <a:prstGeom prst="rect">
+            <a:avLst/>
+          </a:prstGeom>
+          <a:noFill/>
+        </p:spPr>
+        <p:txBody>
+          <a:bodyPr wrap="square">
+            <a:spAutoFit/>
+          </a:bodyPr>
+          <a:lstStyle/>
+          <a:p>
+            <a:pPr>
+              <a:defRPr sz="2000">
+                <a:solidFill>
+                  <a:srgbClr val="FFFFFF"/>
+                </a:solidFill>
+                <a:latin typeface="Segoe UI"/>
+              </a:defRPr>
+            </a:pPr>
+            <a:r>
+              <a:rPr lang="en-US" sz="4800" b="1" dirty="0">
+                <a:latin typeface="Arial Black" panose="020B0A04020102020204" pitchFamily="34" charset="0"/>
+              </a:rPr>
+              <a:t>Q &amp; A</a:t>
+            </a:r>
+            <a:endParaRPr sz="4800" b="1" dirty="0">
+              <a:latin typeface="Arial Black" panose="020B0A04020102020204" pitchFamily="34" charset="0"/>
+            </a:endParaRPr>
+          </a:p>
+        </p:txBody>
+      </p:sp>
+    </p:spTree>
+    <p:extLst>
+      <p:ext uri="{BB962C8B-B14F-4D97-AF65-F5344CB8AC3E}">
+        <p14:creationId xmlns:p14="http://schemas.microsoft.com/office/powerpoint/2010/main" val="2244778504"/>
+      </p:ext>
+    </p:extLst>
+  </p:cSld>
+  <p:clrMapOvr>
+    <a:masterClrMapping/>
+  </p:clrMapOvr>
+</p:sld>
+</file>
+
+<file path=ppt/slides/slide2.xml><?xml version="1.0" encoding="utf-8"?>
+<p:sld xmlns:a="http://schemas.openxmlformats.org/drawingml/2006/main" xmlns:p="http://schemas.openxmlformats.org/presentationml/2006/main" xmlns:r="http://schemas.openxmlformats.org/officeDocument/2006/relationships">
+  <p:cSld>
+    <p:bg>
+      <p:bgPr>
+        <a:solidFill>
+          <a:srgbClr val="E8DCC4"/>
+        </a:solidFill>
+        <a:effectLst/>
+      </p:bgPr>
+    </p:bg>
+    <p:spTree>
+      <p:nvGrpSpPr>
+        <p:cNvPr id="1" name=""/>
+        <p:cNvGrpSpPr/>
+        <p:nvPr/>
+      </p:nvGrpSpPr>
+      <p:grpSpPr/>
+      <p:sp>
+        <p:nvSpPr>
+          <p:cNvPr id="2" name="Title 1"/>
+          <p:cNvSpPr>
+            <a:spLocks noGrp="1"/>
+          </p:cNvSpPr>
+          <p:nvPr>
+            <p:ph type="title"/>
+          </p:nvPr>
+        </p:nvSpPr>
+        <p:spPr/>
+        <p:txBody>
+          <a:bodyPr/>
+          <a:lstStyle/>
+          <a:p>
+            <a:pPr>
+              <a:defRPr b="1">
+                <a:solidFill>
+                  <a:srgbClr val="8B7355"/>
+                </a:solidFill>
+                <a:latin typeface="Arial"/>
+              </a:defRPr>
+            </a:pPr>
+            <a:r>
+              <a:t>The Problem: The 'Smart' World is Critically Vulnerable</a:t>
+            </a:r>
+          </a:p>
+        </p:txBody>
+      </p:sp>
+      <p:sp>
+        <p:nvSpPr>
+          <p:cNvPr id="3" name="Content Placeholder 2"/>
+          <p:cNvSpPr>
+            <a:spLocks noGrp="1"/>
+          </p:cNvSpPr>
+          <p:nvPr>
+            <p:ph idx="1"/>
+          </p:nvPr>
+        </p:nvSpPr>
+        <p:spPr/>
+        <p:txBody>
+          <a:bodyPr/>
+          <a:lstStyle/>
+          <a:p/>
+          <a:p>
+            <a:pPr>
+              <a:spcAft>
+                <a:spcPts val="1400"/>
+              </a:spcAft>
+              <a:defRPr sz="2000">
+                <a:solidFill>
+                  <a:srgbClr val="333333"/>
+                </a:solidFill>
+                <a:latin typeface="Arial"/>
+              </a:defRPr>
+            </a:pPr>
+            <a:r>
+              <a:t>• Explosion of Attack Surface: 75 Billion IoT devices by 2025.</a:t>
+            </a:r>
+          </a:p>
+          <a:p>
+            <a:pPr>
+              <a:spcAft>
+                <a:spcPts val="1400"/>
+              </a:spcAft>
+              <a:defRPr sz="2000">
+                <a:solidFill>
+                  <a:srgbClr val="333333"/>
+                </a:solidFill>
+                <a:latin typeface="Arial"/>
+              </a:defRPr>
+            </a:pPr>
+            <a:r>
+              <a:t>• Resource Constraints: Existing security tools (agents, firewalls) are too heavy for microcontrollers.</a:t>
+            </a:r>
+          </a:p>
+          <a:p>
+            <a:pPr>
+              <a:spcAft>
+                <a:spcPts val="1400"/>
+              </a:spcAft>
+              <a:defRPr sz="2000">
+                <a:solidFill>
+                  <a:srgbClr val="333333"/>
+                </a:solidFill>
+                <a:latin typeface="Arial"/>
+              </a:defRPr>
+            </a:pPr>
+            <a:r>
+              <a:t>• The Result: 98% of IoT traffic is unencrypted or vulnerable.</a:t>
+            </a:r>
+          </a:p>
+          <a:p>
+            <a:pPr>
+              <a:spcAft>
+                <a:spcPts val="1400"/>
+              </a:spcAft>
+              <a:defRPr sz="2000">
+                <a:solidFill>
+                  <a:srgbClr val="333333"/>
+                </a:solidFill>
+                <a:latin typeface="Arial"/>
+              </a:defRPr>
+            </a:pPr>
+            <a:r>
+              <a:t>• Critical Risk: Ransomware in hospitals, grid shutdowns, industrial espionage.</a:t>
+            </a:r>
+          </a:p>
+        </p:txBody>
+      </p:sp>
+    </p:spTree>
+  </p:cSld>
+  <p:clrMapOvr>
+    <a:masterClrMapping/>
+  </p:clrMapOvr>
+</p:sld>
+</file>
+
 <file path=ppt/slides/slide2.xml><?xml version="1.0" encoding="utf-8"?>
 <p:sld xmlns:a="http://schemas.openxmlformats.org/drawingml/2006/main" xmlns:p="http://schemas.openxmlformats.org/presentationml/2006/main" xmlns:r="http://schemas.openxmlformats.org/officeDocument/2006/relationships">
   <p:cSld>
@@ -5529,6 +7179,278 @@
 </p:sld>
 </file>
 
+<file path=ppt/slides/slide3.xml><?xml version="1.0" encoding="utf-8"?>
+<p:sld xmlns:a="http://schemas.openxmlformats.org/drawingml/2006/main" xmlns:p="http://schemas.openxmlformats.org/presentationml/2006/main" xmlns:r="http://schemas.openxmlformats.org/officeDocument/2006/relationships">
+  <p:cSld>
+    <p:bg>
+      <p:bgPr>
+        <a:solidFill>
+          <a:srgbClr val="E8DCC4"/>
+        </a:solidFill>
+        <a:effectLst/>
+      </p:bgPr>
+    </p:bg>
+    <p:spTree>
+      <p:nvGrpSpPr>
+        <p:cNvPr id="1" name=""/>
+        <p:cNvGrpSpPr/>
+        <p:nvPr/>
+      </p:nvGrpSpPr>
+      <p:grpSpPr/>
+      <p:sp>
+        <p:nvSpPr>
+          <p:cNvPr id="2" name="Title 1"/>
+          <p:cNvSpPr>
+            <a:spLocks noGrp="1"/>
+          </p:cNvSpPr>
+          <p:nvPr>
+            <p:ph type="title"/>
+          </p:nvPr>
+        </p:nvSpPr>
+        <p:spPr/>
+        <p:txBody>
+          <a:bodyPr/>
+          <a:lstStyle/>
+          <a:p>
+            <a:pPr>
+              <a:defRPr b="1">
+                <a:solidFill>
+                  <a:srgbClr val="8B7355"/>
+                </a:solidFill>
+                <a:latin typeface="Arial"/>
+              </a:defRPr>
+            </a:pPr>
+            <a:r>
+              <a:t>Why Now? The Regulatory Tsunami</a:t>
+            </a:r>
+          </a:p>
+        </p:txBody>
+      </p:sp>
+      <p:sp>
+        <p:nvSpPr>
+          <p:cNvPr id="3" name="Content Placeholder 2"/>
+          <p:cNvSpPr>
+            <a:spLocks noGrp="1"/>
+          </p:cNvSpPr>
+          <p:nvPr>
+            <p:ph idx="1"/>
+          </p:nvPr>
+        </p:nvSpPr>
+        <p:spPr/>
+        <p:txBody>
+          <a:bodyPr/>
+          <a:lstStyle/>
+          <a:p/>
+          <a:p>
+            <a:pPr>
+              <a:spcAft>
+                <a:spcPts val="1400"/>
+              </a:spcAft>
+              <a:defRPr sz="2000">
+                <a:solidFill>
+                  <a:srgbClr val="333333"/>
+                </a:solidFill>
+                <a:latin typeface="Arial"/>
+              </a:defRPr>
+            </a:pPr>
+            <a:r>
+              <a:t>• EU Cyber Resilience Act (CRA): Mandatory cybersecurity for ALL connected products by 2025/2026.</a:t>
+            </a:r>
+          </a:p>
+          <a:p>
+            <a:pPr>
+              <a:spcAft>
+                <a:spcPts val="1400"/>
+              </a:spcAft>
+              <a:defRPr sz="2000">
+                <a:solidFill>
+                  <a:srgbClr val="333333"/>
+                </a:solidFill>
+                <a:latin typeface="Arial"/>
+              </a:defRPr>
+            </a:pPr>
+            <a:r>
+              <a:t>• IEC 62443: Moving from 'nice-to-have' to 'must-have' for industrial compliance.</a:t>
+            </a:r>
+          </a:p>
+          <a:p>
+            <a:pPr>
+              <a:spcAft>
+                <a:spcPts val="1400"/>
+              </a:spcAft>
+              <a:defRPr sz="2000">
+                <a:solidFill>
+                  <a:srgbClr val="333333"/>
+                </a:solidFill>
+                <a:latin typeface="Arial"/>
+              </a:defRPr>
+            </a:pPr>
+            <a:r>
+              <a:t>• The Market Gap: Manufacturers are entering a panic mode. They lack the expertise to build compliant security from scratch.</a:t>
+            </a:r>
+          </a:p>
+          <a:p>
+            <a:pPr>
+              <a:spcAft>
+                <a:spcPts val="1400"/>
+              </a:spcAft>
+              <a:defRPr sz="2000">
+                <a:solidFill>
+                  <a:srgbClr val="333333"/>
+                </a:solidFill>
+                <a:latin typeface="Arial"/>
+              </a:defRPr>
+            </a:pPr>
+            <a:r>
+              <a:t>• Opportunity: Compliance is no longer optional—it is a license to operate.</a:t>
+            </a:r>
+          </a:p>
+        </p:txBody>
+      </p:sp>
+    </p:spTree>
+  </p:cSld>
+  <p:clrMapOvr>
+    <a:masterClrMapping/>
+  </p:clrMapOvr>
+</p:sld>
+</file>
+
+<file path=ppt/slides/slide4.xml><?xml version="1.0" encoding="utf-8"?>
+<p:sld xmlns:a="http://schemas.openxmlformats.org/drawingml/2006/main" xmlns:p="http://schemas.openxmlformats.org/presentationml/2006/main" xmlns:r="http://schemas.openxmlformats.org/officeDocument/2006/relationships">
+  <p:cSld>
+    <p:bg>
+      <p:bgPr>
+        <a:solidFill>
+          <a:srgbClr val="E8DCC4"/>
+        </a:solidFill>
+        <a:effectLst/>
+      </p:bgPr>
+    </p:bg>
+    <p:spTree>
+      <p:nvGrpSpPr>
+        <p:cNvPr id="1" name=""/>
+        <p:cNvGrpSpPr/>
+        <p:nvPr/>
+      </p:nvGrpSpPr>
+      <p:grpSpPr/>
+      <p:sp>
+        <p:nvSpPr>
+          <p:cNvPr id="2" name="Title 1"/>
+          <p:cNvSpPr>
+            <a:spLocks noGrp="1"/>
+          </p:cNvSpPr>
+          <p:nvPr>
+            <p:ph type="title"/>
+          </p:nvPr>
+        </p:nvSpPr>
+        <p:spPr/>
+        <p:txBody>
+          <a:bodyPr/>
+          <a:lstStyle/>
+          <a:p>
+            <a:pPr>
+              <a:defRPr b="1">
+                <a:solidFill>
+                  <a:srgbClr val="8B7355"/>
+                </a:solidFill>
+                <a:latin typeface="Arial"/>
+              </a:defRPr>
+            </a:pPr>
+            <a:r>
+              <a:t>The Solution: LambdaIDS</a:t>
+            </a:r>
+          </a:p>
+        </p:txBody>
+      </p:sp>
+      <p:sp>
+        <p:nvSpPr>
+          <p:cNvPr id="3" name="Content Placeholder 2"/>
+          <p:cNvSpPr>
+            <a:spLocks noGrp="1"/>
+          </p:cNvSpPr>
+          <p:nvPr>
+            <p:ph idx="1"/>
+          </p:nvPr>
+        </p:nvSpPr>
+        <p:spPr/>
+        <p:txBody>
+          <a:bodyPr/>
+          <a:lstStyle/>
+          <a:p/>
+          <a:p>
+            <a:pPr>
+              <a:spcAft>
+                <a:spcPts val="1400"/>
+              </a:spcAft>
+              <a:defRPr sz="2000">
+                <a:solidFill>
+                  <a:srgbClr val="333333"/>
+                </a:solidFill>
+                <a:latin typeface="Arial"/>
+              </a:defRPr>
+            </a:pPr>
+            <a:r>
+              <a:t>• Autonomous On-Device Security: An AI agent that lives ON the microcontroller.</a:t>
+            </a:r>
+          </a:p>
+          <a:p>
+            <a:pPr>
+              <a:spcAft>
+                <a:spcPts val="1400"/>
+              </a:spcAft>
+              <a:defRPr sz="2000">
+                <a:solidFill>
+                  <a:srgbClr val="333333"/>
+                </a:solidFill>
+                <a:latin typeface="Arial"/>
+              </a:defRPr>
+            </a:pPr>
+            <a:r>
+              <a:t>• Real-time Anomaly Detection: Detects zero-day attacks instantly without cloud latency.</a:t>
+            </a:r>
+          </a:p>
+          <a:p>
+            <a:pPr>
+              <a:spcAft>
+                <a:spcPts val="1400"/>
+              </a:spcAft>
+              <a:defRPr sz="2000">
+                <a:solidFill>
+                  <a:srgbClr val="333333"/>
+                </a:solidFill>
+                <a:latin typeface="Arial"/>
+              </a:defRPr>
+            </a:pPr>
+            <a:r>
+              <a:t>• Ultra-Lightweight: Runs on &lt;100KB RAM. Consumes negligible battery.</a:t>
+            </a:r>
+          </a:p>
+          <a:p>
+            <a:pPr>
+              <a:spcAft>
+                <a:spcPts val="1400"/>
+              </a:spcAft>
+              <a:defRPr sz="2000">
+                <a:solidFill>
+                  <a:srgbClr val="333333"/>
+                </a:solidFill>
+                <a:latin typeface="Arial"/>
+              </a:defRPr>
+            </a:pPr>
+            <a:r>
+              <a:t>• Compliance-Ready: Built to satisfy IEC 62443 and CRA requirements out of the box.</a:t>
+            </a:r>
+          </a:p>
+        </p:txBody>
+      </p:sp>
+    </p:spTree>
+  </p:cSld>
+  <p:clrMapOvr>
+    <a:masterClrMapping/>
+  </p:clrMapOvr>
+</p:sld>
+</file>
+
 <file path=ppt/slides/slide4.xml><?xml version="1.0" encoding="utf-8"?>
 <p:sld xmlns:a="http://schemas.openxmlformats.org/drawingml/2006/main" xmlns:p="http://schemas.openxmlformats.org/presentationml/2006/main" xmlns:r="http://schemas.openxmlformats.org/officeDocument/2006/relationships">
   <p:cSld>
@@ -5785,6 +7707,262 @@
 </p:sld>
 </file>
 
+<file path=ppt/slides/slide5.xml><?xml version="1.0" encoding="utf-8"?>
+<p:sld xmlns:a="http://schemas.openxmlformats.org/drawingml/2006/main" xmlns:p="http://schemas.openxmlformats.org/presentationml/2006/main" xmlns:r="http://schemas.openxmlformats.org/officeDocument/2006/relationships">
+  <p:cSld>
+    <p:bg>
+      <p:bgPr>
+        <a:solidFill>
+          <a:srgbClr val="E8DCC4"/>
+        </a:solidFill>
+        <a:effectLst/>
+      </p:bgPr>
+    </p:bg>
+    <p:spTree>
+      <p:nvGrpSpPr>
+        <p:cNvPr id="1" name=""/>
+        <p:cNvGrpSpPr/>
+        <p:nvPr/>
+      </p:nvGrpSpPr>
+      <p:grpSpPr/>
+      <p:sp>
+        <p:nvSpPr>
+          <p:cNvPr id="2" name="Title 1"/>
+          <p:cNvSpPr>
+            <a:spLocks noGrp="1"/>
+          </p:cNvSpPr>
+          <p:nvPr>
+            <p:ph type="title"/>
+          </p:nvPr>
+        </p:nvSpPr>
+        <p:spPr/>
+        <p:txBody>
+          <a:bodyPr/>
+          <a:lstStyle/>
+          <a:p>
+            <a:pPr>
+              <a:defRPr b="1">
+                <a:solidFill>
+                  <a:srgbClr val="8B7355"/>
+                </a:solidFill>
+                <a:latin typeface="Arial"/>
+              </a:defRPr>
+            </a:pPr>
+            <a:r>
+              <a:t>How It Works: Edge AI vs. Cloud Security</a:t>
+            </a:r>
+          </a:p>
+        </p:txBody>
+      </p:sp>
+      <p:sp>
+        <p:nvSpPr>
+          <p:cNvPr id="3" name="Content Placeholder 2"/>
+          <p:cNvSpPr>
+            <a:spLocks noGrp="1"/>
+          </p:cNvSpPr>
+          <p:nvPr>
+            <p:ph idx="1"/>
+          </p:nvPr>
+        </p:nvSpPr>
+        <p:spPr/>
+        <p:txBody>
+          <a:bodyPr/>
+          <a:lstStyle/>
+          <a:p/>
+          <a:p>
+            <a:pPr>
+              <a:spcAft>
+                <a:spcPts val="1400"/>
+              </a:spcAft>
+              <a:defRPr sz="2000">
+                <a:solidFill>
+                  <a:srgbClr val="333333"/>
+                </a:solidFill>
+                <a:latin typeface="Arial"/>
+              </a:defRPr>
+            </a:pPr>
+            <a:r>
+              <a:t>• Traditional (Cloud): High latency, privacy risks, high data cost, fails offline.</a:t>
+            </a:r>
+          </a:p>
+          <a:p>
+            <a:pPr>
+              <a:spcAft>
+                <a:spcPts val="1400"/>
+              </a:spcAft>
+              <a:defRPr sz="2000">
+                <a:solidFill>
+                  <a:srgbClr val="333333"/>
+                </a:solidFill>
+                <a:latin typeface="Arial"/>
+              </a:defRPr>
+            </a:pPr>
+            <a:r>
+              <a:t>• LambdaIDS (Edge): Zero latency, privacy-preserving, works offline, 100x more energy efficient.</a:t>
+            </a:r>
+          </a:p>
+          <a:p>
+            <a:pPr>
+              <a:spcAft>
+                <a:spcPts val="1400"/>
+              </a:spcAft>
+              <a:defRPr sz="2000">
+                <a:solidFill>
+                  <a:srgbClr val="333333"/>
+                </a:solidFill>
+                <a:latin typeface="Arial"/>
+              </a:defRPr>
+            </a:pPr>
+            <a:r>
+              <a:t>• Tech Stack: Proprietary TinyML algorithms optimized for ARM Cortex-M and RISC-V.</a:t>
+            </a:r>
+          </a:p>
+        </p:txBody>
+      </p:sp>
+    </p:spTree>
+  </p:cSld>
+  <p:clrMapOvr>
+    <a:masterClrMapping/>
+  </p:clrMapOvr>
+</p:sld>
+</file>
+
+<file path=ppt/slides/slide6.xml><?xml version="1.0" encoding="utf-8"?>
+<p:sld xmlns:a="http://schemas.openxmlformats.org/drawingml/2006/main" xmlns:p="http://schemas.openxmlformats.org/presentationml/2006/main" xmlns:r="http://schemas.openxmlformats.org/officeDocument/2006/relationships">
+  <p:cSld>
+    <p:bg>
+      <p:bgPr>
+        <a:solidFill>
+          <a:srgbClr val="E8DCC4"/>
+        </a:solidFill>
+        <a:effectLst/>
+      </p:bgPr>
+    </p:bg>
+    <p:spTree>
+      <p:nvGrpSpPr>
+        <p:cNvPr id="1" name=""/>
+        <p:cNvGrpSpPr/>
+        <p:nvPr/>
+      </p:nvGrpSpPr>
+      <p:grpSpPr/>
+      <p:sp>
+        <p:nvSpPr>
+          <p:cNvPr id="2" name="Title 1"/>
+          <p:cNvSpPr>
+            <a:spLocks noGrp="1"/>
+          </p:cNvSpPr>
+          <p:nvPr>
+            <p:ph type="title"/>
+          </p:nvPr>
+        </p:nvSpPr>
+        <p:spPr/>
+        <p:txBody>
+          <a:bodyPr/>
+          <a:lstStyle/>
+          <a:p>
+            <a:pPr>
+              <a:defRPr b="1">
+                <a:solidFill>
+                  <a:srgbClr val="8B7355"/>
+                </a:solidFill>
+                <a:latin typeface="Arial"/>
+              </a:defRPr>
+            </a:pPr>
+            <a:r>
+              <a:t>Market Opportunity</a:t>
+            </a:r>
+          </a:p>
+        </p:txBody>
+      </p:sp>
+      <p:sp>
+        <p:nvSpPr>
+          <p:cNvPr id="3" name="Content Placeholder 2"/>
+          <p:cNvSpPr>
+            <a:spLocks noGrp="1"/>
+          </p:cNvSpPr>
+          <p:nvPr>
+            <p:ph idx="1"/>
+          </p:nvPr>
+        </p:nvSpPr>
+        <p:spPr/>
+        <p:txBody>
+          <a:bodyPr/>
+          <a:lstStyle/>
+          <a:p/>
+          <a:p>
+            <a:pPr>
+              <a:spcAft>
+                <a:spcPts val="1400"/>
+              </a:spcAft>
+              <a:defRPr sz="2000">
+                <a:solidFill>
+                  <a:srgbClr val="333333"/>
+                </a:solidFill>
+                <a:latin typeface="Arial"/>
+              </a:defRPr>
+            </a:pPr>
+            <a:r>
+              <a:t>• Total Addressable Market (TAM): $30B+ IoT Security Market (growing 25% YoY).</a:t>
+            </a:r>
+          </a:p>
+          <a:p>
+            <a:pPr>
+              <a:spcAft>
+                <a:spcPts val="1400"/>
+              </a:spcAft>
+              <a:defRPr sz="2000">
+                <a:solidFill>
+                  <a:srgbClr val="333333"/>
+                </a:solidFill>
+                <a:latin typeface="Arial"/>
+              </a:defRPr>
+            </a:pPr>
+            <a:r>
+              <a:t>• Serviceable Available Market (SAM): $4B Industrial &amp; Utility IoT Security.</a:t>
+            </a:r>
+          </a:p>
+          <a:p>
+            <a:pPr>
+              <a:spcAft>
+                <a:spcPts val="1400"/>
+              </a:spcAft>
+              <a:defRPr sz="2000">
+                <a:solidFill>
+                  <a:srgbClr val="333333"/>
+                </a:solidFill>
+                <a:latin typeface="Arial"/>
+              </a:defRPr>
+            </a:pPr>
+            <a:r>
+              <a:t>• Serviceable Obtainable Market (SOM): $100M (Nordic + MENA Critical Infrastructure).</a:t>
+            </a:r>
+          </a:p>
+          <a:p>
+            <a:pPr>
+              <a:spcAft>
+                <a:spcPts val="1400"/>
+              </a:spcAft>
+              <a:defRPr sz="2000">
+                <a:solidFill>
+                  <a:srgbClr val="333333"/>
+                </a:solidFill>
+                <a:latin typeface="Arial"/>
+              </a:defRPr>
+            </a:pPr>
+            <a:r>
+              <a:t>• Target Segments: Industrial Automation (IIoT), Smart Energy, Automotive.</a:t>
+            </a:r>
+          </a:p>
+        </p:txBody>
+      </p:sp>
+    </p:spTree>
+  </p:cSld>
+  <p:clrMapOvr>
+    <a:masterClrMapping/>
+  </p:clrMapOvr>
+</p:sld>
+</file>
+
 <file path=ppt/slides/slide6.xml><?xml version="1.0" encoding="utf-8"?>
 <p:sld xmlns:a="http://schemas.openxmlformats.org/drawingml/2006/main" xmlns:p="http://schemas.openxmlformats.org/presentationml/2006/main" xmlns:r="http://schemas.openxmlformats.org/officeDocument/2006/relationships">
   <p:cSld>
@@ -6057,6 +8235,142 @@
 </p:sld>
 </file>
 
+<file path=ppt/slides/slide7.xml><?xml version="1.0" encoding="utf-8"?>
+<p:sld xmlns:a="http://schemas.openxmlformats.org/drawingml/2006/main" xmlns:p="http://schemas.openxmlformats.org/presentationml/2006/main" xmlns:r="http://schemas.openxmlformats.org/officeDocument/2006/relationships">
+  <p:cSld>
+    <p:bg>
+      <p:bgPr>
+        <a:solidFill>
+          <a:srgbClr val="E8DCC4"/>
+        </a:solidFill>
+        <a:effectLst/>
+      </p:bgPr>
+    </p:bg>
+    <p:spTree>
+      <p:nvGrpSpPr>
+        <p:cNvPr id="1" name=""/>
+        <p:cNvGrpSpPr/>
+        <p:nvPr/>
+      </p:nvGrpSpPr>
+      <p:grpSpPr/>
+      <p:sp>
+        <p:nvSpPr>
+          <p:cNvPr id="2" name="Title 1"/>
+          <p:cNvSpPr>
+            <a:spLocks noGrp="1"/>
+          </p:cNvSpPr>
+          <p:nvPr>
+            <p:ph type="title"/>
+          </p:nvPr>
+        </p:nvSpPr>
+        <p:spPr/>
+        <p:txBody>
+          <a:bodyPr/>
+          <a:lstStyle/>
+          <a:p>
+            <a:pPr>
+              <a:defRPr b="1">
+                <a:solidFill>
+                  <a:srgbClr val="8B7355"/>
+                </a:solidFill>
+                <a:latin typeface="Arial"/>
+              </a:defRPr>
+            </a:pPr>
+            <a:r>
+              <a:t>Business Model</a:t>
+            </a:r>
+          </a:p>
+        </p:txBody>
+      </p:sp>
+      <p:sp>
+        <p:nvSpPr>
+          <p:cNvPr id="3" name="Content Placeholder 2"/>
+          <p:cNvSpPr>
+            <a:spLocks noGrp="1"/>
+          </p:cNvSpPr>
+          <p:nvPr>
+            <p:ph idx="1"/>
+          </p:nvPr>
+        </p:nvSpPr>
+        <p:spPr/>
+        <p:txBody>
+          <a:bodyPr/>
+          <a:lstStyle/>
+          <a:p/>
+          <a:p>
+            <a:pPr>
+              <a:spcAft>
+                <a:spcPts val="1400"/>
+              </a:spcAft>
+              <a:defRPr sz="2000">
+                <a:solidFill>
+                  <a:srgbClr val="333333"/>
+                </a:solidFill>
+                <a:latin typeface="Arial"/>
+              </a:defRPr>
+            </a:pPr>
+            <a:r>
+              <a:t>• B2B Licensing &amp; SDK: Per-device license fee for OEMs.</a:t>
+            </a:r>
+          </a:p>
+          <a:p>
+            <a:pPr>
+              <a:spcAft>
+                <a:spcPts val="1400"/>
+              </a:spcAft>
+              <a:defRPr sz="2000">
+                <a:solidFill>
+                  <a:srgbClr val="333333"/>
+                </a:solidFill>
+                <a:latin typeface="Arial"/>
+              </a:defRPr>
+            </a:pPr>
+            <a:r>
+              <a:t>• Tiered Subscription: Basic (Detection) vs. Pro (Prevention + Fleet Analytics).</a:t>
+            </a:r>
+          </a:p>
+          <a:p>
+            <a:pPr>
+              <a:spcAft>
+                <a:spcPts val="1400"/>
+              </a:spcAft>
+              <a:defRPr sz="2000">
+                <a:solidFill>
+                  <a:srgbClr val="333333"/>
+                </a:solidFill>
+                <a:latin typeface="Arial"/>
+              </a:defRPr>
+            </a:pPr>
+            <a:r>
+              <a:t>• Pilot Strategy: Paid pilots with Tier 1 manufacturers to validate and customize.</a:t>
+            </a:r>
+          </a:p>
+          <a:p>
+            <a:pPr>
+              <a:spcAft>
+                <a:spcPts val="1400"/>
+              </a:spcAft>
+              <a:defRPr sz="2000">
+                <a:solidFill>
+                  <a:srgbClr val="333333"/>
+                </a:solidFill>
+                <a:latin typeface="Arial"/>
+              </a:defRPr>
+            </a:pPr>
+            <a:r>
+              <a:t>• Scalability: High-margin software model (80%+ gross margin at scale).</a:t>
+            </a:r>
+          </a:p>
+        </p:txBody>
+      </p:sp>
+    </p:spTree>
+  </p:cSld>
+  <p:clrMapOvr>
+    <a:masterClrMapping/>
+  </p:clrMapOvr>
+</p:sld>
+</file>
+
 <file path=ppt/slides/slide8.xml><?xml version="1.0" encoding="utf-8"?>
 <p:sld xmlns:a="http://schemas.openxmlformats.org/drawingml/2006/main" xmlns:p="http://schemas.openxmlformats.org/presentationml/2006/main" xmlns:r="http://schemas.openxmlformats.org/officeDocument/2006/relationships">
   <p:cSld>
@@ -6181,6 +8495,278 @@
             </a:pPr>
             <a:r>
               <a:t>• Pipeline: Discussions with major players in Industrial Automation (ABB, Siemens ecosystem).</a:t>
+            </a:r>
+          </a:p>
+        </p:txBody>
+      </p:sp>
+    </p:spTree>
+  </p:cSld>
+  <p:clrMapOvr>
+    <a:masterClrMapping/>
+  </p:clrMapOvr>
+</p:sld>
+</file>
+
+<file path=ppt/slides/slide8.xml><?xml version="1.0" encoding="utf-8"?>
+<p:sld xmlns:a="http://schemas.openxmlformats.org/drawingml/2006/main" xmlns:p="http://schemas.openxmlformats.org/presentationml/2006/main" xmlns:r="http://schemas.openxmlformats.org/officeDocument/2006/relationships">
+  <p:cSld>
+    <p:bg>
+      <p:bgPr>
+        <a:solidFill>
+          <a:srgbClr val="E8DCC4"/>
+        </a:solidFill>
+        <a:effectLst/>
+      </p:bgPr>
+    </p:bg>
+    <p:spTree>
+      <p:nvGrpSpPr>
+        <p:cNvPr id="1" name=""/>
+        <p:cNvGrpSpPr/>
+        <p:nvPr/>
+      </p:nvGrpSpPr>
+      <p:grpSpPr/>
+      <p:sp>
+        <p:nvSpPr>
+          <p:cNvPr id="2" name="Title 1"/>
+          <p:cNvSpPr>
+            <a:spLocks noGrp="1"/>
+          </p:cNvSpPr>
+          <p:nvPr>
+            <p:ph type="title"/>
+          </p:nvPr>
+        </p:nvSpPr>
+        <p:spPr/>
+        <p:txBody>
+          <a:bodyPr/>
+          <a:lstStyle/>
+          <a:p>
+            <a:pPr>
+              <a:defRPr b="1">
+                <a:solidFill>
+                  <a:srgbClr val="8B7355"/>
+                </a:solidFill>
+                <a:latin typeface="Arial"/>
+              </a:defRPr>
+            </a:pPr>
+            <a:r>
+              <a:t>Traction &amp; Validation</a:t>
+            </a:r>
+          </a:p>
+        </p:txBody>
+      </p:sp>
+      <p:sp>
+        <p:nvSpPr>
+          <p:cNvPr id="3" name="Content Placeholder 2"/>
+          <p:cNvSpPr>
+            <a:spLocks noGrp="1"/>
+          </p:cNvSpPr>
+          <p:nvPr>
+            <p:ph idx="1"/>
+          </p:nvPr>
+        </p:nvSpPr>
+        <p:spPr/>
+        <p:txBody>
+          <a:bodyPr/>
+          <a:lstStyle/>
+          <a:p/>
+          <a:p>
+            <a:pPr>
+              <a:spcAft>
+                <a:spcPts val="1400"/>
+              </a:spcAft>
+              <a:defRPr sz="2000">
+                <a:solidFill>
+                  <a:srgbClr val="333333"/>
+                </a:solidFill>
+                <a:latin typeface="Arial"/>
+              </a:defRPr>
+            </a:pPr>
+            <a:r>
+              <a:t>• Key Partners: Collaboration with Combitech &amp; RISE (Research Institutes of Sweden).</a:t>
+            </a:r>
+          </a:p>
+          <a:p>
+            <a:pPr>
+              <a:spcAft>
+                <a:spcPts val="1400"/>
+              </a:spcAft>
+              <a:defRPr sz="2000">
+                <a:solidFill>
+                  <a:srgbClr val="333333"/>
+                </a:solidFill>
+                <a:latin typeface="Arial"/>
+              </a:defRPr>
+            </a:pPr>
+            <a:r>
+              <a:t>• Academic Validation: Backed by cutting-edge research in Embedded AI.</a:t>
+            </a:r>
+          </a:p>
+          <a:p>
+            <a:pPr>
+              <a:spcAft>
+                <a:spcPts val="1400"/>
+              </a:spcAft>
+              <a:defRPr sz="2000">
+                <a:solidFill>
+                  <a:srgbClr val="333333"/>
+                </a:solidFill>
+                <a:latin typeface="Arial"/>
+              </a:defRPr>
+            </a:pPr>
+            <a:r>
+              <a:t>• Funding: Secured early grant funding (Vinnova/VFT). Validation of tech novelty.</a:t>
+            </a:r>
+          </a:p>
+          <a:p>
+            <a:pPr>
+              <a:spcAft>
+                <a:spcPts val="1400"/>
+              </a:spcAft>
+              <a:defRPr sz="2000">
+                <a:solidFill>
+                  <a:srgbClr val="333333"/>
+                </a:solidFill>
+                <a:latin typeface="Arial"/>
+              </a:defRPr>
+            </a:pPr>
+            <a:r>
+              <a:t>• Pipeline: Discussions with major players in Industrial Automation (ABB, Siemens ecosystem).</a:t>
+            </a:r>
+          </a:p>
+        </p:txBody>
+      </p:sp>
+    </p:spTree>
+  </p:cSld>
+  <p:clrMapOvr>
+    <a:masterClrMapping/>
+  </p:clrMapOvr>
+</p:sld>
+</file>
+
+<file path=ppt/slides/slide9.xml><?xml version="1.0" encoding="utf-8"?>
+<p:sld xmlns:a="http://schemas.openxmlformats.org/drawingml/2006/main" xmlns:p="http://schemas.openxmlformats.org/presentationml/2006/main" xmlns:r="http://schemas.openxmlformats.org/officeDocument/2006/relationships">
+  <p:cSld>
+    <p:bg>
+      <p:bgPr>
+        <a:solidFill>
+          <a:srgbClr val="E8DCC4"/>
+        </a:solidFill>
+        <a:effectLst/>
+      </p:bgPr>
+    </p:bg>
+    <p:spTree>
+      <p:nvGrpSpPr>
+        <p:cNvPr id="1" name=""/>
+        <p:cNvGrpSpPr/>
+        <p:nvPr/>
+      </p:nvGrpSpPr>
+      <p:grpSpPr/>
+      <p:sp>
+        <p:nvSpPr>
+          <p:cNvPr id="2" name="Title 1"/>
+          <p:cNvSpPr>
+            <a:spLocks noGrp="1"/>
+          </p:cNvSpPr>
+          <p:nvPr>
+            <p:ph type="title"/>
+          </p:nvPr>
+        </p:nvSpPr>
+        <p:spPr/>
+        <p:txBody>
+          <a:bodyPr/>
+          <a:lstStyle/>
+          <a:p>
+            <a:pPr>
+              <a:defRPr b="1">
+                <a:solidFill>
+                  <a:srgbClr val="8B7355"/>
+                </a:solidFill>
+                <a:latin typeface="Arial"/>
+              </a:defRPr>
+            </a:pPr>
+            <a:r>
+              <a:t>Competitive Landscape</a:t>
+            </a:r>
+          </a:p>
+        </p:txBody>
+      </p:sp>
+      <p:sp>
+        <p:nvSpPr>
+          <p:cNvPr id="3" name="Content Placeholder 2"/>
+          <p:cNvSpPr>
+            <a:spLocks noGrp="1"/>
+          </p:cNvSpPr>
+          <p:nvPr>
+            <p:ph idx="1"/>
+          </p:nvPr>
+        </p:nvSpPr>
+        <p:spPr/>
+        <p:txBody>
+          <a:bodyPr/>
+          <a:lstStyle/>
+          <a:p/>
+          <a:p>
+            <a:pPr>
+              <a:spcAft>
+                <a:spcPts val="1400"/>
+              </a:spcAft>
+              <a:defRPr sz="2000">
+                <a:solidFill>
+                  <a:srgbClr val="333333"/>
+                </a:solidFill>
+                <a:latin typeface="Arial"/>
+              </a:defRPr>
+            </a:pPr>
+            <a:r>
+              <a:t>• Cloud-Based (Darktrace, etc.): Too heavy, high latency. (LambdaIDS wins on Speed/Size).</a:t>
+            </a:r>
+          </a:p>
+          <a:p>
+            <a:pPr>
+              <a:spcAft>
+                <a:spcPts val="1400"/>
+              </a:spcAft>
+              <a:defRPr sz="2000">
+                <a:solidFill>
+                  <a:srgbClr val="333333"/>
+                </a:solidFill>
+                <a:latin typeface="Arial"/>
+              </a:defRPr>
+            </a:pPr>
+            <a:r>
+              <a:t>• Embedded Legacy (Firewalls): Static rules, can't stop zero-days. (LambdaIDS wins on Adaptability).</a:t>
+            </a:r>
+          </a:p>
+          <a:p>
+            <a:pPr>
+              <a:spcAft>
+                <a:spcPts val="1400"/>
+              </a:spcAft>
+              <a:defRPr sz="2000">
+                <a:solidFill>
+                  <a:srgbClr val="333333"/>
+                </a:solidFill>
+                <a:latin typeface="Arial"/>
+              </a:defRPr>
+            </a:pPr>
+            <a:r>
+              <a:t>• The LambdaIDS Advantage: The only solution combining TinyML + IEC 62443 Compliance + &lt;100KB Footprint.</a:t>
+            </a:r>
+          </a:p>
+          <a:p>
+            <a:pPr>
+              <a:spcAft>
+                <a:spcPts val="1400"/>
+              </a:spcAft>
+              <a:defRPr sz="2000">
+                <a:solidFill>
+                  <a:srgbClr val="333333"/>
+                </a:solidFill>
+                <a:latin typeface="Arial"/>
+              </a:defRPr>
+            </a:pPr>
+            <a:r>
+              <a:t>• Moat: Proprietary quantization algorithms &amp; curated attack datasets.</a:t>
             </a:r>
           </a:p>
         </p:txBody>
@@ -6660,44 +9246,44 @@
         <a:sysClr val="window" lastClr="FFFFFF"/>
       </a:lt1>
       <a:dk2>
-        <a:srgbClr val="1F497D"/>
+        <a:srgbClr val="0E2841"/>
       </a:dk2>
       <a:lt2>
-        <a:srgbClr val="EEECE1"/>
+        <a:srgbClr val="E8E8E8"/>
       </a:lt2>
       <a:accent1>
-        <a:srgbClr val="4F81BD"/>
+        <a:srgbClr val="156082"/>
       </a:accent1>
       <a:accent2>
-        <a:srgbClr val="C0504D"/>
+        <a:srgbClr val="E97132"/>
       </a:accent2>
       <a:accent3>
-        <a:srgbClr val="9BBB59"/>
+        <a:srgbClr val="196B24"/>
       </a:accent3>
       <a:accent4>
-        <a:srgbClr val="8064A2"/>
+        <a:srgbClr val="0F9ED5"/>
       </a:accent4>
       <a:accent5>
-        <a:srgbClr val="4BACC6"/>
+        <a:srgbClr val="A02B93"/>
       </a:accent5>
       <a:accent6>
-        <a:srgbClr val="F79646"/>
+        <a:srgbClr val="4EA72E"/>
       </a:accent6>
       <a:hlink>
-        <a:srgbClr val="0000FF"/>
+        <a:srgbClr val="467886"/>
       </a:hlink>
       <a:folHlink>
-        <a:srgbClr val="800080"/>
+        <a:srgbClr val="96607D"/>
       </a:folHlink>
     </a:clrScheme>
     <a:fontScheme name="Office">
       <a:majorFont>
-        <a:latin typeface="Calibri"/>
+        <a:latin typeface="Aptos Display" panose="02110004020202020204"/>
         <a:ea typeface=""/>
         <a:cs typeface=""/>
-        <a:font script="Jpan" typeface="ＭＳ Ｐゴシック"/>
+        <a:font script="Jpan" typeface="游ゴシック Light"/>
         <a:font script="Hang" typeface="맑은 고딕"/>
-        <a:font script="Hans" typeface="宋体"/>
+        <a:font script="Hans" typeface="等线 Light"/>
         <a:font script="Hant" typeface="新細明體"/>
         <a:font script="Arab" typeface="Times New Roman"/>
         <a:font script="Hebr" typeface="Times New Roman"/>
@@ -6725,14 +9311,31 @@
         <a:font script="Viet" typeface="Times New Roman"/>
         <a:font script="Uigh" typeface="Microsoft Uighur"/>
         <a:font script="Geor" typeface="Sylfaen"/>
+        <a:font script="Armn" typeface="Arial"/>
+        <a:font script="Bugi" typeface="Leelawadee UI"/>
+        <a:font script="Bopo" typeface="Microsoft JhengHei"/>
+        <a:font script="Java" typeface="Javanese Text"/>
+        <a:font script="Lisu" typeface="Segoe UI"/>
+        <a:font script="Mymr" typeface="Myanmar Text"/>
+        <a:font script="Nkoo" typeface="Ebrima"/>
+        <a:font script="Olck" typeface="Nirmala UI"/>
+        <a:font script="Osma" typeface="Ebrima"/>
+        <a:font script="Phag" typeface="Phagspa"/>
+        <a:font script="Syrn" typeface="Estrangelo Edessa"/>
+        <a:font script="Syrj" typeface="Estrangelo Edessa"/>
+        <a:font script="Syre" typeface="Estrangelo Edessa"/>
+        <a:font script="Sora" typeface="Nirmala UI"/>
+        <a:font script="Tale" typeface="Microsoft Tai Le"/>
+        <a:font script="Talu" typeface="Microsoft New Tai Lue"/>
+        <a:font script="Tfng" typeface="Ebrima"/>
       </a:majorFont>
       <a:minorFont>
-        <a:latin typeface="Calibri"/>
+        <a:latin typeface="Aptos" panose="02110004020202020204"/>
         <a:ea typeface=""/>
         <a:cs typeface=""/>
-        <a:font script="Jpan" typeface="ＭＳ Ｐゴシック"/>
+        <a:font script="Jpan" typeface="游ゴシック"/>
         <a:font script="Hang" typeface="맑은 고딕"/>
-        <a:font script="Hans" typeface="宋体"/>
+        <a:font script="Hans" typeface="等线"/>
         <a:font script="Hant" typeface="新細明體"/>
         <a:font script="Arab" typeface="Arial"/>
         <a:font script="Hebr" typeface="Arial"/>
@@ -6760,6 +9363,23 @@
         <a:font script="Viet" typeface="Arial"/>
         <a:font script="Uigh" typeface="Microsoft Uighur"/>
         <a:font script="Geor" typeface="Sylfaen"/>
+        <a:font script="Armn" typeface="Arial"/>
+        <a:font script="Bugi" typeface="Leelawadee UI"/>
+        <a:font script="Bopo" typeface="Microsoft JhengHei"/>
+        <a:font script="Java" typeface="Javanese Text"/>
+        <a:font script="Lisu" typeface="Segoe UI"/>
+        <a:font script="Mymr" typeface="Myanmar Text"/>
+        <a:font script="Nkoo" typeface="Ebrima"/>
+        <a:font script="Olck" typeface="Nirmala UI"/>
+        <a:font script="Osma" typeface="Ebrima"/>
+        <a:font script="Phag" typeface="Phagspa"/>
+        <a:font script="Syrn" typeface="Estrangelo Edessa"/>
+        <a:font script="Syrj" typeface="Estrangelo Edessa"/>
+        <a:font script="Syre" typeface="Estrangelo Edessa"/>
+        <a:font script="Sora" typeface="Nirmala UI"/>
+        <a:font script="Tale" typeface="Microsoft Tai Le"/>
+        <a:font script="Talu" typeface="Microsoft New Tai Lue"/>
+        <a:font script="Tfng" typeface="Ebrima"/>
       </a:minorFont>
     </a:fontScheme>
     <a:fmtScheme name="Office">
@@ -6771,180 +9391,136 @@
           <a:gsLst>
             <a:gs pos="0">
               <a:schemeClr val="phClr">
-                <a:tint val="50000"/>
-                <a:satMod val="300000"/>
+                <a:lumMod val="110000"/>
+                <a:satMod val="105000"/>
+                <a:tint val="67000"/>
               </a:schemeClr>
             </a:gs>
-            <a:gs pos="35000">
+            <a:gs pos="50000">
               <a:schemeClr val="phClr">
-                <a:tint val="37000"/>
-                <a:satMod val="300000"/>
+                <a:lumMod val="105000"/>
+                <a:satMod val="103000"/>
+                <a:tint val="73000"/>
               </a:schemeClr>
             </a:gs>
             <a:gs pos="100000">
               <a:schemeClr val="phClr">
-                <a:tint val="15000"/>
-                <a:satMod val="350000"/>
+                <a:lumMod val="105000"/>
+                <a:satMod val="109000"/>
+                <a:tint val="81000"/>
               </a:schemeClr>
             </a:gs>
           </a:gsLst>
-          <a:lin ang="16200000" scaled="1"/>
+          <a:lin ang="5400000" scaled="0"/>
         </a:gradFill>
         <a:gradFill rotWithShape="1">
           <a:gsLst>
             <a:gs pos="0">
               <a:schemeClr val="phClr">
-                <a:tint val="100000"/>
+                <a:satMod val="103000"/>
+                <a:lumMod val="102000"/>
+                <a:tint val="94000"/>
+              </a:schemeClr>
+            </a:gs>
+            <a:gs pos="50000">
+              <a:schemeClr val="phClr">
+                <a:satMod val="110000"/>
+                <a:lumMod val="100000"/>
                 <a:shade val="100000"/>
-                <a:satMod val="130000"/>
               </a:schemeClr>
             </a:gs>
             <a:gs pos="100000">
               <a:schemeClr val="phClr">
-                <a:tint val="50000"/>
-                <a:shade val="100000"/>
-                <a:satMod val="350000"/>
+                <a:lumMod val="99000"/>
+                <a:satMod val="120000"/>
+                <a:shade val="78000"/>
               </a:schemeClr>
             </a:gs>
           </a:gsLst>
-          <a:lin ang="16200000" scaled="0"/>
+          <a:lin ang="5400000" scaled="0"/>
         </a:gradFill>
       </a:fillStyleLst>
       <a:lnStyleLst>
-        <a:ln w="9525" cap="flat" cmpd="sng" algn="ctr">
+        <a:ln w="12700" cap="flat" cmpd="sng" algn="ctr">
           <a:solidFill>
-            <a:schemeClr val="phClr">
-              <a:shade val="95000"/>
-              <a:satMod val="105000"/>
-            </a:schemeClr>
+            <a:schemeClr val="phClr"/>
           </a:solidFill>
           <a:prstDash val="solid"/>
+          <a:miter lim="800000"/>
+        </a:ln>
+        <a:ln w="19050" cap="flat" cmpd="sng" algn="ctr">
+          <a:solidFill>
+            <a:schemeClr val="phClr"/>
+          </a:solidFill>
+          <a:prstDash val="solid"/>
+          <a:miter lim="800000"/>
         </a:ln>
         <a:ln w="25400" cap="flat" cmpd="sng" algn="ctr">
           <a:solidFill>
             <a:schemeClr val="phClr"/>
           </a:solidFill>
           <a:prstDash val="solid"/>
-        </a:ln>
-        <a:ln w="38100" cap="flat" cmpd="sng" algn="ctr">
-          <a:solidFill>
-            <a:schemeClr val="phClr"/>
-          </a:solidFill>
-          <a:prstDash val="solid"/>
+          <a:miter lim="800000"/>
         </a:ln>
       </a:lnStyleLst>
       <a:effectStyleLst>
         <a:effectStyle>
+          <a:effectLst/>
+        </a:effectStyle>
+        <a:effectStyle>
+          <a:effectLst/>
+        </a:effectStyle>
+        <a:effectStyle>
           <a:effectLst>
-            <a:outerShdw blurRad="40000" dist="20000" dir="5400000" rotWithShape="0">
+            <a:outerShdw blurRad="57150" dist="19050" dir="5400000" algn="ctr" rotWithShape="0">
               <a:srgbClr val="000000">
-                <a:alpha val="38000"/>
+                <a:alpha val="63000"/>
               </a:srgbClr>
             </a:outerShdw>
           </a:effectLst>
-        </a:effectStyle>
-        <a:effectStyle>
-          <a:effectLst>
-            <a:outerShdw blurRad="40000" dist="23000" dir="5400000" rotWithShape="0">
-              <a:srgbClr val="000000">
-                <a:alpha val="35000"/>
-              </a:srgbClr>
-            </a:outerShdw>
-          </a:effectLst>
-        </a:effectStyle>
-        <a:effectStyle>
-          <a:effectLst>
-            <a:outerShdw blurRad="40000" dist="23000" dir="5400000" rotWithShape="0">
-              <a:srgbClr val="000000">
-                <a:alpha val="35000"/>
-              </a:srgbClr>
-            </a:outerShdw>
-          </a:effectLst>
-          <a:scene3d>
-            <a:camera prst="orthographicFront">
-              <a:rot lat="0" lon="0" rev="0"/>
-            </a:camera>
-            <a:lightRig rig="threePt" dir="t">
-              <a:rot lat="0" lon="0" rev="1200000"/>
-            </a:lightRig>
-          </a:scene3d>
-          <a:sp3d>
-            <a:bevelT w="63500" h="25400"/>
-          </a:sp3d>
         </a:effectStyle>
       </a:effectStyleLst>
       <a:bgFillStyleLst>
         <a:solidFill>
           <a:schemeClr val="phClr"/>
         </a:solidFill>
+        <a:solidFill>
+          <a:schemeClr val="phClr">
+            <a:tint val="95000"/>
+            <a:satMod val="170000"/>
+          </a:schemeClr>
+        </a:solidFill>
         <a:gradFill rotWithShape="1">
           <a:gsLst>
             <a:gs pos="0">
               <a:schemeClr val="phClr">
-                <a:tint val="40000"/>
-                <a:satMod val="350000"/>
+                <a:tint val="93000"/>
+                <a:satMod val="150000"/>
+                <a:shade val="98000"/>
+                <a:lumMod val="102000"/>
               </a:schemeClr>
             </a:gs>
-            <a:gs pos="40000">
+            <a:gs pos="50000">
               <a:schemeClr val="phClr">
-                <a:tint val="45000"/>
-                <a:shade val="99000"/>
-                <a:satMod val="350000"/>
+                <a:tint val="98000"/>
+                <a:satMod val="130000"/>
+                <a:shade val="90000"/>
+                <a:lumMod val="103000"/>
               </a:schemeClr>
             </a:gs>
             <a:gs pos="100000">
               <a:schemeClr val="phClr">
-                <a:shade val="20000"/>
-                <a:satMod val="255000"/>
+                <a:shade val="63000"/>
+                <a:satMod val="120000"/>
               </a:schemeClr>
             </a:gs>
           </a:gsLst>
-          <a:path path="circle">
-            <a:fillToRect l="50000" t="-80000" r="50000" b="180000"/>
-          </a:path>
-        </a:gradFill>
-        <a:gradFill rotWithShape="1">
-          <a:gsLst>
-            <a:gs pos="0">
-              <a:schemeClr val="phClr">
-                <a:tint val="80000"/>
-                <a:satMod val="300000"/>
-              </a:schemeClr>
-            </a:gs>
-            <a:gs pos="100000">
-              <a:schemeClr val="phClr">
-                <a:shade val="30000"/>
-                <a:satMod val="200000"/>
-              </a:schemeClr>
-            </a:gs>
-          </a:gsLst>
-          <a:path path="circle">
-            <a:fillToRect l="50000" t="50000" r="50000" b="50000"/>
-          </a:path>
+          <a:lin ang="5400000" scaled="0"/>
         </a:gradFill>
       </a:bgFillStyleLst>
     </a:fmtScheme>
   </a:themeElements>
   <a:objectDefaults>
-    <a:spDef>
-      <a:spPr/>
-      <a:bodyPr/>
-      <a:lstStyle/>
-      <a:style>
-        <a:lnRef idx="1">
-          <a:schemeClr val="accent1"/>
-        </a:lnRef>
-        <a:fillRef idx="3">
-          <a:schemeClr val="accent1"/>
-        </a:fillRef>
-        <a:effectRef idx="2">
-          <a:schemeClr val="accent1"/>
-        </a:effectRef>
-        <a:fontRef idx="minor">
-          <a:schemeClr val="lt1"/>
-        </a:fontRef>
-      </a:style>
-    </a:spDef>
     <a:lnDef>
       <a:spPr/>
       <a:bodyPr/>
@@ -6966,5 +9542,10 @@
     </a:lnDef>
   </a:objectDefaults>
   <a:extraClrSchemeLst/>
+  <a:extLst>
+    <a:ext uri="{05A4C25C-085E-4340-85A3-A5531E510DB2}">
+      <thm15:themeFamily xmlns:thm15="http://schemas.microsoft.com/office/thememl/2012/main" name="Office Theme" id="{2E142A2C-CD16-42D6-873A-C26D2A0506FA}" vid="{1BDDFF52-6CD6-40A5-AB3C-68EB2F1E4D0A}"/>
+    </a:ext>
+  </a:extLst>
 </a:theme>
 </file>
--- a/tinyML/LambdaIDS_QatarWebSummit_Deck.pptx
+++ b/tinyML/LambdaIDS_QatarWebSummit_Deck.pptx
@@ -4986,81 +4986,81 @@
           <a:bodyPr/>
           <a:lstStyle/>
           <a:p>
+            <a:pPr algn="l">
+              <a:defRPr sz="4400" b="1" i="0">
+                <a:solidFill>
+                  <a:srgbClr val="8B7355"/>
+                </a:solidFill>
+                <a:latin typeface="Segoe UI"/>
+              </a:defRPr>
+            </a:pPr>
+            <a:r>
+              <a:t>LambdaIDS: The Immune System for the Edge</a:t>
+            </a:r>
+          </a:p>
+        </p:txBody>
+      </p:sp>
+      <p:sp>
+        <p:nvSpPr>
+          <p:cNvPr id="3" name="Subtitle 2"/>
+          <p:cNvSpPr>
+            <a:spLocks noGrp="1"/>
+          </p:cNvSpPr>
+          <p:nvPr>
+            <p:ph type="subTitle" idx="1"/>
+          </p:nvPr>
+        </p:nvSpPr>
+        <p:spPr/>
+        <p:txBody>
+          <a:bodyPr wrap="square"/>
+          <a:lstStyle/>
+          <a:p/>
+          <a:p>
             <a:pPr>
-              <a:defRPr b="1">
+              <a:spcAft>
+                <a:spcPts val="1200"/>
+              </a:spcAft>
+              <a:defRPr sz="2400" b="0" i="0">
                 <a:solidFill>
                   <a:srgbClr val="8B7355"/>
                 </a:solidFill>
-                <a:latin typeface="Arial"/>
-              </a:defRPr>
-            </a:pPr>
-            <a:r>
-              <a:t>LambdaIDS: The Immune System for the Edge</a:t>
-            </a:r>
-          </a:p>
-        </p:txBody>
-      </p:sp>
-      <p:sp>
-        <p:nvSpPr>
-          <p:cNvPr id="3" name="Subtitle 2"/>
-          <p:cNvSpPr>
-            <a:spLocks noGrp="1"/>
-          </p:cNvSpPr>
-          <p:nvPr>
-            <p:ph type="subTitle" idx="1"/>
-          </p:nvPr>
-        </p:nvSpPr>
-        <p:spPr/>
-        <p:txBody>
-          <a:bodyPr/>
-          <a:lstStyle/>
+                <a:latin typeface="Segoe UI"/>
+              </a:defRPr>
+            </a:pPr>
+            <a:r>
+              <a:t>Securing the Critical Infrastructure of Tomorrow with TinyML</a:t>
+            </a:r>
+          </a:p>
           <a:p>
             <a:pPr>
-              <a:defRPr sz="2400">
-                <a:solidFill>
-                  <a:srgbClr val="333333"/>
-                </a:solidFill>
-                <a:latin typeface="Arial"/>
-              </a:defRPr>
-            </a:pPr>
-            <a:r>
-              <a:t>Securing the Critical Infrastructure of Tomorrow with TinyML</a:t>
+              <a:spcAft>
+                <a:spcPts val="1000"/>
+              </a:spcAft>
+              <a:defRPr sz="2000" b="0" i="0">
+                <a:solidFill>
+                  <a:srgbClr val="333333"/>
+                </a:solidFill>
+                <a:latin typeface="Segoe UI"/>
+              </a:defRPr>
+            </a:pPr>
+            <a:r>
+              <a:t>We enable secure, autonomous, and compliant IoT at the edge.</a:t>
             </a:r>
           </a:p>
           <a:p>
             <a:pPr>
-              <a:defRPr sz="2400">
-                <a:solidFill>
-                  <a:srgbClr val="333333"/>
-                </a:solidFill>
-                <a:latin typeface="Arial"/>
-              </a:defRPr>
-            </a:pPr>
-          </a:p>
-          <a:p>
-            <a:pPr>
-              <a:defRPr sz="2400">
-                <a:solidFill>
-                  <a:srgbClr val="333333"/>
-                </a:solidFill>
-                <a:latin typeface="Arial"/>
-              </a:defRPr>
-            </a:pPr>
-            <a:r>
-              <a:t>We enable secure, autonomous, and compliant IoT at the edge.</a:t>
-            </a:r>
-          </a:p>
-          <a:p>
-            <a:pPr>
-              <a:defRPr sz="2400">
-                <a:solidFill>
-                  <a:srgbClr val="333333"/>
-                </a:solidFill>
-                <a:latin typeface="Arial"/>
-              </a:defRPr>
-            </a:pPr>
-            <a:r>
-              <a:t>Contact: Soroush Safaei | Ahmad Mostafavi | Hossein Fotouhi</a:t>
+              <a:spcAft>
+                <a:spcPts val="1000"/>
+              </a:spcAft>
+              <a:defRPr sz="2000" b="0" i="0">
+                <a:solidFill>
+                  <a:srgbClr val="333333"/>
+                </a:solidFill>
+                <a:latin typeface="Segoe UI"/>
+              </a:defRPr>
+            </a:pPr>
+            <a:r>
+              <a:t>Ahmad Mostafavi | Soroush Safaei | Hossein Fotouhi</a:t>
             </a:r>
           </a:p>
         </p:txBody>
@@ -5106,81 +5106,81 @@
           <a:bodyPr/>
           <a:lstStyle/>
           <a:p>
+            <a:pPr algn="l">
+              <a:defRPr sz="4400" b="1" i="0">
+                <a:solidFill>
+                  <a:srgbClr val="8B7355"/>
+                </a:solidFill>
+                <a:latin typeface="Segoe UI"/>
+              </a:defRPr>
+            </a:pPr>
+            <a:r>
+              <a:t>LambdaIDS: The Immune System for the Edge</a:t>
+            </a:r>
+          </a:p>
+        </p:txBody>
+      </p:sp>
+      <p:sp>
+        <p:nvSpPr>
+          <p:cNvPr id="3" name="Subtitle 2"/>
+          <p:cNvSpPr>
+            <a:spLocks noGrp="1"/>
+          </p:cNvSpPr>
+          <p:nvPr>
+            <p:ph type="subTitle" idx="1"/>
+          </p:nvPr>
+        </p:nvSpPr>
+        <p:spPr/>
+        <p:txBody>
+          <a:bodyPr wrap="square"/>
+          <a:lstStyle/>
+          <a:p/>
+          <a:p>
             <a:pPr>
-              <a:defRPr b="1">
+              <a:spcAft>
+                <a:spcPts val="1200"/>
+              </a:spcAft>
+              <a:defRPr sz="2400" b="0" i="0">
                 <a:solidFill>
                   <a:srgbClr val="8B7355"/>
                 </a:solidFill>
-                <a:latin typeface="Arial"/>
-              </a:defRPr>
-            </a:pPr>
-            <a:r>
-              <a:t>LambdaIDS: The Immune System for the Edge</a:t>
-            </a:r>
-          </a:p>
-        </p:txBody>
-      </p:sp>
-      <p:sp>
-        <p:nvSpPr>
-          <p:cNvPr id="3" name="Subtitle 2"/>
-          <p:cNvSpPr>
-            <a:spLocks noGrp="1"/>
-          </p:cNvSpPr>
-          <p:nvPr>
-            <p:ph type="subTitle" idx="1"/>
-          </p:nvPr>
-        </p:nvSpPr>
-        <p:spPr/>
-        <p:txBody>
-          <a:bodyPr/>
-          <a:lstStyle/>
+                <a:latin typeface="Segoe UI"/>
+              </a:defRPr>
+            </a:pPr>
+            <a:r>
+              <a:t>Securing the Critical Infrastructure of Tomorrow with TinyML</a:t>
+            </a:r>
+          </a:p>
           <a:p>
             <a:pPr>
-              <a:defRPr sz="2400">
-                <a:solidFill>
-                  <a:srgbClr val="333333"/>
-                </a:solidFill>
-                <a:latin typeface="Arial"/>
-              </a:defRPr>
-            </a:pPr>
-            <a:r>
-              <a:t>Securing the Critical Infrastructure of Tomorrow with TinyML</a:t>
+              <a:spcAft>
+                <a:spcPts val="1000"/>
+              </a:spcAft>
+              <a:defRPr sz="2000" b="0" i="0">
+                <a:solidFill>
+                  <a:srgbClr val="333333"/>
+                </a:solidFill>
+                <a:latin typeface="Segoe UI"/>
+              </a:defRPr>
+            </a:pPr>
+            <a:r>
+              <a:t>We enable secure, autonomous, and compliant IoT at the edge.</a:t>
             </a:r>
           </a:p>
           <a:p>
             <a:pPr>
-              <a:defRPr sz="2400">
-                <a:solidFill>
-                  <a:srgbClr val="333333"/>
-                </a:solidFill>
-                <a:latin typeface="Arial"/>
-              </a:defRPr>
-            </a:pPr>
-          </a:p>
-          <a:p>
-            <a:pPr>
-              <a:defRPr sz="2400">
-                <a:solidFill>
-                  <a:srgbClr val="333333"/>
-                </a:solidFill>
-                <a:latin typeface="Arial"/>
-              </a:defRPr>
-            </a:pPr>
-            <a:r>
-              <a:t>We enable secure, autonomous, and compliant IoT at the edge.</a:t>
-            </a:r>
-          </a:p>
-          <a:p>
-            <a:pPr>
-              <a:defRPr sz="2400">
-                <a:solidFill>
-                  <a:srgbClr val="333333"/>
-                </a:solidFill>
-                <a:latin typeface="Arial"/>
-              </a:defRPr>
-            </a:pPr>
-            <a:r>
-              <a:t>Contact: Soroush Safaei | Ahmad Mostafavi | Hossein Fotouhi</a:t>
+              <a:spcAft>
+                <a:spcPts val="1000"/>
+              </a:spcAft>
+              <a:defRPr sz="2000" b="0" i="0">
+                <a:solidFill>
+                  <a:srgbClr val="333333"/>
+                </a:solidFill>
+                <a:latin typeface="Segoe UI"/>
+              </a:defRPr>
+            </a:pPr>
+            <a:r>
+              <a:t>Ahmad Mostafavi | Soroush Safaei | Hossein Fotouhi</a:t>
             </a:r>
           </a:p>
         </p:txBody>
@@ -5226,12 +5226,12 @@
           <a:bodyPr/>
           <a:lstStyle/>
           <a:p>
-            <a:pPr>
-              <a:defRPr b="1">
+            <a:pPr algn="l">
+              <a:defRPr sz="3600" b="1" i="0">
                 <a:solidFill>
                   <a:srgbClr val="8B7355"/>
                 </a:solidFill>
-                <a:latin typeface="Arial"/>
+                <a:latin typeface="Segoe UI"/>
               </a:defRPr>
             </a:pPr>
             <a:r>
@@ -5252,71 +5252,71 @@
         </p:nvSpPr>
         <p:spPr/>
         <p:txBody>
-          <a:bodyPr/>
+          <a:bodyPr wrap="square"/>
           <a:lstStyle/>
           <a:p/>
           <a:p>
             <a:pPr>
               <a:spcAft>
-                <a:spcPts val="1400"/>
+                <a:spcPts val="1000"/>
               </a:spcAft>
-              <a:defRPr sz="2000">
-                <a:solidFill>
-                  <a:srgbClr val="333333"/>
-                </a:solidFill>
-                <a:latin typeface="Arial"/>
-              </a:defRPr>
-            </a:pPr>
-            <a:r>
-              <a:t>• Q1-Q2 2025: Finalize SDK v1.0. Complete Pilot with Combitech/RISE.</a:t>
+              <a:defRPr sz="2000" b="0" i="0">
+                <a:solidFill>
+                  <a:srgbClr val="333333"/>
+                </a:solidFill>
+                <a:latin typeface="Segoe UI"/>
+              </a:defRPr>
+            </a:pPr>
+            <a:r>
+              <a:t>Q1-Q2 2025: Finalize SDK v1.0. Complete Pilot with Combitech/RISE.</a:t>
             </a:r>
           </a:p>
           <a:p>
             <a:pPr>
               <a:spcAft>
-                <a:spcPts val="1400"/>
+                <a:spcPts val="1000"/>
               </a:spcAft>
-              <a:defRPr sz="2000">
-                <a:solidFill>
-                  <a:srgbClr val="333333"/>
-                </a:solidFill>
-                <a:latin typeface="Arial"/>
-              </a:defRPr>
-            </a:pPr>
-            <a:r>
-              <a:t>• Q3-Q4 2025: First Commercial Deployments (Industrial Sector). Achieve IEC 62443 Cert.</a:t>
+              <a:defRPr sz="2000" b="0" i="0">
+                <a:solidFill>
+                  <a:srgbClr val="333333"/>
+                </a:solidFill>
+                <a:latin typeface="Segoe UI"/>
+              </a:defRPr>
+            </a:pPr>
+            <a:r>
+              <a:t>Q3-Q4 2025: First Commercial Deployments (Industrial Sector). Achieve IEC 62443 Cert.</a:t>
             </a:r>
           </a:p>
           <a:p>
             <a:pPr>
               <a:spcAft>
-                <a:spcPts val="1400"/>
+                <a:spcPts val="1000"/>
               </a:spcAft>
-              <a:defRPr sz="2000">
-                <a:solidFill>
-                  <a:srgbClr val="333333"/>
-                </a:solidFill>
-                <a:latin typeface="Arial"/>
-              </a:defRPr>
-            </a:pPr>
-            <a:r>
-              <a:t>• 2026: Expansion to MENA region. Series A for Global Scale.</a:t>
+              <a:defRPr sz="2000" b="0" i="0">
+                <a:solidFill>
+                  <a:srgbClr val="333333"/>
+                </a:solidFill>
+                <a:latin typeface="Segoe UI"/>
+              </a:defRPr>
+            </a:pPr>
+            <a:r>
+              <a:t>2026: Expansion to MENA region. Series A for Global Scale.</a:t>
             </a:r>
           </a:p>
           <a:p>
             <a:pPr>
               <a:spcAft>
-                <a:spcPts val="1400"/>
+                <a:spcPts val="1000"/>
               </a:spcAft>
-              <a:defRPr sz="2000">
-                <a:solidFill>
-                  <a:srgbClr val="333333"/>
-                </a:solidFill>
-                <a:latin typeface="Arial"/>
-              </a:defRPr>
-            </a:pPr>
-            <a:r>
-              <a:t>• 2027: Integration with major Chip Vendors (ST, NXP).</a:t>
+              <a:defRPr sz="2000" b="0" i="0">
+                <a:solidFill>
+                  <a:srgbClr val="333333"/>
+                </a:solidFill>
+                <a:latin typeface="Segoe UI"/>
+              </a:defRPr>
+            </a:pPr>
+            <a:r>
+              <a:t>2027: Integration with major Chip Vendors (ST, NXP).</a:t>
             </a:r>
           </a:p>
         </p:txBody>
@@ -5362,12 +5362,12 @@
           <a:bodyPr/>
           <a:lstStyle/>
           <a:p>
-            <a:pPr>
-              <a:defRPr b="1">
+            <a:pPr algn="l">
+              <a:defRPr sz="3600" b="1" i="0">
                 <a:solidFill>
                   <a:srgbClr val="8B7355"/>
                 </a:solidFill>
-                <a:latin typeface="Arial"/>
+                <a:latin typeface="Segoe UI"/>
               </a:defRPr>
             </a:pPr>
             <a:r>
@@ -5388,71 +5388,71 @@
         </p:nvSpPr>
         <p:spPr/>
         <p:txBody>
-          <a:bodyPr/>
+          <a:bodyPr wrap="square"/>
           <a:lstStyle/>
           <a:p/>
           <a:p>
             <a:pPr>
               <a:spcAft>
-                <a:spcPts val="1400"/>
+                <a:spcPts val="1000"/>
               </a:spcAft>
-              <a:defRPr sz="2000">
-                <a:solidFill>
-                  <a:srgbClr val="333333"/>
-                </a:solidFill>
-                <a:latin typeface="Arial"/>
-              </a:defRPr>
-            </a:pPr>
-            <a:r>
-              <a:t>• Q1-Q2 2025: Finalize SDK v1.0. Complete Pilot with Combitech/RISE.</a:t>
+              <a:defRPr sz="2000" b="0" i="0">
+                <a:solidFill>
+                  <a:srgbClr val="333333"/>
+                </a:solidFill>
+                <a:latin typeface="Segoe UI"/>
+              </a:defRPr>
+            </a:pPr>
+            <a:r>
+              <a:t>Q1-Q2 2025: Finalize SDK v1.0. Complete Pilot with Combitech/RISE.</a:t>
             </a:r>
           </a:p>
           <a:p>
             <a:pPr>
               <a:spcAft>
-                <a:spcPts val="1400"/>
+                <a:spcPts val="1000"/>
               </a:spcAft>
-              <a:defRPr sz="2000">
-                <a:solidFill>
-                  <a:srgbClr val="333333"/>
-                </a:solidFill>
-                <a:latin typeface="Arial"/>
-              </a:defRPr>
-            </a:pPr>
-            <a:r>
-              <a:t>• Q3-Q4 2025: First Commercial Deployments (Industrial Sector). Achieve IEC 62443 Cert.</a:t>
+              <a:defRPr sz="2000" b="0" i="0">
+                <a:solidFill>
+                  <a:srgbClr val="333333"/>
+                </a:solidFill>
+                <a:latin typeface="Segoe UI"/>
+              </a:defRPr>
+            </a:pPr>
+            <a:r>
+              <a:t>Q3-Q4 2025: First Commercial Deployments (Industrial Sector). Achieve IEC 62443 Cert.</a:t>
             </a:r>
           </a:p>
           <a:p>
             <a:pPr>
               <a:spcAft>
-                <a:spcPts val="1400"/>
+                <a:spcPts val="1000"/>
               </a:spcAft>
-              <a:defRPr sz="2000">
-                <a:solidFill>
-                  <a:srgbClr val="333333"/>
-                </a:solidFill>
-                <a:latin typeface="Arial"/>
-              </a:defRPr>
-            </a:pPr>
-            <a:r>
-              <a:t>• 2026: Expansion to MENA region. Series A for Global Scale.</a:t>
+              <a:defRPr sz="2000" b="0" i="0">
+                <a:solidFill>
+                  <a:srgbClr val="333333"/>
+                </a:solidFill>
+                <a:latin typeface="Segoe UI"/>
+              </a:defRPr>
+            </a:pPr>
+            <a:r>
+              <a:t>2026: Expansion to MENA region. Series A for Global Scale.</a:t>
             </a:r>
           </a:p>
           <a:p>
             <a:pPr>
               <a:spcAft>
-                <a:spcPts val="1400"/>
+                <a:spcPts val="1000"/>
               </a:spcAft>
-              <a:defRPr sz="2000">
-                <a:solidFill>
-                  <a:srgbClr val="333333"/>
-                </a:solidFill>
-                <a:latin typeface="Arial"/>
-              </a:defRPr>
-            </a:pPr>
-            <a:r>
-              <a:t>• 2027: Integration with major Chip Vendors (ST, NXP).</a:t>
+              <a:defRPr sz="2000" b="0" i="0">
+                <a:solidFill>
+                  <a:srgbClr val="333333"/>
+                </a:solidFill>
+                <a:latin typeface="Segoe UI"/>
+              </a:defRPr>
+            </a:pPr>
+            <a:r>
+              <a:t>2027: Integration with major Chip Vendors (ST, NXP).</a:t>
             </a:r>
           </a:p>
         </p:txBody>
@@ -5485,25 +5485,32 @@
       <p:grpSpPr/>
       <p:sp>
         <p:nvSpPr>
-          <p:cNvPr id="2" name="Title 1"/>
-          <p:cNvSpPr>
-            <a:spLocks noGrp="1"/>
-          </p:cNvSpPr>
-          <p:nvPr>
-            <p:ph type="title"/>
-          </p:nvPr>
-        </p:nvSpPr>
-        <p:spPr/>
-        <p:txBody>
-          <a:bodyPr/>
-          <a:lstStyle/>
-          <a:p>
-            <a:pPr>
-              <a:defRPr b="1">
+          <p:cNvPr id="2" name="TextBox 1"/>
+          <p:cNvSpPr txBox="1"/>
+          <p:nvPr/>
+        </p:nvSpPr>
+        <p:spPr>
+          <a:xfrm>
+            <a:off x="548640" y="365760"/>
+            <a:ext cx="11091545" cy="914400"/>
+          </a:xfrm>
+          <a:prstGeom prst="rect">
+            <a:avLst/>
+          </a:prstGeom>
+          <a:noFill/>
+        </p:spPr>
+        <p:txBody>
+          <a:bodyPr wrap="none">
+            <a:spAutoFit/>
+          </a:bodyPr>
+          <a:lstStyle/>
+          <a:p>
+            <a:pPr algn="l">
+              <a:defRPr sz="4000" b="1" i="0">
                 <a:solidFill>
                   <a:srgbClr val="8B7355"/>
                 </a:solidFill>
-                <a:latin typeface="Arial"/>
+                <a:latin typeface="Segoe UI"/>
               </a:defRPr>
             </a:pPr>
             <a:r>
@@ -5514,81 +5521,429 @@
       </p:sp>
       <p:sp>
         <p:nvSpPr>
-          <p:cNvPr id="3" name="Content Placeholder 2"/>
-          <p:cNvSpPr>
-            <a:spLocks noGrp="1"/>
-          </p:cNvSpPr>
-          <p:nvPr>
-            <p:ph idx="1"/>
-          </p:nvPr>
-        </p:nvSpPr>
-        <p:spPr/>
-        <p:txBody>
-          <a:bodyPr/>
-          <a:lstStyle/>
-          <a:p/>
-          <a:p>
-            <a:pPr>
-              <a:spcAft>
-                <a:spcPts val="1400"/>
-              </a:spcAft>
-              <a:defRPr sz="2000">
-                <a:solidFill>
-                  <a:srgbClr val="333333"/>
-                </a:solidFill>
-                <a:latin typeface="Arial"/>
-              </a:defRPr>
-            </a:pPr>
-            <a:r>
-              <a:t>• Soroush Safaei: Co-Founder &amp; CEO. Expertise in AI &amp; Business Strategy.</a:t>
-            </a:r>
-          </a:p>
-          <a:p>
-            <a:pPr>
-              <a:spcAft>
-                <a:spcPts val="1400"/>
-              </a:spcAft>
-              <a:defRPr sz="2000">
-                <a:solidFill>
-                  <a:srgbClr val="333333"/>
-                </a:solidFill>
-                <a:latin typeface="Arial"/>
-              </a:defRPr>
-            </a:pPr>
-            <a:r>
-              <a:t>• Ahmad Mostafavi: Co-Founder &amp; CTO. Deep tech expert in Embedded Systems.</a:t>
-            </a:r>
-          </a:p>
-          <a:p>
-            <a:pPr>
-              <a:spcAft>
-                <a:spcPts val="1400"/>
-              </a:spcAft>
-              <a:defRPr sz="2000">
-                <a:solidFill>
-                  <a:srgbClr val="333333"/>
-                </a:solidFill>
-                <a:latin typeface="Arial"/>
-              </a:defRPr>
-            </a:pPr>
-            <a:r>
-              <a:t>• Hossein Fotouhi: Co-Founder &amp; Scientific Lead. Professor in IoT &amp; Networks.</a:t>
-            </a:r>
-          </a:p>
-          <a:p>
-            <a:pPr>
-              <a:spcAft>
-                <a:spcPts val="1400"/>
-              </a:spcAft>
-              <a:defRPr sz="2000">
-                <a:solidFill>
-                  <a:srgbClr val="333333"/>
-                </a:solidFill>
-                <a:latin typeface="Arial"/>
-              </a:defRPr>
-            </a:pPr>
-            <a:r>
-              <a:t>• Why Us: We bridge the gap between Data Science and Hardware constraints.</a:t>
+          <p:cNvPr id="3" name="Rounded Rectangle 2"/>
+          <p:cNvSpPr/>
+          <p:nvPr/>
+        </p:nvSpPr>
+        <p:spPr>
+          <a:xfrm>
+            <a:off x="548640" y="1371600"/>
+            <a:ext cx="3575261" cy="4572000"/>
+          </a:xfrm>
+          <a:prstGeom prst="roundRect">
+            <a:avLst/>
+          </a:prstGeom>
+          <a:solidFill>
+            <a:srgbClr val="FFFFFF"/>
+          </a:solidFill>
+          <a:ln w="12700">
+            <a:solidFill>
+              <a:srgbClr val="8B7355"/>
+            </a:solidFill>
+          </a:ln>
+        </p:spPr>
+        <p:style>
+          <a:lnRef idx="1">
+            <a:schemeClr val="accent1"/>
+          </a:lnRef>
+          <a:fillRef idx="3">
+            <a:schemeClr val="accent1"/>
+          </a:fillRef>
+          <a:effectRef idx="2">
+            <a:schemeClr val="accent1"/>
+          </a:effectRef>
+          <a:fontRef idx="minor">
+            <a:schemeClr val="lt1"/>
+          </a:fontRef>
+        </p:style>
+        <p:txBody>
+          <a:bodyPr rtlCol="0" anchor="ctr"/>
+          <a:lstStyle/>
+          <a:p>
+            <a:pPr algn="ctr"/>
+          </a:p>
+        </p:txBody>
+      </p:sp>
+      <p:pic>
+        <p:nvPicPr>
+          <p:cNvPr id="4" name="Picture 3" descr="ahmadMostafavi.jpeg"/>
+          <p:cNvPicPr>
+            <a:picLocks noChangeAspect="1"/>
+          </p:cNvPicPr>
+          <p:nvPr/>
+        </p:nvPicPr>
+        <p:blipFill>
+          <a:blip r:embed="rId2"/>
+          <a:stretch>
+            <a:fillRect/>
+          </a:stretch>
+        </p:blipFill>
+        <p:spPr>
+          <a:xfrm>
+            <a:off x="1467590" y="1554480"/>
+            <a:ext cx="1737360" cy="1737360"/>
+          </a:xfrm>
+          <a:prstGeom prst="rect">
+            <a:avLst/>
+          </a:prstGeom>
+        </p:spPr>
+      </p:pic>
+      <p:sp>
+        <p:nvSpPr>
+          <p:cNvPr id="5" name="TextBox 4"/>
+          <p:cNvSpPr txBox="1"/>
+          <p:nvPr/>
+        </p:nvSpPr>
+        <p:spPr>
+          <a:xfrm>
+            <a:off x="731520" y="3383280"/>
+            <a:ext cx="3209501" cy="2286000"/>
+          </a:xfrm>
+          <a:prstGeom prst="rect">
+            <a:avLst/>
+          </a:prstGeom>
+          <a:noFill/>
+        </p:spPr>
+        <p:txBody>
+          <a:bodyPr wrap="square">
+            <a:spAutoFit/>
+          </a:bodyPr>
+          <a:lstStyle/>
+          <a:p>
+            <a:pPr algn="ctr">
+              <a:defRPr sz="1600" b="1" i="0">
+                <a:solidFill>
+                  <a:srgbClr val="8B7355"/>
+                </a:solidFill>
+                <a:latin typeface="Segoe UI"/>
+              </a:defRPr>
+            </a:pPr>
+            <a:r>
+              <a:t>Ahmad Mostafavi</a:t>
+            </a:r>
+          </a:p>
+          <a:p>
+            <a:pPr algn="ctr">
+              <a:defRPr sz="1300" b="0" i="1">
+                <a:solidFill>
+                  <a:srgbClr val="333333"/>
+                </a:solidFill>
+                <a:latin typeface="Segoe UI"/>
+              </a:defRPr>
+            </a:pPr>
+            <a:r>
+              <a:t>CEO &amp; Founder</a:t>
+            </a:r>
+          </a:p>
+          <a:p>
+            <a:pPr algn="ctr">
+              <a:defRPr sz="1200" b="0" i="0">
+                <a:solidFill>
+                  <a:srgbClr val="333333"/>
+                </a:solidFill>
+                <a:latin typeface="Segoe UI"/>
+              </a:defRPr>
+            </a:pPr>
+            <a:r>
+              <a:t>Deep tech expert in Embedded Systems &amp; Security.</a:t>
+            </a:r>
+          </a:p>
+        </p:txBody>
+      </p:sp>
+      <p:sp>
+        <p:nvSpPr>
+          <p:cNvPr id="6" name="Rounded Rectangle 5"/>
+          <p:cNvSpPr/>
+          <p:nvPr/>
+        </p:nvSpPr>
+        <p:spPr>
+          <a:xfrm>
+            <a:off x="4306781" y="1371600"/>
+            <a:ext cx="3575261" cy="4572000"/>
+          </a:xfrm>
+          <a:prstGeom prst="roundRect">
+            <a:avLst/>
+          </a:prstGeom>
+          <a:solidFill>
+            <a:srgbClr val="FFFFFF"/>
+          </a:solidFill>
+          <a:ln w="12700">
+            <a:solidFill>
+              <a:srgbClr val="8B7355"/>
+            </a:solidFill>
+          </a:ln>
+        </p:spPr>
+        <p:style>
+          <a:lnRef idx="1">
+            <a:schemeClr val="accent1"/>
+          </a:lnRef>
+          <a:fillRef idx="3">
+            <a:schemeClr val="accent1"/>
+          </a:fillRef>
+          <a:effectRef idx="2">
+            <a:schemeClr val="accent1"/>
+          </a:effectRef>
+          <a:fontRef idx="minor">
+            <a:schemeClr val="lt1"/>
+          </a:fontRef>
+        </p:style>
+        <p:txBody>
+          <a:bodyPr rtlCol="0" anchor="ctr"/>
+          <a:lstStyle/>
+          <a:p>
+            <a:pPr algn="ctr"/>
+          </a:p>
+        </p:txBody>
+      </p:sp>
+      <p:pic>
+        <p:nvPicPr>
+          <p:cNvPr id="7" name="Picture 6" descr="Soroush.jpeg"/>
+          <p:cNvPicPr>
+            <a:picLocks noChangeAspect="1"/>
+          </p:cNvPicPr>
+          <p:nvPr/>
+        </p:nvPicPr>
+        <p:blipFill>
+          <a:blip r:embed="rId3"/>
+          <a:stretch>
+            <a:fillRect/>
+          </a:stretch>
+        </p:blipFill>
+        <p:spPr>
+          <a:xfrm>
+            <a:off x="5225732" y="1554480"/>
+            <a:ext cx="1737360" cy="1737360"/>
+          </a:xfrm>
+          <a:prstGeom prst="rect">
+            <a:avLst/>
+          </a:prstGeom>
+        </p:spPr>
+      </p:pic>
+      <p:sp>
+        <p:nvSpPr>
+          <p:cNvPr id="8" name="TextBox 7"/>
+          <p:cNvSpPr txBox="1"/>
+          <p:nvPr/>
+        </p:nvSpPr>
+        <p:spPr>
+          <a:xfrm>
+            <a:off x="4489661" y="3383280"/>
+            <a:ext cx="3209501" cy="2286000"/>
+          </a:xfrm>
+          <a:prstGeom prst="rect">
+            <a:avLst/>
+          </a:prstGeom>
+          <a:noFill/>
+        </p:spPr>
+        <p:txBody>
+          <a:bodyPr wrap="square">
+            <a:spAutoFit/>
+          </a:bodyPr>
+          <a:lstStyle/>
+          <a:p>
+            <a:pPr algn="ctr">
+              <a:defRPr sz="1600" b="1" i="0">
+                <a:solidFill>
+                  <a:srgbClr val="8B7355"/>
+                </a:solidFill>
+                <a:latin typeface="Segoe UI"/>
+              </a:defRPr>
+            </a:pPr>
+            <a:r>
+              <a:t>Soroush Safaei</a:t>
+            </a:r>
+          </a:p>
+          <a:p>
+            <a:pPr algn="ctr">
+              <a:defRPr sz="1300" b="0" i="1">
+                <a:solidFill>
+                  <a:srgbClr val="333333"/>
+                </a:solidFill>
+                <a:latin typeface="Segoe UI"/>
+              </a:defRPr>
+            </a:pPr>
+            <a:r>
+              <a:t>Co-Founder</a:t>
+            </a:r>
+          </a:p>
+          <a:p>
+            <a:pPr algn="ctr">
+              <a:defRPr sz="1200" b="0" i="0">
+                <a:solidFill>
+                  <a:srgbClr val="333333"/>
+                </a:solidFill>
+                <a:latin typeface="Segoe UI"/>
+              </a:defRPr>
+            </a:pPr>
+            <a:r>
+              <a:t>Expertise in AI Strategy &amp; Market Development.</a:t>
+            </a:r>
+          </a:p>
+        </p:txBody>
+      </p:sp>
+      <p:sp>
+        <p:nvSpPr>
+          <p:cNvPr id="9" name="Rounded Rectangle 8"/>
+          <p:cNvSpPr/>
+          <p:nvPr/>
+        </p:nvSpPr>
+        <p:spPr>
+          <a:xfrm>
+            <a:off x="8064923" y="1371600"/>
+            <a:ext cx="3575261" cy="4572000"/>
+          </a:xfrm>
+          <a:prstGeom prst="roundRect">
+            <a:avLst/>
+          </a:prstGeom>
+          <a:solidFill>
+            <a:srgbClr val="FFFFFF"/>
+          </a:solidFill>
+          <a:ln w="12700">
+            <a:solidFill>
+              <a:srgbClr val="8B7355"/>
+            </a:solidFill>
+          </a:ln>
+        </p:spPr>
+        <p:style>
+          <a:lnRef idx="1">
+            <a:schemeClr val="accent1"/>
+          </a:lnRef>
+          <a:fillRef idx="3">
+            <a:schemeClr val="accent1"/>
+          </a:fillRef>
+          <a:effectRef idx="2">
+            <a:schemeClr val="accent1"/>
+          </a:effectRef>
+          <a:fontRef idx="minor">
+            <a:schemeClr val="lt1"/>
+          </a:fontRef>
+        </p:style>
+        <p:txBody>
+          <a:bodyPr rtlCol="0" anchor="ctr"/>
+          <a:lstStyle/>
+          <a:p>
+            <a:pPr algn="ctr"/>
+          </a:p>
+        </p:txBody>
+      </p:sp>
+      <p:pic>
+        <p:nvPicPr>
+          <p:cNvPr id="10" name="Picture 9" descr="hosseinFotouhi.jpeg"/>
+          <p:cNvPicPr>
+            <a:picLocks noChangeAspect="1"/>
+          </p:cNvPicPr>
+          <p:nvPr/>
+        </p:nvPicPr>
+        <p:blipFill>
+          <a:blip r:embed="rId4"/>
+          <a:stretch>
+            <a:fillRect/>
+          </a:stretch>
+        </p:blipFill>
+        <p:spPr>
+          <a:xfrm>
+            <a:off x="8983874" y="1554480"/>
+            <a:ext cx="1737360" cy="1737360"/>
+          </a:xfrm>
+          <a:prstGeom prst="rect">
+            <a:avLst/>
+          </a:prstGeom>
+        </p:spPr>
+      </p:pic>
+      <p:sp>
+        <p:nvSpPr>
+          <p:cNvPr id="11" name="TextBox 10"/>
+          <p:cNvSpPr txBox="1"/>
+          <p:nvPr/>
+        </p:nvSpPr>
+        <p:spPr>
+          <a:xfrm>
+            <a:off x="8247803" y="3383280"/>
+            <a:ext cx="3209501" cy="2286000"/>
+          </a:xfrm>
+          <a:prstGeom prst="rect">
+            <a:avLst/>
+          </a:prstGeom>
+          <a:noFill/>
+        </p:spPr>
+        <p:txBody>
+          <a:bodyPr wrap="square">
+            <a:spAutoFit/>
+          </a:bodyPr>
+          <a:lstStyle/>
+          <a:p>
+            <a:pPr algn="ctr">
+              <a:defRPr sz="1600" b="1" i="0">
+                <a:solidFill>
+                  <a:srgbClr val="8B7355"/>
+                </a:solidFill>
+                <a:latin typeface="Segoe UI"/>
+              </a:defRPr>
+            </a:pPr>
+            <a:r>
+              <a:t>Hossein Fotouhi</a:t>
+            </a:r>
+          </a:p>
+          <a:p>
+            <a:pPr algn="ctr">
+              <a:defRPr sz="1300" b="0" i="1">
+                <a:solidFill>
+                  <a:srgbClr val="333333"/>
+                </a:solidFill>
+                <a:latin typeface="Segoe UI"/>
+              </a:defRPr>
+            </a:pPr>
+            <a:r>
+              <a:t>Co-Founder</a:t>
+            </a:r>
+          </a:p>
+          <a:p>
+            <a:pPr algn="ctr">
+              <a:defRPr sz="1200" b="0" i="0">
+                <a:solidFill>
+                  <a:srgbClr val="333333"/>
+                </a:solidFill>
+                <a:latin typeface="Segoe UI"/>
+              </a:defRPr>
+            </a:pPr>
+            <a:r>
+              <a:t>Associate Professor at MDU, Expert in IoT &amp; Edge Computing.</a:t>
+            </a:r>
+          </a:p>
+        </p:txBody>
+      </p:sp>
+      <p:sp>
+        <p:nvSpPr>
+          <p:cNvPr id="12" name="TextBox 11"/>
+          <p:cNvSpPr txBox="1"/>
+          <p:nvPr/>
+        </p:nvSpPr>
+        <p:spPr>
+          <a:xfrm>
+            <a:off x="914400" y="5577840"/>
+            <a:ext cx="10360025" cy="914400"/>
+          </a:xfrm>
+          <a:prstGeom prst="rect">
+            <a:avLst/>
+          </a:prstGeom>
+          <a:noFill/>
+        </p:spPr>
+        <p:txBody>
+          <a:bodyPr wrap="none">
+            <a:spAutoFit/>
+          </a:bodyPr>
+          <a:lstStyle/>
+          <a:p>
+            <a:pPr algn="ctr">
+              <a:defRPr sz="1600" b="0" i="1">
+                <a:solidFill>
+                  <a:srgbClr val="333333"/>
+                </a:solidFill>
+                <a:latin typeface="Segoe UI"/>
+              </a:defRPr>
+            </a:pPr>
+            <a:r>
+              <a:t>Why Us: We bridge the gap between AI, Hardware constraints, and Academic Innovation.</a:t>
             </a:r>
           </a:p>
         </p:txBody>
@@ -5621,25 +5976,32 @@
       <p:grpSpPr/>
       <p:sp>
         <p:nvSpPr>
-          <p:cNvPr id="2" name="Title 1"/>
-          <p:cNvSpPr>
-            <a:spLocks noGrp="1"/>
-          </p:cNvSpPr>
-          <p:nvPr>
-            <p:ph type="title"/>
-          </p:nvPr>
-        </p:nvSpPr>
-        <p:spPr/>
-        <p:txBody>
-          <a:bodyPr/>
-          <a:lstStyle/>
-          <a:p>
-            <a:pPr>
-              <a:defRPr b="1">
+          <p:cNvPr id="2" name="TextBox 1"/>
+          <p:cNvSpPr txBox="1"/>
+          <p:nvPr/>
+        </p:nvSpPr>
+        <p:spPr>
+          <a:xfrm>
+            <a:off x="548640" y="365760"/>
+            <a:ext cx="11091545" cy="914400"/>
+          </a:xfrm>
+          <a:prstGeom prst="rect">
+            <a:avLst/>
+          </a:prstGeom>
+          <a:noFill/>
+        </p:spPr>
+        <p:txBody>
+          <a:bodyPr wrap="none">
+            <a:spAutoFit/>
+          </a:bodyPr>
+          <a:lstStyle/>
+          <a:p>
+            <a:pPr algn="l">
+              <a:defRPr sz="4000" b="1" i="0">
                 <a:solidFill>
                   <a:srgbClr val="8B7355"/>
                 </a:solidFill>
-                <a:latin typeface="Arial"/>
+                <a:latin typeface="Segoe UI"/>
               </a:defRPr>
             </a:pPr>
             <a:r>
@@ -5650,81 +6012,429 @@
       </p:sp>
       <p:sp>
         <p:nvSpPr>
-          <p:cNvPr id="3" name="Content Placeholder 2"/>
-          <p:cNvSpPr>
-            <a:spLocks noGrp="1"/>
-          </p:cNvSpPr>
-          <p:nvPr>
-            <p:ph idx="1"/>
-          </p:nvPr>
-        </p:nvSpPr>
-        <p:spPr/>
-        <p:txBody>
-          <a:bodyPr/>
-          <a:lstStyle/>
-          <a:p/>
-          <a:p>
-            <a:pPr>
-              <a:spcAft>
-                <a:spcPts val="1400"/>
-              </a:spcAft>
-              <a:defRPr sz="2000">
-                <a:solidFill>
-                  <a:srgbClr val="333333"/>
-                </a:solidFill>
-                <a:latin typeface="Arial"/>
-              </a:defRPr>
-            </a:pPr>
-            <a:r>
-              <a:t>• Soroush Safaei: Co-Founder &amp; CEO. Expertise in AI &amp; Business Strategy.</a:t>
-            </a:r>
-          </a:p>
-          <a:p>
-            <a:pPr>
-              <a:spcAft>
-                <a:spcPts val="1400"/>
-              </a:spcAft>
-              <a:defRPr sz="2000">
-                <a:solidFill>
-                  <a:srgbClr val="333333"/>
-                </a:solidFill>
-                <a:latin typeface="Arial"/>
-              </a:defRPr>
-            </a:pPr>
-            <a:r>
-              <a:t>• Ahmad Mostafavi: Co-Founder &amp; CTO. Deep tech expert in Embedded Systems.</a:t>
-            </a:r>
-          </a:p>
-          <a:p>
-            <a:pPr>
-              <a:spcAft>
-                <a:spcPts val="1400"/>
-              </a:spcAft>
-              <a:defRPr sz="2000">
-                <a:solidFill>
-                  <a:srgbClr val="333333"/>
-                </a:solidFill>
-                <a:latin typeface="Arial"/>
-              </a:defRPr>
-            </a:pPr>
-            <a:r>
-              <a:t>• Hossein Fotouhi: Co-Founder &amp; Scientific Lead. Professor in IoT &amp; Networks.</a:t>
-            </a:r>
-          </a:p>
-          <a:p>
-            <a:pPr>
-              <a:spcAft>
-                <a:spcPts val="1400"/>
-              </a:spcAft>
-              <a:defRPr sz="2000">
-                <a:solidFill>
-                  <a:srgbClr val="333333"/>
-                </a:solidFill>
-                <a:latin typeface="Arial"/>
-              </a:defRPr>
-            </a:pPr>
-            <a:r>
-              <a:t>• Why Us: We bridge the gap between Data Science and Hardware constraints.</a:t>
+          <p:cNvPr id="3" name="Rounded Rectangle 2"/>
+          <p:cNvSpPr/>
+          <p:nvPr/>
+        </p:nvSpPr>
+        <p:spPr>
+          <a:xfrm>
+            <a:off x="548640" y="1371600"/>
+            <a:ext cx="3575261" cy="4572000"/>
+          </a:xfrm>
+          <a:prstGeom prst="roundRect">
+            <a:avLst/>
+          </a:prstGeom>
+          <a:solidFill>
+            <a:srgbClr val="FFFFFF"/>
+          </a:solidFill>
+          <a:ln w="12700">
+            <a:solidFill>
+              <a:srgbClr val="8B7355"/>
+            </a:solidFill>
+          </a:ln>
+        </p:spPr>
+        <p:style>
+          <a:lnRef idx="1">
+            <a:schemeClr val="accent1"/>
+          </a:lnRef>
+          <a:fillRef idx="3">
+            <a:schemeClr val="accent1"/>
+          </a:fillRef>
+          <a:effectRef idx="2">
+            <a:schemeClr val="accent1"/>
+          </a:effectRef>
+          <a:fontRef idx="minor">
+            <a:schemeClr val="lt1"/>
+          </a:fontRef>
+        </p:style>
+        <p:txBody>
+          <a:bodyPr rtlCol="0" anchor="ctr"/>
+          <a:lstStyle/>
+          <a:p>
+            <a:pPr algn="ctr"/>
+          </a:p>
+        </p:txBody>
+      </p:sp>
+      <p:pic>
+        <p:nvPicPr>
+          <p:cNvPr id="4" name="Picture 3" descr="ahmadMostafavi.jpeg"/>
+          <p:cNvPicPr>
+            <a:picLocks noChangeAspect="1"/>
+          </p:cNvPicPr>
+          <p:nvPr/>
+        </p:nvPicPr>
+        <p:blipFill>
+          <a:blip r:embed="rId2"/>
+          <a:stretch>
+            <a:fillRect/>
+          </a:stretch>
+        </p:blipFill>
+        <p:spPr>
+          <a:xfrm>
+            <a:off x="1467590" y="1554480"/>
+            <a:ext cx="1737360" cy="1737360"/>
+          </a:xfrm>
+          <a:prstGeom prst="rect">
+            <a:avLst/>
+          </a:prstGeom>
+        </p:spPr>
+      </p:pic>
+      <p:sp>
+        <p:nvSpPr>
+          <p:cNvPr id="5" name="TextBox 4"/>
+          <p:cNvSpPr txBox="1"/>
+          <p:nvPr/>
+        </p:nvSpPr>
+        <p:spPr>
+          <a:xfrm>
+            <a:off x="731520" y="3383280"/>
+            <a:ext cx="3209501" cy="2286000"/>
+          </a:xfrm>
+          <a:prstGeom prst="rect">
+            <a:avLst/>
+          </a:prstGeom>
+          <a:noFill/>
+        </p:spPr>
+        <p:txBody>
+          <a:bodyPr wrap="square">
+            <a:spAutoFit/>
+          </a:bodyPr>
+          <a:lstStyle/>
+          <a:p>
+            <a:pPr algn="ctr">
+              <a:defRPr sz="1600" b="1" i="0">
+                <a:solidFill>
+                  <a:srgbClr val="8B7355"/>
+                </a:solidFill>
+                <a:latin typeface="Segoe UI"/>
+              </a:defRPr>
+            </a:pPr>
+            <a:r>
+              <a:t>Ahmad Mostafavi</a:t>
+            </a:r>
+          </a:p>
+          <a:p>
+            <a:pPr algn="ctr">
+              <a:defRPr sz="1300" b="0" i="1">
+                <a:solidFill>
+                  <a:srgbClr val="333333"/>
+                </a:solidFill>
+                <a:latin typeface="Segoe UI"/>
+              </a:defRPr>
+            </a:pPr>
+            <a:r>
+              <a:t>CEO &amp; Founder</a:t>
+            </a:r>
+          </a:p>
+          <a:p>
+            <a:pPr algn="ctr">
+              <a:defRPr sz="1200" b="0" i="0">
+                <a:solidFill>
+                  <a:srgbClr val="333333"/>
+                </a:solidFill>
+                <a:latin typeface="Segoe UI"/>
+              </a:defRPr>
+            </a:pPr>
+            <a:r>
+              <a:t>Deep tech expert in Embedded Systems &amp; Security.</a:t>
+            </a:r>
+          </a:p>
+        </p:txBody>
+      </p:sp>
+      <p:sp>
+        <p:nvSpPr>
+          <p:cNvPr id="6" name="Rounded Rectangle 5"/>
+          <p:cNvSpPr/>
+          <p:nvPr/>
+        </p:nvSpPr>
+        <p:spPr>
+          <a:xfrm>
+            <a:off x="4306781" y="1371600"/>
+            <a:ext cx="3575261" cy="4572000"/>
+          </a:xfrm>
+          <a:prstGeom prst="roundRect">
+            <a:avLst/>
+          </a:prstGeom>
+          <a:solidFill>
+            <a:srgbClr val="FFFFFF"/>
+          </a:solidFill>
+          <a:ln w="12700">
+            <a:solidFill>
+              <a:srgbClr val="8B7355"/>
+            </a:solidFill>
+          </a:ln>
+        </p:spPr>
+        <p:style>
+          <a:lnRef idx="1">
+            <a:schemeClr val="accent1"/>
+          </a:lnRef>
+          <a:fillRef idx="3">
+            <a:schemeClr val="accent1"/>
+          </a:fillRef>
+          <a:effectRef idx="2">
+            <a:schemeClr val="accent1"/>
+          </a:effectRef>
+          <a:fontRef idx="minor">
+            <a:schemeClr val="lt1"/>
+          </a:fontRef>
+        </p:style>
+        <p:txBody>
+          <a:bodyPr rtlCol="0" anchor="ctr"/>
+          <a:lstStyle/>
+          <a:p>
+            <a:pPr algn="ctr"/>
+          </a:p>
+        </p:txBody>
+      </p:sp>
+      <p:pic>
+        <p:nvPicPr>
+          <p:cNvPr id="7" name="Picture 6" descr="Soroush.jpeg"/>
+          <p:cNvPicPr>
+            <a:picLocks noChangeAspect="1"/>
+          </p:cNvPicPr>
+          <p:nvPr/>
+        </p:nvPicPr>
+        <p:blipFill>
+          <a:blip r:embed="rId3"/>
+          <a:stretch>
+            <a:fillRect/>
+          </a:stretch>
+        </p:blipFill>
+        <p:spPr>
+          <a:xfrm>
+            <a:off x="5225732" y="1554480"/>
+            <a:ext cx="1737360" cy="1737360"/>
+          </a:xfrm>
+          <a:prstGeom prst="rect">
+            <a:avLst/>
+          </a:prstGeom>
+        </p:spPr>
+      </p:pic>
+      <p:sp>
+        <p:nvSpPr>
+          <p:cNvPr id="8" name="TextBox 7"/>
+          <p:cNvSpPr txBox="1"/>
+          <p:nvPr/>
+        </p:nvSpPr>
+        <p:spPr>
+          <a:xfrm>
+            <a:off x="4489661" y="3383280"/>
+            <a:ext cx="3209501" cy="2286000"/>
+          </a:xfrm>
+          <a:prstGeom prst="rect">
+            <a:avLst/>
+          </a:prstGeom>
+          <a:noFill/>
+        </p:spPr>
+        <p:txBody>
+          <a:bodyPr wrap="square">
+            <a:spAutoFit/>
+          </a:bodyPr>
+          <a:lstStyle/>
+          <a:p>
+            <a:pPr algn="ctr">
+              <a:defRPr sz="1600" b="1" i="0">
+                <a:solidFill>
+                  <a:srgbClr val="8B7355"/>
+                </a:solidFill>
+                <a:latin typeface="Segoe UI"/>
+              </a:defRPr>
+            </a:pPr>
+            <a:r>
+              <a:t>Soroush Safaei</a:t>
+            </a:r>
+          </a:p>
+          <a:p>
+            <a:pPr algn="ctr">
+              <a:defRPr sz="1300" b="0" i="1">
+                <a:solidFill>
+                  <a:srgbClr val="333333"/>
+                </a:solidFill>
+                <a:latin typeface="Segoe UI"/>
+              </a:defRPr>
+            </a:pPr>
+            <a:r>
+              <a:t>Co-Founder</a:t>
+            </a:r>
+          </a:p>
+          <a:p>
+            <a:pPr algn="ctr">
+              <a:defRPr sz="1200" b="0" i="0">
+                <a:solidFill>
+                  <a:srgbClr val="333333"/>
+                </a:solidFill>
+                <a:latin typeface="Segoe UI"/>
+              </a:defRPr>
+            </a:pPr>
+            <a:r>
+              <a:t>Expertise in AI Strategy &amp; Market Development.</a:t>
+            </a:r>
+          </a:p>
+        </p:txBody>
+      </p:sp>
+      <p:sp>
+        <p:nvSpPr>
+          <p:cNvPr id="9" name="Rounded Rectangle 8"/>
+          <p:cNvSpPr/>
+          <p:nvPr/>
+        </p:nvSpPr>
+        <p:spPr>
+          <a:xfrm>
+            <a:off x="8064923" y="1371600"/>
+            <a:ext cx="3575261" cy="4572000"/>
+          </a:xfrm>
+          <a:prstGeom prst="roundRect">
+            <a:avLst/>
+          </a:prstGeom>
+          <a:solidFill>
+            <a:srgbClr val="FFFFFF"/>
+          </a:solidFill>
+          <a:ln w="12700">
+            <a:solidFill>
+              <a:srgbClr val="8B7355"/>
+            </a:solidFill>
+          </a:ln>
+        </p:spPr>
+        <p:style>
+          <a:lnRef idx="1">
+            <a:schemeClr val="accent1"/>
+          </a:lnRef>
+          <a:fillRef idx="3">
+            <a:schemeClr val="accent1"/>
+          </a:fillRef>
+          <a:effectRef idx="2">
+            <a:schemeClr val="accent1"/>
+          </a:effectRef>
+          <a:fontRef idx="minor">
+            <a:schemeClr val="lt1"/>
+          </a:fontRef>
+        </p:style>
+        <p:txBody>
+          <a:bodyPr rtlCol="0" anchor="ctr"/>
+          <a:lstStyle/>
+          <a:p>
+            <a:pPr algn="ctr"/>
+          </a:p>
+        </p:txBody>
+      </p:sp>
+      <p:pic>
+        <p:nvPicPr>
+          <p:cNvPr id="10" name="Picture 9" descr="hosseinFotouhi.jpeg"/>
+          <p:cNvPicPr>
+            <a:picLocks noChangeAspect="1"/>
+          </p:cNvPicPr>
+          <p:nvPr/>
+        </p:nvPicPr>
+        <p:blipFill>
+          <a:blip r:embed="rId4"/>
+          <a:stretch>
+            <a:fillRect/>
+          </a:stretch>
+        </p:blipFill>
+        <p:spPr>
+          <a:xfrm>
+            <a:off x="8983874" y="1554480"/>
+            <a:ext cx="1737360" cy="1737360"/>
+          </a:xfrm>
+          <a:prstGeom prst="rect">
+            <a:avLst/>
+          </a:prstGeom>
+        </p:spPr>
+      </p:pic>
+      <p:sp>
+        <p:nvSpPr>
+          <p:cNvPr id="11" name="TextBox 10"/>
+          <p:cNvSpPr txBox="1"/>
+          <p:nvPr/>
+        </p:nvSpPr>
+        <p:spPr>
+          <a:xfrm>
+            <a:off x="8247803" y="3383280"/>
+            <a:ext cx="3209501" cy="2286000"/>
+          </a:xfrm>
+          <a:prstGeom prst="rect">
+            <a:avLst/>
+          </a:prstGeom>
+          <a:noFill/>
+        </p:spPr>
+        <p:txBody>
+          <a:bodyPr wrap="square">
+            <a:spAutoFit/>
+          </a:bodyPr>
+          <a:lstStyle/>
+          <a:p>
+            <a:pPr algn="ctr">
+              <a:defRPr sz="1600" b="1" i="0">
+                <a:solidFill>
+                  <a:srgbClr val="8B7355"/>
+                </a:solidFill>
+                <a:latin typeface="Segoe UI"/>
+              </a:defRPr>
+            </a:pPr>
+            <a:r>
+              <a:t>Hossein Fotouhi</a:t>
+            </a:r>
+          </a:p>
+          <a:p>
+            <a:pPr algn="ctr">
+              <a:defRPr sz="1300" b="0" i="1">
+                <a:solidFill>
+                  <a:srgbClr val="333333"/>
+                </a:solidFill>
+                <a:latin typeface="Segoe UI"/>
+              </a:defRPr>
+            </a:pPr>
+            <a:r>
+              <a:t>Co-Founder</a:t>
+            </a:r>
+          </a:p>
+          <a:p>
+            <a:pPr algn="ctr">
+              <a:defRPr sz="1200" b="0" i="0">
+                <a:solidFill>
+                  <a:srgbClr val="333333"/>
+                </a:solidFill>
+                <a:latin typeface="Segoe UI"/>
+              </a:defRPr>
+            </a:pPr>
+            <a:r>
+              <a:t>Associate Professor at MDU, Expert in IoT &amp; Edge Computing.</a:t>
+            </a:r>
+          </a:p>
+        </p:txBody>
+      </p:sp>
+      <p:sp>
+        <p:nvSpPr>
+          <p:cNvPr id="12" name="TextBox 11"/>
+          <p:cNvSpPr txBox="1"/>
+          <p:nvPr/>
+        </p:nvSpPr>
+        <p:spPr>
+          <a:xfrm>
+            <a:off x="914400" y="5577840"/>
+            <a:ext cx="10360025" cy="914400"/>
+          </a:xfrm>
+          <a:prstGeom prst="rect">
+            <a:avLst/>
+          </a:prstGeom>
+          <a:noFill/>
+        </p:spPr>
+        <p:txBody>
+          <a:bodyPr wrap="none">
+            <a:spAutoFit/>
+          </a:bodyPr>
+          <a:lstStyle/>
+          <a:p>
+            <a:pPr algn="ctr">
+              <a:defRPr sz="1600" b="0" i="1">
+                <a:solidFill>
+                  <a:srgbClr val="333333"/>
+                </a:solidFill>
+                <a:latin typeface="Segoe UI"/>
+              </a:defRPr>
+            </a:pPr>
+            <a:r>
+              <a:t>Why Us: We bridge the gap between AI, Hardware constraints, and Academic Innovation.</a:t>
             </a:r>
           </a:p>
         </p:txBody>
@@ -5770,12 +6480,12 @@
           <a:bodyPr/>
           <a:lstStyle/>
           <a:p>
-            <a:pPr>
-              <a:defRPr b="1">
+            <a:pPr algn="l">
+              <a:defRPr sz="3600" b="1" i="0">
                 <a:solidFill>
                   <a:srgbClr val="8B7355"/>
                 </a:solidFill>
-                <a:latin typeface="Arial"/>
+                <a:latin typeface="Segoe UI"/>
               </a:defRPr>
             </a:pPr>
             <a:r>
@@ -5796,103 +6506,103 @@
         </p:nvSpPr>
         <p:spPr/>
         <p:txBody>
-          <a:bodyPr/>
+          <a:bodyPr wrap="square"/>
           <a:lstStyle/>
           <a:p/>
           <a:p>
             <a:pPr>
               <a:spcAft>
-                <a:spcPts val="1400"/>
+                <a:spcPts val="1000"/>
               </a:spcAft>
-              <a:defRPr sz="2000">
-                <a:solidFill>
-                  <a:srgbClr val="333333"/>
-                </a:solidFill>
-                <a:latin typeface="Arial"/>
-              </a:defRPr>
-            </a:pPr>
-            <a:r>
-              <a:t>• Seeking: $500K - $1M (Seed / Pre-Seed).</a:t>
+              <a:defRPr sz="2000" b="0" i="0">
+                <a:solidFill>
+                  <a:srgbClr val="333333"/>
+                </a:solidFill>
+                <a:latin typeface="Segoe UI"/>
+              </a:defRPr>
+            </a:pPr>
+            <a:r>
+              <a:t>Seeking: $500K - $1M (Seed / Pre-Seed).</a:t>
             </a:r>
           </a:p>
           <a:p>
             <a:pPr>
               <a:spcAft>
-                <a:spcPts val="1400"/>
+                <a:spcPts val="1000"/>
               </a:spcAft>
-              <a:defRPr sz="2000">
-                <a:solidFill>
-                  <a:srgbClr val="333333"/>
-                </a:solidFill>
-                <a:latin typeface="Arial"/>
-              </a:defRPr>
-            </a:pPr>
-            <a:r>
-              <a:t>• Use of Funds:</a:t>
+              <a:defRPr sz="2000" b="0" i="0">
+                <a:solidFill>
+                  <a:srgbClr val="333333"/>
+                </a:solidFill>
+                <a:latin typeface="Segoe UI"/>
+              </a:defRPr>
+            </a:pPr>
+            <a:r>
+              <a:t>Use of Funds:</a:t>
             </a:r>
           </a:p>
           <a:p>
             <a:pPr>
               <a:spcAft>
-                <a:spcPts val="1400"/>
+                <a:spcPts val="1000"/>
               </a:spcAft>
-              <a:defRPr sz="2000">
-                <a:solidFill>
-                  <a:srgbClr val="333333"/>
-                </a:solidFill>
-                <a:latin typeface="Arial"/>
-              </a:defRPr>
-            </a:pPr>
-            <a:r>
-              <a:t>  - 40% R&amp;D (SDK refinement, Certification).</a:t>
+              <a:defRPr sz="2000" b="0" i="0">
+                <a:solidFill>
+                  <a:srgbClr val="333333"/>
+                </a:solidFill>
+                <a:latin typeface="Segoe UI"/>
+              </a:defRPr>
+            </a:pPr>
+            <a:r>
+              <a:t>40% R&amp;D (SDK refinement, Certification).</a:t>
             </a:r>
           </a:p>
           <a:p>
             <a:pPr>
               <a:spcAft>
-                <a:spcPts val="1400"/>
+                <a:spcPts val="1000"/>
               </a:spcAft>
-              <a:defRPr sz="2000">
-                <a:solidFill>
-                  <a:srgbClr val="333333"/>
-                </a:solidFill>
-                <a:latin typeface="Arial"/>
-              </a:defRPr>
-            </a:pPr>
-            <a:r>
-              <a:t>  - 30% Business Dev (Pilot execution, Partnership management).</a:t>
+              <a:defRPr sz="2000" b="0" i="0">
+                <a:solidFill>
+                  <a:srgbClr val="333333"/>
+                </a:solidFill>
+                <a:latin typeface="Segoe UI"/>
+              </a:defRPr>
+            </a:pPr>
+            <a:r>
+              <a:t>30% Business Dev (Pilot execution, Partnership management).</a:t>
             </a:r>
           </a:p>
           <a:p>
             <a:pPr>
               <a:spcAft>
-                <a:spcPts val="1400"/>
+                <a:spcPts val="1000"/>
               </a:spcAft>
-              <a:defRPr sz="2000">
-                <a:solidFill>
-                  <a:srgbClr val="333333"/>
-                </a:solidFill>
-                <a:latin typeface="Arial"/>
-              </a:defRPr>
-            </a:pPr>
-            <a:r>
-              <a:t>  - 30% Operations &amp; Legal (IP Protection).</a:t>
+              <a:defRPr sz="2000" b="0" i="0">
+                <a:solidFill>
+                  <a:srgbClr val="333333"/>
+                </a:solidFill>
+                <a:latin typeface="Segoe UI"/>
+              </a:defRPr>
+            </a:pPr>
+            <a:r>
+              <a:t>30% Operations &amp; Legal (IP Protection).</a:t>
             </a:r>
           </a:p>
           <a:p>
             <a:pPr>
               <a:spcAft>
-                <a:spcPts val="1400"/>
+                <a:spcPts val="1000"/>
               </a:spcAft>
-              <a:defRPr sz="2000">
-                <a:solidFill>
-                  <a:srgbClr val="333333"/>
-                </a:solidFill>
-                <a:latin typeface="Arial"/>
-              </a:defRPr>
-            </a:pPr>
-            <a:r>
-              <a:t>• Opportunity: Join us in defining the standard for Edge AI Security.</a:t>
+              <a:defRPr sz="2000" b="0" i="0">
+                <a:solidFill>
+                  <a:srgbClr val="333333"/>
+                </a:solidFill>
+                <a:latin typeface="Segoe UI"/>
+              </a:defRPr>
+            </a:pPr>
+            <a:r>
+              <a:t>Opportunity: Join us in defining the standard for Edge AI Security.</a:t>
             </a:r>
           </a:p>
         </p:txBody>
@@ -5938,12 +6648,12 @@
           <a:bodyPr/>
           <a:lstStyle/>
           <a:p>
-            <a:pPr>
-              <a:defRPr b="1">
+            <a:pPr algn="l">
+              <a:defRPr sz="3600" b="1" i="0">
                 <a:solidFill>
                   <a:srgbClr val="8B7355"/>
                 </a:solidFill>
-                <a:latin typeface="Arial"/>
+                <a:latin typeface="Segoe UI"/>
               </a:defRPr>
             </a:pPr>
             <a:r>
@@ -5964,103 +6674,103 @@
         </p:nvSpPr>
         <p:spPr/>
         <p:txBody>
-          <a:bodyPr/>
+          <a:bodyPr wrap="square"/>
           <a:lstStyle/>
           <a:p/>
           <a:p>
             <a:pPr>
               <a:spcAft>
-                <a:spcPts val="1400"/>
+                <a:spcPts val="1000"/>
               </a:spcAft>
-              <a:defRPr sz="2000">
-                <a:solidFill>
-                  <a:srgbClr val="333333"/>
-                </a:solidFill>
-                <a:latin typeface="Arial"/>
-              </a:defRPr>
-            </a:pPr>
-            <a:r>
-              <a:t>• Seeking: $500K - $1M (Seed / Pre-Seed).</a:t>
+              <a:defRPr sz="2000" b="0" i="0">
+                <a:solidFill>
+                  <a:srgbClr val="333333"/>
+                </a:solidFill>
+                <a:latin typeface="Segoe UI"/>
+              </a:defRPr>
+            </a:pPr>
+            <a:r>
+              <a:t>Seeking: $500K - $1M (Seed / Pre-Seed).</a:t>
             </a:r>
           </a:p>
           <a:p>
             <a:pPr>
               <a:spcAft>
-                <a:spcPts val="1400"/>
+                <a:spcPts val="1000"/>
               </a:spcAft>
-              <a:defRPr sz="2000">
-                <a:solidFill>
-                  <a:srgbClr val="333333"/>
-                </a:solidFill>
-                <a:latin typeface="Arial"/>
-              </a:defRPr>
-            </a:pPr>
-            <a:r>
-              <a:t>• Use of Funds:</a:t>
+              <a:defRPr sz="2000" b="0" i="0">
+                <a:solidFill>
+                  <a:srgbClr val="333333"/>
+                </a:solidFill>
+                <a:latin typeface="Segoe UI"/>
+              </a:defRPr>
+            </a:pPr>
+            <a:r>
+              <a:t>Use of Funds:</a:t>
             </a:r>
           </a:p>
           <a:p>
             <a:pPr>
               <a:spcAft>
-                <a:spcPts val="1400"/>
+                <a:spcPts val="1000"/>
               </a:spcAft>
-              <a:defRPr sz="2000">
-                <a:solidFill>
-                  <a:srgbClr val="333333"/>
-                </a:solidFill>
-                <a:latin typeface="Arial"/>
-              </a:defRPr>
-            </a:pPr>
-            <a:r>
-              <a:t>  - 40% R&amp;D (SDK refinement, Certification).</a:t>
+              <a:defRPr sz="2000" b="0" i="0">
+                <a:solidFill>
+                  <a:srgbClr val="333333"/>
+                </a:solidFill>
+                <a:latin typeface="Segoe UI"/>
+              </a:defRPr>
+            </a:pPr>
+            <a:r>
+              <a:t>40% R&amp;D (SDK refinement, Certification).</a:t>
             </a:r>
           </a:p>
           <a:p>
             <a:pPr>
               <a:spcAft>
-                <a:spcPts val="1400"/>
+                <a:spcPts val="1000"/>
               </a:spcAft>
-              <a:defRPr sz="2000">
-                <a:solidFill>
-                  <a:srgbClr val="333333"/>
-                </a:solidFill>
-                <a:latin typeface="Arial"/>
-              </a:defRPr>
-            </a:pPr>
-            <a:r>
-              <a:t>  - 30% Business Dev (Pilot execution, Partnership management).</a:t>
+              <a:defRPr sz="2000" b="0" i="0">
+                <a:solidFill>
+                  <a:srgbClr val="333333"/>
+                </a:solidFill>
+                <a:latin typeface="Segoe UI"/>
+              </a:defRPr>
+            </a:pPr>
+            <a:r>
+              <a:t>30% Business Dev (Pilot execution, Partnership management).</a:t>
             </a:r>
           </a:p>
           <a:p>
             <a:pPr>
               <a:spcAft>
-                <a:spcPts val="1400"/>
+                <a:spcPts val="1000"/>
               </a:spcAft>
-              <a:defRPr sz="2000">
-                <a:solidFill>
-                  <a:srgbClr val="333333"/>
-                </a:solidFill>
-                <a:latin typeface="Arial"/>
-              </a:defRPr>
-            </a:pPr>
-            <a:r>
-              <a:t>  - 30% Operations &amp; Legal (IP Protection).</a:t>
+              <a:defRPr sz="2000" b="0" i="0">
+                <a:solidFill>
+                  <a:srgbClr val="333333"/>
+                </a:solidFill>
+                <a:latin typeface="Segoe UI"/>
+              </a:defRPr>
+            </a:pPr>
+            <a:r>
+              <a:t>30% Operations &amp; Legal (IP Protection).</a:t>
             </a:r>
           </a:p>
           <a:p>
             <a:pPr>
               <a:spcAft>
-                <a:spcPts val="1400"/>
+                <a:spcPts val="1000"/>
               </a:spcAft>
-              <a:defRPr sz="2000">
-                <a:solidFill>
-                  <a:srgbClr val="333333"/>
-                </a:solidFill>
-                <a:latin typeface="Arial"/>
-              </a:defRPr>
-            </a:pPr>
-            <a:r>
-              <a:t>• Opportunity: Join us in defining the standard for Edge AI Security.</a:t>
+              <a:defRPr sz="2000" b="0" i="0">
+                <a:solidFill>
+                  <a:srgbClr val="333333"/>
+                </a:solidFill>
+                <a:latin typeface="Segoe UI"/>
+              </a:defRPr>
+            </a:pPr>
+            <a:r>
+              <a:t>Opportunity: Join us in defining the standard for Edge AI Security.</a:t>
             </a:r>
           </a:p>
         </p:txBody>
@@ -6106,90 +6816,93 @@
           <a:bodyPr/>
           <a:lstStyle/>
           <a:p>
+            <a:pPr algn="l">
+              <a:defRPr sz="3600" b="1" i="0">
+                <a:solidFill>
+                  <a:srgbClr val="8B7355"/>
+                </a:solidFill>
+                <a:latin typeface="Segoe UI"/>
+              </a:defRPr>
+            </a:pPr>
+            <a:r>
+              <a:t>Contact</a:t>
+            </a:r>
+          </a:p>
+        </p:txBody>
+      </p:sp>
+      <p:sp>
+        <p:nvSpPr>
+          <p:cNvPr id="3" name="Subtitle 2"/>
+          <p:cNvSpPr>
+            <a:spLocks noGrp="1"/>
+          </p:cNvSpPr>
+          <p:nvPr>
+            <p:ph type="subTitle" idx="1"/>
+          </p:nvPr>
+        </p:nvSpPr>
+        <p:spPr/>
+        <p:txBody>
+          <a:bodyPr wrap="square"/>
+          <a:lstStyle/>
+          <a:p/>
+          <a:p>
             <a:pPr>
-              <a:defRPr b="1">
+              <a:spcAft>
+                <a:spcPts val="1200"/>
+              </a:spcAft>
+              <a:defRPr sz="2400" b="0" i="0">
                 <a:solidFill>
                   <a:srgbClr val="8B7355"/>
                 </a:solidFill>
-                <a:latin typeface="Arial"/>
-              </a:defRPr>
-            </a:pPr>
-            <a:r>
-              <a:t>Contact</a:t>
-            </a:r>
-          </a:p>
-        </p:txBody>
-      </p:sp>
-      <p:sp>
-        <p:nvSpPr>
-          <p:cNvPr id="3" name="Subtitle 2"/>
-          <p:cNvSpPr>
-            <a:spLocks noGrp="1"/>
-          </p:cNvSpPr>
-          <p:nvPr>
-            <p:ph type="subTitle" idx="1"/>
-          </p:nvPr>
-        </p:nvSpPr>
-        <p:spPr/>
-        <p:txBody>
-          <a:bodyPr/>
-          <a:lstStyle/>
+                <a:latin typeface="Segoe UI"/>
+              </a:defRPr>
+            </a:pPr>
+            <a:r>
+              <a:t>Let's build a secure future together.</a:t>
+            </a:r>
+          </a:p>
           <a:p>
             <a:pPr>
-              <a:defRPr sz="2400">
-                <a:solidFill>
-                  <a:srgbClr val="333333"/>
-                </a:solidFill>
-                <a:latin typeface="Arial"/>
-              </a:defRPr>
-            </a:pPr>
-            <a:r>
-              <a:t>Let's build a secure future together.</a:t>
+              <a:spcAft>
+                <a:spcPts val="1000"/>
+              </a:spcAft>
+              <a:defRPr sz="2000" b="0" i="0">
+                <a:solidFill>
+                  <a:srgbClr val="333333"/>
+                </a:solidFill>
+                <a:latin typeface="Segoe UI"/>
+              </a:defRPr>
+            </a:pPr>
+            <a:r>
+              <a:t>Ahmad Mostafavi, Soroush Safaei, Hossein Fotouhi</a:t>
             </a:r>
           </a:p>
           <a:p>
             <a:pPr>
-              <a:defRPr sz="2400">
-                <a:solidFill>
-                  <a:srgbClr val="333333"/>
-                </a:solidFill>
-                <a:latin typeface="Arial"/>
-              </a:defRPr>
-            </a:pPr>
+              <a:spcAft>
+                <a:spcPts val="1000"/>
+              </a:spcAft>
+              <a:defRPr sz="2000" b="0" i="0">
+                <a:solidFill>
+                  <a:srgbClr val="333333"/>
+                </a:solidFill>
+                <a:latin typeface="Segoe UI"/>
+              </a:defRPr>
+            </a:pPr>
+            <a:r>
+              <a:t>LambdaIDS</a:t>
+            </a:r>
           </a:p>
           <a:p>
             <a:pPr>
-              <a:defRPr sz="2400">
-                <a:solidFill>
-                  <a:srgbClr val="333333"/>
-                </a:solidFill>
-                <a:latin typeface="Arial"/>
-              </a:defRPr>
-            </a:pPr>
-            <a:r>
-              <a:t>Soroush Safaei, Ahmad Mostafavi, Hossein Fotouhi</a:t>
-            </a:r>
-          </a:p>
-          <a:p>
-            <a:pPr>
-              <a:defRPr sz="2400">
-                <a:solidFill>
-                  <a:srgbClr val="333333"/>
-                </a:solidFill>
-                <a:latin typeface="Arial"/>
-              </a:defRPr>
-            </a:pPr>
-            <a:r>
-              <a:t>LambdaIDS</a:t>
-            </a:r>
-          </a:p>
-          <a:p>
-            <a:pPr>
-              <a:defRPr sz="2400">
-                <a:solidFill>
-                  <a:srgbClr val="333333"/>
-                </a:solidFill>
-                <a:latin typeface="Arial"/>
+              <a:spcAft>
+                <a:spcPts val="1000"/>
+              </a:spcAft>
+              <a:defRPr sz="2000" b="0" i="0">
+                <a:solidFill>
+                  <a:srgbClr val="333333"/>
+                </a:solidFill>
+                <a:latin typeface="Segoe UI"/>
               </a:defRPr>
             </a:pPr>
             <a:r>
@@ -6239,90 +6952,93 @@
           <a:bodyPr/>
           <a:lstStyle/>
           <a:p>
+            <a:pPr algn="l">
+              <a:defRPr sz="3600" b="1" i="0">
+                <a:solidFill>
+                  <a:srgbClr val="8B7355"/>
+                </a:solidFill>
+                <a:latin typeface="Segoe UI"/>
+              </a:defRPr>
+            </a:pPr>
+            <a:r>
+              <a:t>Contact</a:t>
+            </a:r>
+          </a:p>
+        </p:txBody>
+      </p:sp>
+      <p:sp>
+        <p:nvSpPr>
+          <p:cNvPr id="3" name="Subtitle 2"/>
+          <p:cNvSpPr>
+            <a:spLocks noGrp="1"/>
+          </p:cNvSpPr>
+          <p:nvPr>
+            <p:ph type="subTitle" idx="1"/>
+          </p:nvPr>
+        </p:nvSpPr>
+        <p:spPr/>
+        <p:txBody>
+          <a:bodyPr wrap="square"/>
+          <a:lstStyle/>
+          <a:p/>
+          <a:p>
             <a:pPr>
-              <a:defRPr b="1">
+              <a:spcAft>
+                <a:spcPts val="1200"/>
+              </a:spcAft>
+              <a:defRPr sz="2400" b="0" i="0">
                 <a:solidFill>
                   <a:srgbClr val="8B7355"/>
                 </a:solidFill>
-                <a:latin typeface="Arial"/>
-              </a:defRPr>
-            </a:pPr>
-            <a:r>
-              <a:t>Contact</a:t>
-            </a:r>
-          </a:p>
-        </p:txBody>
-      </p:sp>
-      <p:sp>
-        <p:nvSpPr>
-          <p:cNvPr id="3" name="Subtitle 2"/>
-          <p:cNvSpPr>
-            <a:spLocks noGrp="1"/>
-          </p:cNvSpPr>
-          <p:nvPr>
-            <p:ph type="subTitle" idx="1"/>
-          </p:nvPr>
-        </p:nvSpPr>
-        <p:spPr/>
-        <p:txBody>
-          <a:bodyPr/>
-          <a:lstStyle/>
+                <a:latin typeface="Segoe UI"/>
+              </a:defRPr>
+            </a:pPr>
+            <a:r>
+              <a:t>Let's build a secure future together.</a:t>
+            </a:r>
+          </a:p>
           <a:p>
             <a:pPr>
-              <a:defRPr sz="2400">
-                <a:solidFill>
-                  <a:srgbClr val="333333"/>
-                </a:solidFill>
-                <a:latin typeface="Arial"/>
-              </a:defRPr>
-            </a:pPr>
-            <a:r>
-              <a:t>Let's build a secure future together.</a:t>
+              <a:spcAft>
+                <a:spcPts val="1000"/>
+              </a:spcAft>
+              <a:defRPr sz="2000" b="0" i="0">
+                <a:solidFill>
+                  <a:srgbClr val="333333"/>
+                </a:solidFill>
+                <a:latin typeface="Segoe UI"/>
+              </a:defRPr>
+            </a:pPr>
+            <a:r>
+              <a:t>Ahmad Mostafavi, Soroush Safaei, Hossein Fotouhi</a:t>
             </a:r>
           </a:p>
           <a:p>
             <a:pPr>
-              <a:defRPr sz="2400">
-                <a:solidFill>
-                  <a:srgbClr val="333333"/>
-                </a:solidFill>
-                <a:latin typeface="Arial"/>
-              </a:defRPr>
-            </a:pPr>
+              <a:spcAft>
+                <a:spcPts val="1000"/>
+              </a:spcAft>
+              <a:defRPr sz="2000" b="0" i="0">
+                <a:solidFill>
+                  <a:srgbClr val="333333"/>
+                </a:solidFill>
+                <a:latin typeface="Segoe UI"/>
+              </a:defRPr>
+            </a:pPr>
+            <a:r>
+              <a:t>LambdaIDS</a:t>
+            </a:r>
           </a:p>
           <a:p>
             <a:pPr>
-              <a:defRPr sz="2400">
-                <a:solidFill>
-                  <a:srgbClr val="333333"/>
-                </a:solidFill>
-                <a:latin typeface="Arial"/>
-              </a:defRPr>
-            </a:pPr>
-            <a:r>
-              <a:t>Soroush Safaei, Ahmad Mostafavi, Hossein Fotouhi</a:t>
-            </a:r>
-          </a:p>
-          <a:p>
-            <a:pPr>
-              <a:defRPr sz="2400">
-                <a:solidFill>
-                  <a:srgbClr val="333333"/>
-                </a:solidFill>
-                <a:latin typeface="Arial"/>
-              </a:defRPr>
-            </a:pPr>
-            <a:r>
-              <a:t>LambdaIDS</a:t>
-            </a:r>
-          </a:p>
-          <a:p>
-            <a:pPr>
-              <a:defRPr sz="2400">
-                <a:solidFill>
-                  <a:srgbClr val="333333"/>
-                </a:solidFill>
-                <a:latin typeface="Arial"/>
+              <a:spcAft>
+                <a:spcPts val="1000"/>
+              </a:spcAft>
+              <a:defRPr sz="2000" b="0" i="0">
+                <a:solidFill>
+                  <a:srgbClr val="333333"/>
+                </a:solidFill>
+                <a:latin typeface="Segoe UI"/>
               </a:defRPr>
             </a:pPr>
             <a:r>
@@ -6804,12 +7520,12 @@
           <a:bodyPr/>
           <a:lstStyle/>
           <a:p>
-            <a:pPr>
-              <a:defRPr b="1">
+            <a:pPr algn="l">
+              <a:defRPr sz="3600" b="1" i="0">
                 <a:solidFill>
                   <a:srgbClr val="8B7355"/>
                 </a:solidFill>
-                <a:latin typeface="Arial"/>
+                <a:latin typeface="Segoe UI"/>
               </a:defRPr>
             </a:pPr>
             <a:r>
@@ -6830,71 +7546,71 @@
         </p:nvSpPr>
         <p:spPr/>
         <p:txBody>
-          <a:bodyPr/>
+          <a:bodyPr wrap="square"/>
           <a:lstStyle/>
           <a:p/>
           <a:p>
             <a:pPr>
               <a:spcAft>
-                <a:spcPts val="1400"/>
+                <a:spcPts val="1000"/>
               </a:spcAft>
-              <a:defRPr sz="2000">
-                <a:solidFill>
-                  <a:srgbClr val="333333"/>
-                </a:solidFill>
-                <a:latin typeface="Arial"/>
-              </a:defRPr>
-            </a:pPr>
-            <a:r>
-              <a:t>• Explosion of Attack Surface: 75 Billion IoT devices by 2025.</a:t>
+              <a:defRPr sz="2000" b="0" i="0">
+                <a:solidFill>
+                  <a:srgbClr val="333333"/>
+                </a:solidFill>
+                <a:latin typeface="Segoe UI"/>
+              </a:defRPr>
+            </a:pPr>
+            <a:r>
+              <a:t>Explosion of Attack Surface: 75 Billion IoT devices by 2025.</a:t>
             </a:r>
           </a:p>
           <a:p>
             <a:pPr>
               <a:spcAft>
-                <a:spcPts val="1400"/>
+                <a:spcPts val="1000"/>
               </a:spcAft>
-              <a:defRPr sz="2000">
-                <a:solidFill>
-                  <a:srgbClr val="333333"/>
-                </a:solidFill>
-                <a:latin typeface="Arial"/>
-              </a:defRPr>
-            </a:pPr>
-            <a:r>
-              <a:t>• Resource Constraints: Existing security tools (agents, firewalls) are too heavy for microcontrollers.</a:t>
+              <a:defRPr sz="2000" b="0" i="0">
+                <a:solidFill>
+                  <a:srgbClr val="333333"/>
+                </a:solidFill>
+                <a:latin typeface="Segoe UI"/>
+              </a:defRPr>
+            </a:pPr>
+            <a:r>
+              <a:t>Resource Constraints: Existing security tools (agents, firewalls) are too heavy for microcontrollers.</a:t>
             </a:r>
           </a:p>
           <a:p>
             <a:pPr>
               <a:spcAft>
-                <a:spcPts val="1400"/>
+                <a:spcPts val="1000"/>
               </a:spcAft>
-              <a:defRPr sz="2000">
-                <a:solidFill>
-                  <a:srgbClr val="333333"/>
-                </a:solidFill>
-                <a:latin typeface="Arial"/>
-              </a:defRPr>
-            </a:pPr>
-            <a:r>
-              <a:t>• The Result: 98% of IoT traffic is unencrypted or vulnerable.</a:t>
+              <a:defRPr sz="2000" b="0" i="0">
+                <a:solidFill>
+                  <a:srgbClr val="333333"/>
+                </a:solidFill>
+                <a:latin typeface="Segoe UI"/>
+              </a:defRPr>
+            </a:pPr>
+            <a:r>
+              <a:t>The Result: 98% of IoT traffic is unencrypted or vulnerable.</a:t>
             </a:r>
           </a:p>
           <a:p>
             <a:pPr>
               <a:spcAft>
-                <a:spcPts val="1400"/>
+                <a:spcPts val="1000"/>
               </a:spcAft>
-              <a:defRPr sz="2000">
-                <a:solidFill>
-                  <a:srgbClr val="333333"/>
-                </a:solidFill>
-                <a:latin typeface="Arial"/>
-              </a:defRPr>
-            </a:pPr>
-            <a:r>
-              <a:t>• Critical Risk: Ransomware in hospitals, grid shutdowns, industrial espionage.</a:t>
+              <a:defRPr sz="2000" b="0" i="0">
+                <a:solidFill>
+                  <a:srgbClr val="333333"/>
+                </a:solidFill>
+                <a:latin typeface="Segoe UI"/>
+              </a:defRPr>
+            </a:pPr>
+            <a:r>
+              <a:t>Critical Risk: Ransomware in hospitals, grid shutdowns, industrial espionage.</a:t>
             </a:r>
           </a:p>
         </p:txBody>
@@ -6940,12 +7656,12 @@
           <a:bodyPr/>
           <a:lstStyle/>
           <a:p>
-            <a:pPr>
-              <a:defRPr b="1">
+            <a:pPr algn="l">
+              <a:defRPr sz="3600" b="1" i="0">
                 <a:solidFill>
                   <a:srgbClr val="8B7355"/>
                 </a:solidFill>
-                <a:latin typeface="Arial"/>
+                <a:latin typeface="Segoe UI"/>
               </a:defRPr>
             </a:pPr>
             <a:r>
@@ -6966,71 +7682,71 @@
         </p:nvSpPr>
         <p:spPr/>
         <p:txBody>
-          <a:bodyPr/>
+          <a:bodyPr wrap="square"/>
           <a:lstStyle/>
           <a:p/>
           <a:p>
             <a:pPr>
               <a:spcAft>
-                <a:spcPts val="1400"/>
+                <a:spcPts val="1000"/>
               </a:spcAft>
-              <a:defRPr sz="2000">
-                <a:solidFill>
-                  <a:srgbClr val="333333"/>
-                </a:solidFill>
-                <a:latin typeface="Arial"/>
-              </a:defRPr>
-            </a:pPr>
-            <a:r>
-              <a:t>• Explosion of Attack Surface: 75 Billion IoT devices by 2025.</a:t>
+              <a:defRPr sz="2000" b="0" i="0">
+                <a:solidFill>
+                  <a:srgbClr val="333333"/>
+                </a:solidFill>
+                <a:latin typeface="Segoe UI"/>
+              </a:defRPr>
+            </a:pPr>
+            <a:r>
+              <a:t>Explosion of Attack Surface: 75 Billion IoT devices by 2025.</a:t>
             </a:r>
           </a:p>
           <a:p>
             <a:pPr>
               <a:spcAft>
-                <a:spcPts val="1400"/>
+                <a:spcPts val="1000"/>
               </a:spcAft>
-              <a:defRPr sz="2000">
-                <a:solidFill>
-                  <a:srgbClr val="333333"/>
-                </a:solidFill>
-                <a:latin typeface="Arial"/>
-              </a:defRPr>
-            </a:pPr>
-            <a:r>
-              <a:t>• Resource Constraints: Existing security tools (agents, firewalls) are too heavy for microcontrollers.</a:t>
+              <a:defRPr sz="2000" b="0" i="0">
+                <a:solidFill>
+                  <a:srgbClr val="333333"/>
+                </a:solidFill>
+                <a:latin typeface="Segoe UI"/>
+              </a:defRPr>
+            </a:pPr>
+            <a:r>
+              <a:t>Resource Constraints: Existing security tools (agents, firewalls) are too heavy for microcontrollers.</a:t>
             </a:r>
           </a:p>
           <a:p>
             <a:pPr>
               <a:spcAft>
-                <a:spcPts val="1400"/>
+                <a:spcPts val="1000"/>
               </a:spcAft>
-              <a:defRPr sz="2000">
-                <a:solidFill>
-                  <a:srgbClr val="333333"/>
-                </a:solidFill>
-                <a:latin typeface="Arial"/>
-              </a:defRPr>
-            </a:pPr>
-            <a:r>
-              <a:t>• The Result: 98% of IoT traffic is unencrypted or vulnerable.</a:t>
+              <a:defRPr sz="2000" b="0" i="0">
+                <a:solidFill>
+                  <a:srgbClr val="333333"/>
+                </a:solidFill>
+                <a:latin typeface="Segoe UI"/>
+              </a:defRPr>
+            </a:pPr>
+            <a:r>
+              <a:t>The Result: 98% of IoT traffic is unencrypted or vulnerable.</a:t>
             </a:r>
           </a:p>
           <a:p>
             <a:pPr>
               <a:spcAft>
-                <a:spcPts val="1400"/>
+                <a:spcPts val="1000"/>
               </a:spcAft>
-              <a:defRPr sz="2000">
-                <a:solidFill>
-                  <a:srgbClr val="333333"/>
-                </a:solidFill>
-                <a:latin typeface="Arial"/>
-              </a:defRPr>
-            </a:pPr>
-            <a:r>
-              <a:t>• Critical Risk: Ransomware in hospitals, grid shutdowns, industrial espionage.</a:t>
+              <a:defRPr sz="2000" b="0" i="0">
+                <a:solidFill>
+                  <a:srgbClr val="333333"/>
+                </a:solidFill>
+                <a:latin typeface="Segoe UI"/>
+              </a:defRPr>
+            </a:pPr>
+            <a:r>
+              <a:t>Critical Risk: Ransomware in hospitals, grid shutdowns, industrial espionage.</a:t>
             </a:r>
           </a:p>
         </p:txBody>
@@ -7076,12 +7792,12 @@
           <a:bodyPr/>
           <a:lstStyle/>
           <a:p>
-            <a:pPr>
-              <a:defRPr b="1">
+            <a:pPr algn="l">
+              <a:defRPr sz="3600" b="1" i="0">
                 <a:solidFill>
                   <a:srgbClr val="8B7355"/>
                 </a:solidFill>
-                <a:latin typeface="Arial"/>
+                <a:latin typeface="Segoe UI"/>
               </a:defRPr>
             </a:pPr>
             <a:r>
@@ -7102,71 +7818,71 @@
         </p:nvSpPr>
         <p:spPr/>
         <p:txBody>
-          <a:bodyPr/>
+          <a:bodyPr wrap="square"/>
           <a:lstStyle/>
           <a:p/>
           <a:p>
             <a:pPr>
               <a:spcAft>
-                <a:spcPts val="1400"/>
+                <a:spcPts val="1000"/>
               </a:spcAft>
-              <a:defRPr sz="2000">
-                <a:solidFill>
-                  <a:srgbClr val="333333"/>
-                </a:solidFill>
-                <a:latin typeface="Arial"/>
-              </a:defRPr>
-            </a:pPr>
-            <a:r>
-              <a:t>• EU Cyber Resilience Act (CRA): Mandatory cybersecurity for ALL connected products by 2025/2026.</a:t>
+              <a:defRPr sz="2000" b="0" i="0">
+                <a:solidFill>
+                  <a:srgbClr val="333333"/>
+                </a:solidFill>
+                <a:latin typeface="Segoe UI"/>
+              </a:defRPr>
+            </a:pPr>
+            <a:r>
+              <a:t>EU Cyber Resilience Act (CRA): Mandatory cybersecurity for ALL connected products by 2025/2026.</a:t>
             </a:r>
           </a:p>
           <a:p>
             <a:pPr>
               <a:spcAft>
-                <a:spcPts val="1400"/>
+                <a:spcPts val="1000"/>
               </a:spcAft>
-              <a:defRPr sz="2000">
-                <a:solidFill>
-                  <a:srgbClr val="333333"/>
-                </a:solidFill>
-                <a:latin typeface="Arial"/>
-              </a:defRPr>
-            </a:pPr>
-            <a:r>
-              <a:t>• IEC 62443: Moving from 'nice-to-have' to 'must-have' for industrial compliance.</a:t>
+              <a:defRPr sz="2000" b="0" i="0">
+                <a:solidFill>
+                  <a:srgbClr val="333333"/>
+                </a:solidFill>
+                <a:latin typeface="Segoe UI"/>
+              </a:defRPr>
+            </a:pPr>
+            <a:r>
+              <a:t>IEC 62443: Moving from 'nice-to-have' to 'must-have' for industrial compliance.</a:t>
             </a:r>
           </a:p>
           <a:p>
             <a:pPr>
               <a:spcAft>
-                <a:spcPts val="1400"/>
+                <a:spcPts val="1000"/>
               </a:spcAft>
-              <a:defRPr sz="2000">
-                <a:solidFill>
-                  <a:srgbClr val="333333"/>
-                </a:solidFill>
-                <a:latin typeface="Arial"/>
-              </a:defRPr>
-            </a:pPr>
-            <a:r>
-              <a:t>• The Market Gap: Manufacturers are entering a panic mode. They lack the expertise to build compliant security from scratch.</a:t>
+              <a:defRPr sz="2000" b="0" i="0">
+                <a:solidFill>
+                  <a:srgbClr val="333333"/>
+                </a:solidFill>
+                <a:latin typeface="Segoe UI"/>
+              </a:defRPr>
+            </a:pPr>
+            <a:r>
+              <a:t>The Market Gap: Manufacturers are entering a panic mode. They lack the expertise to build compliant security from scratch.</a:t>
             </a:r>
           </a:p>
           <a:p>
             <a:pPr>
               <a:spcAft>
-                <a:spcPts val="1400"/>
+                <a:spcPts val="1000"/>
               </a:spcAft>
-              <a:defRPr sz="2000">
-                <a:solidFill>
-                  <a:srgbClr val="333333"/>
-                </a:solidFill>
-                <a:latin typeface="Arial"/>
-              </a:defRPr>
-            </a:pPr>
-            <a:r>
-              <a:t>• Opportunity: Compliance is no longer optional—it is a license to operate.</a:t>
+              <a:defRPr sz="2000" b="0" i="0">
+                <a:solidFill>
+                  <a:srgbClr val="333333"/>
+                </a:solidFill>
+                <a:latin typeface="Segoe UI"/>
+              </a:defRPr>
+            </a:pPr>
+            <a:r>
+              <a:t>Opportunity: Compliance is no longer optional—it is a license to operate.</a:t>
             </a:r>
           </a:p>
         </p:txBody>
@@ -7212,12 +7928,12 @@
           <a:bodyPr/>
           <a:lstStyle/>
           <a:p>
-            <a:pPr>
-              <a:defRPr b="1">
+            <a:pPr algn="l">
+              <a:defRPr sz="3600" b="1" i="0">
                 <a:solidFill>
                   <a:srgbClr val="8B7355"/>
                 </a:solidFill>
-                <a:latin typeface="Arial"/>
+                <a:latin typeface="Segoe UI"/>
               </a:defRPr>
             </a:pPr>
             <a:r>
@@ -7238,71 +7954,71 @@
         </p:nvSpPr>
         <p:spPr/>
         <p:txBody>
-          <a:bodyPr/>
+          <a:bodyPr wrap="square"/>
           <a:lstStyle/>
           <a:p/>
           <a:p>
             <a:pPr>
               <a:spcAft>
-                <a:spcPts val="1400"/>
+                <a:spcPts val="1000"/>
               </a:spcAft>
-              <a:defRPr sz="2000">
-                <a:solidFill>
-                  <a:srgbClr val="333333"/>
-                </a:solidFill>
-                <a:latin typeface="Arial"/>
-              </a:defRPr>
-            </a:pPr>
-            <a:r>
-              <a:t>• EU Cyber Resilience Act (CRA): Mandatory cybersecurity for ALL connected products by 2025/2026.</a:t>
+              <a:defRPr sz="2000" b="0" i="0">
+                <a:solidFill>
+                  <a:srgbClr val="333333"/>
+                </a:solidFill>
+                <a:latin typeface="Segoe UI"/>
+              </a:defRPr>
+            </a:pPr>
+            <a:r>
+              <a:t>EU Cyber Resilience Act (CRA): Mandatory cybersecurity for ALL connected products by 2025/2026.</a:t>
             </a:r>
           </a:p>
           <a:p>
             <a:pPr>
               <a:spcAft>
-                <a:spcPts val="1400"/>
+                <a:spcPts val="1000"/>
               </a:spcAft>
-              <a:defRPr sz="2000">
-                <a:solidFill>
-                  <a:srgbClr val="333333"/>
-                </a:solidFill>
-                <a:latin typeface="Arial"/>
-              </a:defRPr>
-            </a:pPr>
-            <a:r>
-              <a:t>• IEC 62443: Moving from 'nice-to-have' to 'must-have' for industrial compliance.</a:t>
+              <a:defRPr sz="2000" b="0" i="0">
+                <a:solidFill>
+                  <a:srgbClr val="333333"/>
+                </a:solidFill>
+                <a:latin typeface="Segoe UI"/>
+              </a:defRPr>
+            </a:pPr>
+            <a:r>
+              <a:t>IEC 62443: Moving from 'nice-to-have' to 'must-have' for industrial compliance.</a:t>
             </a:r>
           </a:p>
           <a:p>
             <a:pPr>
               <a:spcAft>
-                <a:spcPts val="1400"/>
+                <a:spcPts val="1000"/>
               </a:spcAft>
-              <a:defRPr sz="2000">
-                <a:solidFill>
-                  <a:srgbClr val="333333"/>
-                </a:solidFill>
-                <a:latin typeface="Arial"/>
-              </a:defRPr>
-            </a:pPr>
-            <a:r>
-              <a:t>• The Market Gap: Manufacturers are entering a panic mode. They lack the expertise to build compliant security from scratch.</a:t>
+              <a:defRPr sz="2000" b="0" i="0">
+                <a:solidFill>
+                  <a:srgbClr val="333333"/>
+                </a:solidFill>
+                <a:latin typeface="Segoe UI"/>
+              </a:defRPr>
+            </a:pPr>
+            <a:r>
+              <a:t>The Market Gap: Manufacturers are entering a panic mode. They lack the expertise to build compliant security from scratch.</a:t>
             </a:r>
           </a:p>
           <a:p>
             <a:pPr>
               <a:spcAft>
-                <a:spcPts val="1400"/>
+                <a:spcPts val="1000"/>
               </a:spcAft>
-              <a:defRPr sz="2000">
-                <a:solidFill>
-                  <a:srgbClr val="333333"/>
-                </a:solidFill>
-                <a:latin typeface="Arial"/>
-              </a:defRPr>
-            </a:pPr>
-            <a:r>
-              <a:t>• Opportunity: Compliance is no longer optional—it is a license to operate.</a:t>
+              <a:defRPr sz="2000" b="0" i="0">
+                <a:solidFill>
+                  <a:srgbClr val="333333"/>
+                </a:solidFill>
+                <a:latin typeface="Segoe UI"/>
+              </a:defRPr>
+            </a:pPr>
+            <a:r>
+              <a:t>Opportunity: Compliance is no longer optional—it is a license to operate.</a:t>
             </a:r>
           </a:p>
         </p:txBody>
@@ -7348,12 +8064,12 @@
           <a:bodyPr/>
           <a:lstStyle/>
           <a:p>
-            <a:pPr>
-              <a:defRPr b="1">
+            <a:pPr algn="l">
+              <a:defRPr sz="3600" b="1" i="0">
                 <a:solidFill>
                   <a:srgbClr val="8B7355"/>
                 </a:solidFill>
-                <a:latin typeface="Arial"/>
+                <a:latin typeface="Segoe UI"/>
               </a:defRPr>
             </a:pPr>
             <a:r>
@@ -7374,71 +8090,71 @@
         </p:nvSpPr>
         <p:spPr/>
         <p:txBody>
-          <a:bodyPr/>
+          <a:bodyPr wrap="square"/>
           <a:lstStyle/>
           <a:p/>
           <a:p>
             <a:pPr>
               <a:spcAft>
-                <a:spcPts val="1400"/>
+                <a:spcPts val="1000"/>
               </a:spcAft>
-              <a:defRPr sz="2000">
-                <a:solidFill>
-                  <a:srgbClr val="333333"/>
-                </a:solidFill>
-                <a:latin typeface="Arial"/>
-              </a:defRPr>
-            </a:pPr>
-            <a:r>
-              <a:t>• Autonomous On-Device Security: An AI agent that lives ON the microcontroller.</a:t>
+              <a:defRPr sz="2000" b="0" i="0">
+                <a:solidFill>
+                  <a:srgbClr val="333333"/>
+                </a:solidFill>
+                <a:latin typeface="Segoe UI"/>
+              </a:defRPr>
+            </a:pPr>
+            <a:r>
+              <a:t>Autonomous On-Device Security: An AI agent that lives ON the microcontroller.</a:t>
             </a:r>
           </a:p>
           <a:p>
             <a:pPr>
               <a:spcAft>
-                <a:spcPts val="1400"/>
+                <a:spcPts val="1000"/>
               </a:spcAft>
-              <a:defRPr sz="2000">
-                <a:solidFill>
-                  <a:srgbClr val="333333"/>
-                </a:solidFill>
-                <a:latin typeface="Arial"/>
-              </a:defRPr>
-            </a:pPr>
-            <a:r>
-              <a:t>• Real-time Anomaly Detection: Detects zero-day attacks instantly without cloud latency.</a:t>
+              <a:defRPr sz="2000" b="0" i="0">
+                <a:solidFill>
+                  <a:srgbClr val="333333"/>
+                </a:solidFill>
+                <a:latin typeface="Segoe UI"/>
+              </a:defRPr>
+            </a:pPr>
+            <a:r>
+              <a:t>Real-time Anomaly Detection: Detects zero-day attacks instantly without cloud latency.</a:t>
             </a:r>
           </a:p>
           <a:p>
             <a:pPr>
               <a:spcAft>
-                <a:spcPts val="1400"/>
+                <a:spcPts val="1000"/>
               </a:spcAft>
-              <a:defRPr sz="2000">
-                <a:solidFill>
-                  <a:srgbClr val="333333"/>
-                </a:solidFill>
-                <a:latin typeface="Arial"/>
-              </a:defRPr>
-            </a:pPr>
-            <a:r>
-              <a:t>• Ultra-Lightweight: Runs on &lt;100KB RAM. Consumes negligible battery.</a:t>
+              <a:defRPr sz="2000" b="0" i="0">
+                <a:solidFill>
+                  <a:srgbClr val="333333"/>
+                </a:solidFill>
+                <a:latin typeface="Segoe UI"/>
+              </a:defRPr>
+            </a:pPr>
+            <a:r>
+              <a:t>Ultra-Lightweight: Runs on &lt;100KB RAM. Consumes negligible battery.</a:t>
             </a:r>
           </a:p>
           <a:p>
             <a:pPr>
               <a:spcAft>
-                <a:spcPts val="1400"/>
+                <a:spcPts val="1000"/>
               </a:spcAft>
-              <a:defRPr sz="2000">
-                <a:solidFill>
-                  <a:srgbClr val="333333"/>
-                </a:solidFill>
-                <a:latin typeface="Arial"/>
-              </a:defRPr>
-            </a:pPr>
-            <a:r>
-              <a:t>• Compliance-Ready: Built to satisfy IEC 62443 and CRA requirements out of the box.</a:t>
+              <a:defRPr sz="2000" b="0" i="0">
+                <a:solidFill>
+                  <a:srgbClr val="333333"/>
+                </a:solidFill>
+                <a:latin typeface="Segoe UI"/>
+              </a:defRPr>
+            </a:pPr>
+            <a:r>
+              <a:t>Compliance-Ready: Built to satisfy IEC 62443 and CRA requirements out of the box.</a:t>
             </a:r>
           </a:p>
         </p:txBody>
@@ -7484,12 +8200,12 @@
           <a:bodyPr/>
           <a:lstStyle/>
           <a:p>
-            <a:pPr>
-              <a:defRPr b="1">
+            <a:pPr algn="l">
+              <a:defRPr sz="3600" b="1" i="0">
                 <a:solidFill>
                   <a:srgbClr val="8B7355"/>
                 </a:solidFill>
-                <a:latin typeface="Arial"/>
+                <a:latin typeface="Segoe UI"/>
               </a:defRPr>
             </a:pPr>
             <a:r>
@@ -7510,71 +8226,71 @@
         </p:nvSpPr>
         <p:spPr/>
         <p:txBody>
-          <a:bodyPr/>
+          <a:bodyPr wrap="square"/>
           <a:lstStyle/>
           <a:p/>
           <a:p>
             <a:pPr>
               <a:spcAft>
-                <a:spcPts val="1400"/>
+                <a:spcPts val="1000"/>
               </a:spcAft>
-              <a:defRPr sz="2000">
-                <a:solidFill>
-                  <a:srgbClr val="333333"/>
-                </a:solidFill>
-                <a:latin typeface="Arial"/>
-              </a:defRPr>
-            </a:pPr>
-            <a:r>
-              <a:t>• Autonomous On-Device Security: An AI agent that lives ON the microcontroller.</a:t>
+              <a:defRPr sz="2000" b="0" i="0">
+                <a:solidFill>
+                  <a:srgbClr val="333333"/>
+                </a:solidFill>
+                <a:latin typeface="Segoe UI"/>
+              </a:defRPr>
+            </a:pPr>
+            <a:r>
+              <a:t>Autonomous On-Device Security: An AI agent that lives ON the microcontroller.</a:t>
             </a:r>
           </a:p>
           <a:p>
             <a:pPr>
               <a:spcAft>
-                <a:spcPts val="1400"/>
+                <a:spcPts val="1000"/>
               </a:spcAft>
-              <a:defRPr sz="2000">
-                <a:solidFill>
-                  <a:srgbClr val="333333"/>
-                </a:solidFill>
-                <a:latin typeface="Arial"/>
-              </a:defRPr>
-            </a:pPr>
-            <a:r>
-              <a:t>• Real-time Anomaly Detection: Detects zero-day attacks instantly without cloud latency.</a:t>
+              <a:defRPr sz="2000" b="0" i="0">
+                <a:solidFill>
+                  <a:srgbClr val="333333"/>
+                </a:solidFill>
+                <a:latin typeface="Segoe UI"/>
+              </a:defRPr>
+            </a:pPr>
+            <a:r>
+              <a:t>Real-time Anomaly Detection: Detects zero-day attacks instantly without cloud latency.</a:t>
             </a:r>
           </a:p>
           <a:p>
             <a:pPr>
               <a:spcAft>
-                <a:spcPts val="1400"/>
+                <a:spcPts val="1000"/>
               </a:spcAft>
-              <a:defRPr sz="2000">
-                <a:solidFill>
-                  <a:srgbClr val="333333"/>
-                </a:solidFill>
-                <a:latin typeface="Arial"/>
-              </a:defRPr>
-            </a:pPr>
-            <a:r>
-              <a:t>• Ultra-Lightweight: Runs on &lt;100KB RAM. Consumes negligible battery.</a:t>
+              <a:defRPr sz="2000" b="0" i="0">
+                <a:solidFill>
+                  <a:srgbClr val="333333"/>
+                </a:solidFill>
+                <a:latin typeface="Segoe UI"/>
+              </a:defRPr>
+            </a:pPr>
+            <a:r>
+              <a:t>Ultra-Lightweight: Runs on &lt;100KB RAM. Consumes negligible battery.</a:t>
             </a:r>
           </a:p>
           <a:p>
             <a:pPr>
               <a:spcAft>
-                <a:spcPts val="1400"/>
+                <a:spcPts val="1000"/>
               </a:spcAft>
-              <a:defRPr sz="2000">
-                <a:solidFill>
-                  <a:srgbClr val="333333"/>
-                </a:solidFill>
-                <a:latin typeface="Arial"/>
-              </a:defRPr>
-            </a:pPr>
-            <a:r>
-              <a:t>• Compliance-Ready: Built to satisfy IEC 62443 and CRA requirements out of the box.</a:t>
+              <a:defRPr sz="2000" b="0" i="0">
+                <a:solidFill>
+                  <a:srgbClr val="333333"/>
+                </a:solidFill>
+                <a:latin typeface="Segoe UI"/>
+              </a:defRPr>
+            </a:pPr>
+            <a:r>
+              <a:t>Compliance-Ready: Built to satisfy IEC 62443 and CRA requirements out of the box.</a:t>
             </a:r>
           </a:p>
         </p:txBody>
@@ -7620,12 +8336,12 @@
           <a:bodyPr/>
           <a:lstStyle/>
           <a:p>
-            <a:pPr>
-              <a:defRPr b="1">
+            <a:pPr algn="l">
+              <a:defRPr sz="3600" b="1" i="0">
                 <a:solidFill>
                   <a:srgbClr val="8B7355"/>
                 </a:solidFill>
-                <a:latin typeface="Arial"/>
+                <a:latin typeface="Segoe UI"/>
               </a:defRPr>
             </a:pPr>
             <a:r>
@@ -7646,55 +8362,55 @@
         </p:nvSpPr>
         <p:spPr/>
         <p:txBody>
-          <a:bodyPr/>
+          <a:bodyPr wrap="square"/>
           <a:lstStyle/>
           <a:p/>
           <a:p>
             <a:pPr>
               <a:spcAft>
-                <a:spcPts val="1400"/>
+                <a:spcPts val="1000"/>
               </a:spcAft>
-              <a:defRPr sz="2000">
-                <a:solidFill>
-                  <a:srgbClr val="333333"/>
-                </a:solidFill>
-                <a:latin typeface="Arial"/>
-              </a:defRPr>
-            </a:pPr>
-            <a:r>
-              <a:t>• Traditional (Cloud): High latency, privacy risks, high data cost, fails offline.</a:t>
+              <a:defRPr sz="2000" b="0" i="0">
+                <a:solidFill>
+                  <a:srgbClr val="333333"/>
+                </a:solidFill>
+                <a:latin typeface="Segoe UI"/>
+              </a:defRPr>
+            </a:pPr>
+            <a:r>
+              <a:t>Traditional (Cloud): High latency, privacy risks, high data cost, fails offline.</a:t>
             </a:r>
           </a:p>
           <a:p>
             <a:pPr>
               <a:spcAft>
-                <a:spcPts val="1400"/>
+                <a:spcPts val="1000"/>
               </a:spcAft>
-              <a:defRPr sz="2000">
-                <a:solidFill>
-                  <a:srgbClr val="333333"/>
-                </a:solidFill>
-                <a:latin typeface="Arial"/>
-              </a:defRPr>
-            </a:pPr>
-            <a:r>
-              <a:t>• LambdaIDS (Edge): Zero latency, privacy-preserving, works offline, 100x more energy efficient.</a:t>
+              <a:defRPr sz="2000" b="0" i="0">
+                <a:solidFill>
+                  <a:srgbClr val="333333"/>
+                </a:solidFill>
+                <a:latin typeface="Segoe UI"/>
+              </a:defRPr>
+            </a:pPr>
+            <a:r>
+              <a:t>LambdaIDS (Edge): Zero latency, privacy-preserving, works offline, 100x more energy efficient.</a:t>
             </a:r>
           </a:p>
           <a:p>
             <a:pPr>
               <a:spcAft>
-                <a:spcPts val="1400"/>
+                <a:spcPts val="1000"/>
               </a:spcAft>
-              <a:defRPr sz="2000">
-                <a:solidFill>
-                  <a:srgbClr val="333333"/>
-                </a:solidFill>
-                <a:latin typeface="Arial"/>
-              </a:defRPr>
-            </a:pPr>
-            <a:r>
-              <a:t>• Tech Stack: Proprietary TinyML algorithms optimized for ARM Cortex-M and RISC-V.</a:t>
+              <a:defRPr sz="2000" b="0" i="0">
+                <a:solidFill>
+                  <a:srgbClr val="333333"/>
+                </a:solidFill>
+                <a:latin typeface="Segoe UI"/>
+              </a:defRPr>
+            </a:pPr>
+            <a:r>
+              <a:t>Tech Stack: Proprietary TinyML algorithms optimized for ARM Cortex-M and RISC-V.</a:t>
             </a:r>
           </a:p>
         </p:txBody>
@@ -7740,12 +8456,12 @@
           <a:bodyPr/>
           <a:lstStyle/>
           <a:p>
-            <a:pPr>
-              <a:defRPr b="1">
+            <a:pPr algn="l">
+              <a:defRPr sz="3600" b="1" i="0">
                 <a:solidFill>
                   <a:srgbClr val="8B7355"/>
                 </a:solidFill>
-                <a:latin typeface="Arial"/>
+                <a:latin typeface="Segoe UI"/>
               </a:defRPr>
             </a:pPr>
             <a:r>
@@ -7766,55 +8482,55 @@
         </p:nvSpPr>
         <p:spPr/>
         <p:txBody>
-          <a:bodyPr/>
+          <a:bodyPr wrap="square"/>
           <a:lstStyle/>
           <a:p/>
           <a:p>
             <a:pPr>
               <a:spcAft>
-                <a:spcPts val="1400"/>
+                <a:spcPts val="1000"/>
               </a:spcAft>
-              <a:defRPr sz="2000">
-                <a:solidFill>
-                  <a:srgbClr val="333333"/>
-                </a:solidFill>
-                <a:latin typeface="Arial"/>
-              </a:defRPr>
-            </a:pPr>
-            <a:r>
-              <a:t>• Traditional (Cloud): High latency, privacy risks, high data cost, fails offline.</a:t>
+              <a:defRPr sz="2000" b="0" i="0">
+                <a:solidFill>
+                  <a:srgbClr val="333333"/>
+                </a:solidFill>
+                <a:latin typeface="Segoe UI"/>
+              </a:defRPr>
+            </a:pPr>
+            <a:r>
+              <a:t>Traditional (Cloud): High latency, privacy risks, high data cost, fails offline.</a:t>
             </a:r>
           </a:p>
           <a:p>
             <a:pPr>
               <a:spcAft>
-                <a:spcPts val="1400"/>
+                <a:spcPts val="1000"/>
               </a:spcAft>
-              <a:defRPr sz="2000">
-                <a:solidFill>
-                  <a:srgbClr val="333333"/>
-                </a:solidFill>
-                <a:latin typeface="Arial"/>
-              </a:defRPr>
-            </a:pPr>
-            <a:r>
-              <a:t>• LambdaIDS (Edge): Zero latency, privacy-preserving, works offline, 100x more energy efficient.</a:t>
+              <a:defRPr sz="2000" b="0" i="0">
+                <a:solidFill>
+                  <a:srgbClr val="333333"/>
+                </a:solidFill>
+                <a:latin typeface="Segoe UI"/>
+              </a:defRPr>
+            </a:pPr>
+            <a:r>
+              <a:t>LambdaIDS (Edge): Zero latency, privacy-preserving, works offline, 100x more energy efficient.</a:t>
             </a:r>
           </a:p>
           <a:p>
             <a:pPr>
               <a:spcAft>
-                <a:spcPts val="1400"/>
+                <a:spcPts val="1000"/>
               </a:spcAft>
-              <a:defRPr sz="2000">
-                <a:solidFill>
-                  <a:srgbClr val="333333"/>
-                </a:solidFill>
-                <a:latin typeface="Arial"/>
-              </a:defRPr>
-            </a:pPr>
-            <a:r>
-              <a:t>• Tech Stack: Proprietary TinyML algorithms optimized for ARM Cortex-M and RISC-V.</a:t>
+              <a:defRPr sz="2000" b="0" i="0">
+                <a:solidFill>
+                  <a:srgbClr val="333333"/>
+                </a:solidFill>
+                <a:latin typeface="Segoe UI"/>
+              </a:defRPr>
+            </a:pPr>
+            <a:r>
+              <a:t>Tech Stack: Proprietary TinyML algorithms optimized for ARM Cortex-M and RISC-V.</a:t>
             </a:r>
           </a:p>
         </p:txBody>
@@ -7860,12 +8576,12 @@
           <a:bodyPr/>
           <a:lstStyle/>
           <a:p>
-            <a:pPr>
-              <a:defRPr b="1">
+            <a:pPr algn="l">
+              <a:defRPr sz="3600" b="1" i="0">
                 <a:solidFill>
                   <a:srgbClr val="8B7355"/>
                 </a:solidFill>
-                <a:latin typeface="Arial"/>
+                <a:latin typeface="Segoe UI"/>
               </a:defRPr>
             </a:pPr>
             <a:r>
@@ -7886,71 +8602,71 @@
         </p:nvSpPr>
         <p:spPr/>
         <p:txBody>
-          <a:bodyPr/>
+          <a:bodyPr wrap="square"/>
           <a:lstStyle/>
           <a:p/>
           <a:p>
             <a:pPr>
               <a:spcAft>
-                <a:spcPts val="1400"/>
+                <a:spcPts val="1000"/>
               </a:spcAft>
-              <a:defRPr sz="2000">
-                <a:solidFill>
-                  <a:srgbClr val="333333"/>
-                </a:solidFill>
-                <a:latin typeface="Arial"/>
-              </a:defRPr>
-            </a:pPr>
-            <a:r>
-              <a:t>• Total Addressable Market (TAM): $30B+ IoT Security Market (growing 25% YoY).</a:t>
+              <a:defRPr sz="2000" b="0" i="0">
+                <a:solidFill>
+                  <a:srgbClr val="333333"/>
+                </a:solidFill>
+                <a:latin typeface="Segoe UI"/>
+              </a:defRPr>
+            </a:pPr>
+            <a:r>
+              <a:t>Total Addressable Market (TAM): $30B+ IoT Security Market (growing 25% YoY).</a:t>
             </a:r>
           </a:p>
           <a:p>
             <a:pPr>
               <a:spcAft>
-                <a:spcPts val="1400"/>
+                <a:spcPts val="1000"/>
               </a:spcAft>
-              <a:defRPr sz="2000">
-                <a:solidFill>
-                  <a:srgbClr val="333333"/>
-                </a:solidFill>
-                <a:latin typeface="Arial"/>
-              </a:defRPr>
-            </a:pPr>
-            <a:r>
-              <a:t>• Serviceable Available Market (SAM): $4B Industrial &amp; Utility IoT Security.</a:t>
+              <a:defRPr sz="2000" b="0" i="0">
+                <a:solidFill>
+                  <a:srgbClr val="333333"/>
+                </a:solidFill>
+                <a:latin typeface="Segoe UI"/>
+              </a:defRPr>
+            </a:pPr>
+            <a:r>
+              <a:t>Serviceable Available Market (SAM): $4B Industrial &amp; Utility IoT Security.</a:t>
             </a:r>
           </a:p>
           <a:p>
             <a:pPr>
               <a:spcAft>
-                <a:spcPts val="1400"/>
+                <a:spcPts val="1000"/>
               </a:spcAft>
-              <a:defRPr sz="2000">
-                <a:solidFill>
-                  <a:srgbClr val="333333"/>
-                </a:solidFill>
-                <a:latin typeface="Arial"/>
-              </a:defRPr>
-            </a:pPr>
-            <a:r>
-              <a:t>• Serviceable Obtainable Market (SOM): $100M (Nordic + MENA Critical Infrastructure).</a:t>
+              <a:defRPr sz="2000" b="0" i="0">
+                <a:solidFill>
+                  <a:srgbClr val="333333"/>
+                </a:solidFill>
+                <a:latin typeface="Segoe UI"/>
+              </a:defRPr>
+            </a:pPr>
+            <a:r>
+              <a:t>Serviceable Obtainable Market (SOM): $100M (Nordic + MENA Critical Infrastructure).</a:t>
             </a:r>
           </a:p>
           <a:p>
             <a:pPr>
               <a:spcAft>
-                <a:spcPts val="1400"/>
+                <a:spcPts val="1000"/>
               </a:spcAft>
-              <a:defRPr sz="2000">
-                <a:solidFill>
-                  <a:srgbClr val="333333"/>
-                </a:solidFill>
-                <a:latin typeface="Arial"/>
-              </a:defRPr>
-            </a:pPr>
-            <a:r>
-              <a:t>• Target Segments: Industrial Automation (IIoT), Smart Energy, Automotive.</a:t>
+              <a:defRPr sz="2000" b="0" i="0">
+                <a:solidFill>
+                  <a:srgbClr val="333333"/>
+                </a:solidFill>
+                <a:latin typeface="Segoe UI"/>
+              </a:defRPr>
+            </a:pPr>
+            <a:r>
+              <a:t>Target Segments: Industrial Automation (IIoT), Smart Energy, Automotive.</a:t>
             </a:r>
           </a:p>
         </p:txBody>
@@ -7996,12 +8712,12 @@
           <a:bodyPr/>
           <a:lstStyle/>
           <a:p>
-            <a:pPr>
-              <a:defRPr b="1">
+            <a:pPr algn="l">
+              <a:defRPr sz="3600" b="1" i="0">
                 <a:solidFill>
                   <a:srgbClr val="8B7355"/>
                 </a:solidFill>
-                <a:latin typeface="Arial"/>
+                <a:latin typeface="Segoe UI"/>
               </a:defRPr>
             </a:pPr>
             <a:r>
@@ -8022,71 +8738,71 @@
         </p:nvSpPr>
         <p:spPr/>
         <p:txBody>
-          <a:bodyPr/>
+          <a:bodyPr wrap="square"/>
           <a:lstStyle/>
           <a:p/>
           <a:p>
             <a:pPr>
               <a:spcAft>
-                <a:spcPts val="1400"/>
+                <a:spcPts val="1000"/>
               </a:spcAft>
-              <a:defRPr sz="2000">
-                <a:solidFill>
-                  <a:srgbClr val="333333"/>
-                </a:solidFill>
-                <a:latin typeface="Arial"/>
-              </a:defRPr>
-            </a:pPr>
-            <a:r>
-              <a:t>• Total Addressable Market (TAM): $30B+ IoT Security Market (growing 25% YoY).</a:t>
+              <a:defRPr sz="2000" b="0" i="0">
+                <a:solidFill>
+                  <a:srgbClr val="333333"/>
+                </a:solidFill>
+                <a:latin typeface="Segoe UI"/>
+              </a:defRPr>
+            </a:pPr>
+            <a:r>
+              <a:t>Total Addressable Market (TAM): $30B+ IoT Security Market (growing 25% YoY).</a:t>
             </a:r>
           </a:p>
           <a:p>
             <a:pPr>
               <a:spcAft>
-                <a:spcPts val="1400"/>
+                <a:spcPts val="1000"/>
               </a:spcAft>
-              <a:defRPr sz="2000">
-                <a:solidFill>
-                  <a:srgbClr val="333333"/>
-                </a:solidFill>
-                <a:latin typeface="Arial"/>
-              </a:defRPr>
-            </a:pPr>
-            <a:r>
-              <a:t>• Serviceable Available Market (SAM): $4B Industrial &amp; Utility IoT Security.</a:t>
+              <a:defRPr sz="2000" b="0" i="0">
+                <a:solidFill>
+                  <a:srgbClr val="333333"/>
+                </a:solidFill>
+                <a:latin typeface="Segoe UI"/>
+              </a:defRPr>
+            </a:pPr>
+            <a:r>
+              <a:t>Serviceable Available Market (SAM): $4B Industrial &amp; Utility IoT Security.</a:t>
             </a:r>
           </a:p>
           <a:p>
             <a:pPr>
               <a:spcAft>
-                <a:spcPts val="1400"/>
+                <a:spcPts val="1000"/>
               </a:spcAft>
-              <a:defRPr sz="2000">
-                <a:solidFill>
-                  <a:srgbClr val="333333"/>
-                </a:solidFill>
-                <a:latin typeface="Arial"/>
-              </a:defRPr>
-            </a:pPr>
-            <a:r>
-              <a:t>• Serviceable Obtainable Market (SOM): $100M (Nordic + MENA Critical Infrastructure).</a:t>
+              <a:defRPr sz="2000" b="0" i="0">
+                <a:solidFill>
+                  <a:srgbClr val="333333"/>
+                </a:solidFill>
+                <a:latin typeface="Segoe UI"/>
+              </a:defRPr>
+            </a:pPr>
+            <a:r>
+              <a:t>Serviceable Obtainable Market (SOM): $100M (Nordic + MENA Critical Infrastructure).</a:t>
             </a:r>
           </a:p>
           <a:p>
             <a:pPr>
               <a:spcAft>
-                <a:spcPts val="1400"/>
+                <a:spcPts val="1000"/>
               </a:spcAft>
-              <a:defRPr sz="2000">
-                <a:solidFill>
-                  <a:srgbClr val="333333"/>
-                </a:solidFill>
-                <a:latin typeface="Arial"/>
-              </a:defRPr>
-            </a:pPr>
-            <a:r>
-              <a:t>• Target Segments: Industrial Automation (IIoT), Smart Energy, Automotive.</a:t>
+              <a:defRPr sz="2000" b="0" i="0">
+                <a:solidFill>
+                  <a:srgbClr val="333333"/>
+                </a:solidFill>
+                <a:latin typeface="Segoe UI"/>
+              </a:defRPr>
+            </a:pPr>
+            <a:r>
+              <a:t>Target Segments: Industrial Automation (IIoT), Smart Energy, Automotive.</a:t>
             </a:r>
           </a:p>
         </p:txBody>
@@ -8132,12 +8848,12 @@
           <a:bodyPr/>
           <a:lstStyle/>
           <a:p>
-            <a:pPr>
-              <a:defRPr b="1">
+            <a:pPr algn="l">
+              <a:defRPr sz="3600" b="1" i="0">
                 <a:solidFill>
                   <a:srgbClr val="8B7355"/>
                 </a:solidFill>
-                <a:latin typeface="Arial"/>
+                <a:latin typeface="Segoe UI"/>
               </a:defRPr>
             </a:pPr>
             <a:r>
@@ -8158,71 +8874,71 @@
         </p:nvSpPr>
         <p:spPr/>
         <p:txBody>
-          <a:bodyPr/>
+          <a:bodyPr wrap="square"/>
           <a:lstStyle/>
           <a:p/>
           <a:p>
             <a:pPr>
               <a:spcAft>
-                <a:spcPts val="1400"/>
+                <a:spcPts val="1000"/>
               </a:spcAft>
-              <a:defRPr sz="2000">
-                <a:solidFill>
-                  <a:srgbClr val="333333"/>
-                </a:solidFill>
-                <a:latin typeface="Arial"/>
-              </a:defRPr>
-            </a:pPr>
-            <a:r>
-              <a:t>• B2B Licensing &amp; SDK: Per-device license fee for OEMs.</a:t>
+              <a:defRPr sz="2000" b="0" i="0">
+                <a:solidFill>
+                  <a:srgbClr val="333333"/>
+                </a:solidFill>
+                <a:latin typeface="Segoe UI"/>
+              </a:defRPr>
+            </a:pPr>
+            <a:r>
+              <a:t>B2B Licensing &amp; SDK: Per-device license fee for OEMs.</a:t>
             </a:r>
           </a:p>
           <a:p>
             <a:pPr>
               <a:spcAft>
-                <a:spcPts val="1400"/>
+                <a:spcPts val="1000"/>
               </a:spcAft>
-              <a:defRPr sz="2000">
-                <a:solidFill>
-                  <a:srgbClr val="333333"/>
-                </a:solidFill>
-                <a:latin typeface="Arial"/>
-              </a:defRPr>
-            </a:pPr>
-            <a:r>
-              <a:t>• Tiered Subscription: Basic (Detection) vs. Pro (Prevention + Fleet Analytics).</a:t>
+              <a:defRPr sz="2000" b="0" i="0">
+                <a:solidFill>
+                  <a:srgbClr val="333333"/>
+                </a:solidFill>
+                <a:latin typeface="Segoe UI"/>
+              </a:defRPr>
+            </a:pPr>
+            <a:r>
+              <a:t>Tiered Subscription: Basic (Detection) vs. Pro (Prevention + Fleet Analytics).</a:t>
             </a:r>
           </a:p>
           <a:p>
             <a:pPr>
               <a:spcAft>
-                <a:spcPts val="1400"/>
+                <a:spcPts val="1000"/>
               </a:spcAft>
-              <a:defRPr sz="2000">
-                <a:solidFill>
-                  <a:srgbClr val="333333"/>
-                </a:solidFill>
-                <a:latin typeface="Arial"/>
-              </a:defRPr>
-            </a:pPr>
-            <a:r>
-              <a:t>• Pilot Strategy: Paid pilots with Tier 1 manufacturers to validate and customize.</a:t>
+              <a:defRPr sz="2000" b="0" i="0">
+                <a:solidFill>
+                  <a:srgbClr val="333333"/>
+                </a:solidFill>
+                <a:latin typeface="Segoe UI"/>
+              </a:defRPr>
+            </a:pPr>
+            <a:r>
+              <a:t>Pilot Strategy: Paid pilots with Tier 1 manufacturers to validate and customize.</a:t>
             </a:r>
           </a:p>
           <a:p>
             <a:pPr>
               <a:spcAft>
-                <a:spcPts val="1400"/>
+                <a:spcPts val="1000"/>
               </a:spcAft>
-              <a:defRPr sz="2000">
-                <a:solidFill>
-                  <a:srgbClr val="333333"/>
-                </a:solidFill>
-                <a:latin typeface="Arial"/>
-              </a:defRPr>
-            </a:pPr>
-            <a:r>
-              <a:t>• Scalability: High-margin software model (80%+ gross margin at scale).</a:t>
+              <a:defRPr sz="2000" b="0" i="0">
+                <a:solidFill>
+                  <a:srgbClr val="333333"/>
+                </a:solidFill>
+                <a:latin typeface="Segoe UI"/>
+              </a:defRPr>
+            </a:pPr>
+            <a:r>
+              <a:t>Scalability: High-margin software model (80%+ gross margin at scale).</a:t>
             </a:r>
           </a:p>
         </p:txBody>
@@ -8268,12 +8984,12 @@
           <a:bodyPr/>
           <a:lstStyle/>
           <a:p>
-            <a:pPr>
-              <a:defRPr b="1">
+            <a:pPr algn="l">
+              <a:defRPr sz="3600" b="1" i="0">
                 <a:solidFill>
                   <a:srgbClr val="8B7355"/>
                 </a:solidFill>
-                <a:latin typeface="Arial"/>
+                <a:latin typeface="Segoe UI"/>
               </a:defRPr>
             </a:pPr>
             <a:r>
@@ -8294,71 +9010,71 @@
         </p:nvSpPr>
         <p:spPr/>
         <p:txBody>
-          <a:bodyPr/>
+          <a:bodyPr wrap="square"/>
           <a:lstStyle/>
           <a:p/>
           <a:p>
             <a:pPr>
               <a:spcAft>
-                <a:spcPts val="1400"/>
+                <a:spcPts val="1000"/>
               </a:spcAft>
-              <a:defRPr sz="2000">
-                <a:solidFill>
-                  <a:srgbClr val="333333"/>
-                </a:solidFill>
-                <a:latin typeface="Arial"/>
-              </a:defRPr>
-            </a:pPr>
-            <a:r>
-              <a:t>• B2B Licensing &amp; SDK: Per-device license fee for OEMs.</a:t>
+              <a:defRPr sz="2000" b="0" i="0">
+                <a:solidFill>
+                  <a:srgbClr val="333333"/>
+                </a:solidFill>
+                <a:latin typeface="Segoe UI"/>
+              </a:defRPr>
+            </a:pPr>
+            <a:r>
+              <a:t>B2B Licensing &amp; SDK: Per-device license fee for OEMs.</a:t>
             </a:r>
           </a:p>
           <a:p>
             <a:pPr>
               <a:spcAft>
-                <a:spcPts val="1400"/>
+                <a:spcPts val="1000"/>
               </a:spcAft>
-              <a:defRPr sz="2000">
-                <a:solidFill>
-                  <a:srgbClr val="333333"/>
-                </a:solidFill>
-                <a:latin typeface="Arial"/>
-              </a:defRPr>
-            </a:pPr>
-            <a:r>
-              <a:t>• Tiered Subscription: Basic (Detection) vs. Pro (Prevention + Fleet Analytics).</a:t>
+              <a:defRPr sz="2000" b="0" i="0">
+                <a:solidFill>
+                  <a:srgbClr val="333333"/>
+                </a:solidFill>
+                <a:latin typeface="Segoe UI"/>
+              </a:defRPr>
+            </a:pPr>
+            <a:r>
+              <a:t>Tiered Subscription: Basic (Detection) vs. Pro (Prevention + Fleet Analytics).</a:t>
             </a:r>
           </a:p>
           <a:p>
             <a:pPr>
               <a:spcAft>
-                <a:spcPts val="1400"/>
+                <a:spcPts val="1000"/>
               </a:spcAft>
-              <a:defRPr sz="2000">
-                <a:solidFill>
-                  <a:srgbClr val="333333"/>
-                </a:solidFill>
-                <a:latin typeface="Arial"/>
-              </a:defRPr>
-            </a:pPr>
-            <a:r>
-              <a:t>• Pilot Strategy: Paid pilots with Tier 1 manufacturers to validate and customize.</a:t>
+              <a:defRPr sz="2000" b="0" i="0">
+                <a:solidFill>
+                  <a:srgbClr val="333333"/>
+                </a:solidFill>
+                <a:latin typeface="Segoe UI"/>
+              </a:defRPr>
+            </a:pPr>
+            <a:r>
+              <a:t>Pilot Strategy: Paid pilots with Tier 1 manufacturers to validate and customize.</a:t>
             </a:r>
           </a:p>
           <a:p>
             <a:pPr>
               <a:spcAft>
-                <a:spcPts val="1400"/>
+                <a:spcPts val="1000"/>
               </a:spcAft>
-              <a:defRPr sz="2000">
-                <a:solidFill>
-                  <a:srgbClr val="333333"/>
-                </a:solidFill>
-                <a:latin typeface="Arial"/>
-              </a:defRPr>
-            </a:pPr>
-            <a:r>
-              <a:t>• Scalability: High-margin software model (80%+ gross margin at scale).</a:t>
+              <a:defRPr sz="2000" b="0" i="0">
+                <a:solidFill>
+                  <a:srgbClr val="333333"/>
+                </a:solidFill>
+                <a:latin typeface="Segoe UI"/>
+              </a:defRPr>
+            </a:pPr>
+            <a:r>
+              <a:t>Scalability: High-margin software model (80%+ gross margin at scale).</a:t>
             </a:r>
           </a:p>
         </p:txBody>
@@ -8404,12 +9120,12 @@
           <a:bodyPr/>
           <a:lstStyle/>
           <a:p>
-            <a:pPr>
-              <a:defRPr b="1">
+            <a:pPr algn="l">
+              <a:defRPr sz="3600" b="1" i="0">
                 <a:solidFill>
                   <a:srgbClr val="8B7355"/>
                 </a:solidFill>
-                <a:latin typeface="Arial"/>
+                <a:latin typeface="Segoe UI"/>
               </a:defRPr>
             </a:pPr>
             <a:r>
@@ -8430,71 +9146,71 @@
         </p:nvSpPr>
         <p:spPr/>
         <p:txBody>
-          <a:bodyPr/>
+          <a:bodyPr wrap="square"/>
           <a:lstStyle/>
           <a:p/>
           <a:p>
             <a:pPr>
               <a:spcAft>
-                <a:spcPts val="1400"/>
+                <a:spcPts val="1000"/>
               </a:spcAft>
-              <a:defRPr sz="2000">
-                <a:solidFill>
-                  <a:srgbClr val="333333"/>
-                </a:solidFill>
-                <a:latin typeface="Arial"/>
-              </a:defRPr>
-            </a:pPr>
-            <a:r>
-              <a:t>• Key Partners: Collaboration with Combitech &amp; RISE (Research Institutes of Sweden).</a:t>
+              <a:defRPr sz="2000" b="0" i="0">
+                <a:solidFill>
+                  <a:srgbClr val="333333"/>
+                </a:solidFill>
+                <a:latin typeface="Segoe UI"/>
+              </a:defRPr>
+            </a:pPr>
+            <a:r>
+              <a:t>Key Partners: Collaboration with Combitech &amp; RISE (Research Institutes of Sweden).</a:t>
             </a:r>
           </a:p>
           <a:p>
             <a:pPr>
               <a:spcAft>
-                <a:spcPts val="1400"/>
+                <a:spcPts val="1000"/>
               </a:spcAft>
-              <a:defRPr sz="2000">
-                <a:solidFill>
-                  <a:srgbClr val="333333"/>
-                </a:solidFill>
-                <a:latin typeface="Arial"/>
-              </a:defRPr>
-            </a:pPr>
-            <a:r>
-              <a:t>• Academic Validation: Backed by cutting-edge research in Embedded AI.</a:t>
+              <a:defRPr sz="2000" b="0" i="0">
+                <a:solidFill>
+                  <a:srgbClr val="333333"/>
+                </a:solidFill>
+                <a:latin typeface="Segoe UI"/>
+              </a:defRPr>
+            </a:pPr>
+            <a:r>
+              <a:t>Academic Validation: Backed by cutting-edge research in Embedded AI.</a:t>
             </a:r>
           </a:p>
           <a:p>
             <a:pPr>
               <a:spcAft>
-                <a:spcPts val="1400"/>
+                <a:spcPts val="1000"/>
               </a:spcAft>
-              <a:defRPr sz="2000">
-                <a:solidFill>
-                  <a:srgbClr val="333333"/>
-                </a:solidFill>
-                <a:latin typeface="Arial"/>
-              </a:defRPr>
-            </a:pPr>
-            <a:r>
-              <a:t>• Funding: Secured early grant funding (Vinnova/VFT). Validation of tech novelty.</a:t>
+              <a:defRPr sz="2000" b="0" i="0">
+                <a:solidFill>
+                  <a:srgbClr val="333333"/>
+                </a:solidFill>
+                <a:latin typeface="Segoe UI"/>
+              </a:defRPr>
+            </a:pPr>
+            <a:r>
+              <a:t>Funding: Secured early grant funding (Vinnova/VFT). Validation of tech novelty.</a:t>
             </a:r>
           </a:p>
           <a:p>
             <a:pPr>
               <a:spcAft>
-                <a:spcPts val="1400"/>
+                <a:spcPts val="1000"/>
               </a:spcAft>
-              <a:defRPr sz="2000">
-                <a:solidFill>
-                  <a:srgbClr val="333333"/>
-                </a:solidFill>
-                <a:latin typeface="Arial"/>
-              </a:defRPr>
-            </a:pPr>
-            <a:r>
-              <a:t>• Pipeline: Discussions with major players in Industrial Automation (ABB, Siemens ecosystem).</a:t>
+              <a:defRPr sz="2000" b="0" i="0">
+                <a:solidFill>
+                  <a:srgbClr val="333333"/>
+                </a:solidFill>
+                <a:latin typeface="Segoe UI"/>
+              </a:defRPr>
+            </a:pPr>
+            <a:r>
+              <a:t>Pipeline: Discussions with major players in Industrial Automation (ABB, Siemens ecosystem).</a:t>
             </a:r>
           </a:p>
         </p:txBody>
@@ -8540,12 +9256,12 @@
           <a:bodyPr/>
           <a:lstStyle/>
           <a:p>
-            <a:pPr>
-              <a:defRPr b="1">
+            <a:pPr algn="l">
+              <a:defRPr sz="3600" b="1" i="0">
                 <a:solidFill>
                   <a:srgbClr val="8B7355"/>
                 </a:solidFill>
-                <a:latin typeface="Arial"/>
+                <a:latin typeface="Segoe UI"/>
               </a:defRPr>
             </a:pPr>
             <a:r>
@@ -8566,71 +9282,71 @@
         </p:nvSpPr>
         <p:spPr/>
         <p:txBody>
-          <a:bodyPr/>
+          <a:bodyPr wrap="square"/>
           <a:lstStyle/>
           <a:p/>
           <a:p>
             <a:pPr>
               <a:spcAft>
-                <a:spcPts val="1400"/>
+                <a:spcPts val="1000"/>
               </a:spcAft>
-              <a:defRPr sz="2000">
-                <a:solidFill>
-                  <a:srgbClr val="333333"/>
-                </a:solidFill>
-                <a:latin typeface="Arial"/>
-              </a:defRPr>
-            </a:pPr>
-            <a:r>
-              <a:t>• Key Partners: Collaboration with Combitech &amp; RISE (Research Institutes of Sweden).</a:t>
+              <a:defRPr sz="2000" b="0" i="0">
+                <a:solidFill>
+                  <a:srgbClr val="333333"/>
+                </a:solidFill>
+                <a:latin typeface="Segoe UI"/>
+              </a:defRPr>
+            </a:pPr>
+            <a:r>
+              <a:t>Key Partners: Collaboration with Combitech &amp; RISE (Research Institutes of Sweden).</a:t>
             </a:r>
           </a:p>
           <a:p>
             <a:pPr>
               <a:spcAft>
-                <a:spcPts val="1400"/>
+                <a:spcPts val="1000"/>
               </a:spcAft>
-              <a:defRPr sz="2000">
-                <a:solidFill>
-                  <a:srgbClr val="333333"/>
-                </a:solidFill>
-                <a:latin typeface="Arial"/>
-              </a:defRPr>
-            </a:pPr>
-            <a:r>
-              <a:t>• Academic Validation: Backed by cutting-edge research in Embedded AI.</a:t>
+              <a:defRPr sz="2000" b="0" i="0">
+                <a:solidFill>
+                  <a:srgbClr val="333333"/>
+                </a:solidFill>
+                <a:latin typeface="Segoe UI"/>
+              </a:defRPr>
+            </a:pPr>
+            <a:r>
+              <a:t>Academic Validation: Backed by cutting-edge research in Embedded AI.</a:t>
             </a:r>
           </a:p>
           <a:p>
             <a:pPr>
               <a:spcAft>
-                <a:spcPts val="1400"/>
+                <a:spcPts val="1000"/>
               </a:spcAft>
-              <a:defRPr sz="2000">
-                <a:solidFill>
-                  <a:srgbClr val="333333"/>
-                </a:solidFill>
-                <a:latin typeface="Arial"/>
-              </a:defRPr>
-            </a:pPr>
-            <a:r>
-              <a:t>• Funding: Secured early grant funding (Vinnova/VFT). Validation of tech novelty.</a:t>
+              <a:defRPr sz="2000" b="0" i="0">
+                <a:solidFill>
+                  <a:srgbClr val="333333"/>
+                </a:solidFill>
+                <a:latin typeface="Segoe UI"/>
+              </a:defRPr>
+            </a:pPr>
+            <a:r>
+              <a:t>Funding: Secured early grant funding (Vinnova/VFT). Validation of tech novelty.</a:t>
             </a:r>
           </a:p>
           <a:p>
             <a:pPr>
               <a:spcAft>
-                <a:spcPts val="1400"/>
+                <a:spcPts val="1000"/>
               </a:spcAft>
-              <a:defRPr sz="2000">
-                <a:solidFill>
-                  <a:srgbClr val="333333"/>
-                </a:solidFill>
-                <a:latin typeface="Arial"/>
-              </a:defRPr>
-            </a:pPr>
-            <a:r>
-              <a:t>• Pipeline: Discussions with major players in Industrial Automation (ABB, Siemens ecosystem).</a:t>
+              <a:defRPr sz="2000" b="0" i="0">
+                <a:solidFill>
+                  <a:srgbClr val="333333"/>
+                </a:solidFill>
+                <a:latin typeface="Segoe UI"/>
+              </a:defRPr>
+            </a:pPr>
+            <a:r>
+              <a:t>Pipeline: Discussions with major players in Industrial Automation (ABB, Siemens ecosystem).</a:t>
             </a:r>
           </a:p>
         </p:txBody>
@@ -8676,12 +9392,12 @@
           <a:bodyPr/>
           <a:lstStyle/>
           <a:p>
-            <a:pPr>
-              <a:defRPr b="1">
+            <a:pPr algn="l">
+              <a:defRPr sz="3600" b="1" i="0">
                 <a:solidFill>
                   <a:srgbClr val="8B7355"/>
                 </a:solidFill>
-                <a:latin typeface="Arial"/>
+                <a:latin typeface="Segoe UI"/>
               </a:defRPr>
             </a:pPr>
             <a:r>
@@ -8702,71 +9418,71 @@
         </p:nvSpPr>
         <p:spPr/>
         <p:txBody>
-          <a:bodyPr/>
+          <a:bodyPr wrap="square"/>
           <a:lstStyle/>
           <a:p/>
           <a:p>
             <a:pPr>
               <a:spcAft>
-                <a:spcPts val="1400"/>
+                <a:spcPts val="1000"/>
               </a:spcAft>
-              <a:defRPr sz="2000">
-                <a:solidFill>
-                  <a:srgbClr val="333333"/>
-                </a:solidFill>
-                <a:latin typeface="Arial"/>
-              </a:defRPr>
-            </a:pPr>
-            <a:r>
-              <a:t>• Cloud-Based (Darktrace, etc.): Too heavy, high latency. (LambdaIDS wins on Speed/Size).</a:t>
+              <a:defRPr sz="2000" b="0" i="0">
+                <a:solidFill>
+                  <a:srgbClr val="333333"/>
+                </a:solidFill>
+                <a:latin typeface="Segoe UI"/>
+              </a:defRPr>
+            </a:pPr>
+            <a:r>
+              <a:t>Cloud-Based (Darktrace, etc.): Too heavy, high latency. (LambdaIDS wins on Speed/Size).</a:t>
             </a:r>
           </a:p>
           <a:p>
             <a:pPr>
               <a:spcAft>
-                <a:spcPts val="1400"/>
+                <a:spcPts val="1000"/>
               </a:spcAft>
-              <a:defRPr sz="2000">
-                <a:solidFill>
-                  <a:srgbClr val="333333"/>
-                </a:solidFill>
-                <a:latin typeface="Arial"/>
-              </a:defRPr>
-            </a:pPr>
-            <a:r>
-              <a:t>• Embedded Legacy (Firewalls): Static rules, can't stop zero-days. (LambdaIDS wins on Adaptability).</a:t>
+              <a:defRPr sz="2000" b="0" i="0">
+                <a:solidFill>
+                  <a:srgbClr val="333333"/>
+                </a:solidFill>
+                <a:latin typeface="Segoe UI"/>
+              </a:defRPr>
+            </a:pPr>
+            <a:r>
+              <a:t>Embedded Legacy (Firewalls): Static rules, can't stop zero-days. (LambdaIDS wins on Adaptability).</a:t>
             </a:r>
           </a:p>
           <a:p>
             <a:pPr>
               <a:spcAft>
-                <a:spcPts val="1400"/>
+                <a:spcPts val="1000"/>
               </a:spcAft>
-              <a:defRPr sz="2000">
-                <a:solidFill>
-                  <a:srgbClr val="333333"/>
-                </a:solidFill>
-                <a:latin typeface="Arial"/>
-              </a:defRPr>
-            </a:pPr>
-            <a:r>
-              <a:t>• The LambdaIDS Advantage: The only solution combining TinyML + IEC 62443 Compliance + &lt;100KB Footprint.</a:t>
+              <a:defRPr sz="2000" b="0" i="0">
+                <a:solidFill>
+                  <a:srgbClr val="333333"/>
+                </a:solidFill>
+                <a:latin typeface="Segoe UI"/>
+              </a:defRPr>
+            </a:pPr>
+            <a:r>
+              <a:t>The LambdaIDS Advantage: The only solution combining TinyML + IEC 62443 Compliance + &lt;100KB Footprint.</a:t>
             </a:r>
           </a:p>
           <a:p>
             <a:pPr>
               <a:spcAft>
-                <a:spcPts val="1400"/>
+                <a:spcPts val="1000"/>
               </a:spcAft>
-              <a:defRPr sz="2000">
-                <a:solidFill>
-                  <a:srgbClr val="333333"/>
-                </a:solidFill>
-                <a:latin typeface="Arial"/>
-              </a:defRPr>
-            </a:pPr>
-            <a:r>
-              <a:t>• Moat: Proprietary quantization algorithms &amp; curated attack datasets.</a:t>
+              <a:defRPr sz="2000" b="0" i="0">
+                <a:solidFill>
+                  <a:srgbClr val="333333"/>
+                </a:solidFill>
+                <a:latin typeface="Segoe UI"/>
+              </a:defRPr>
+            </a:pPr>
+            <a:r>
+              <a:t>Moat: Proprietary quantization algorithms &amp; curated attack datasets.</a:t>
             </a:r>
           </a:p>
         </p:txBody>
@@ -8812,12 +9528,12 @@
           <a:bodyPr/>
           <a:lstStyle/>
           <a:p>
-            <a:pPr>
-              <a:defRPr b="1">
+            <a:pPr algn="l">
+              <a:defRPr sz="3600" b="1" i="0">
                 <a:solidFill>
                   <a:srgbClr val="8B7355"/>
                 </a:solidFill>
-                <a:latin typeface="Arial"/>
+                <a:latin typeface="Segoe UI"/>
               </a:defRPr>
             </a:pPr>
             <a:r>
@@ -8838,71 +9554,71 @@
         </p:nvSpPr>
         <p:spPr/>
         <p:txBody>
-          <a:bodyPr/>
+          <a:bodyPr wrap="square"/>
           <a:lstStyle/>
           <a:p/>
           <a:p>
             <a:pPr>
               <a:spcAft>
-                <a:spcPts val="1400"/>
+                <a:spcPts val="1000"/>
               </a:spcAft>
-              <a:defRPr sz="2000">
-                <a:solidFill>
-                  <a:srgbClr val="333333"/>
-                </a:solidFill>
-                <a:latin typeface="Arial"/>
-              </a:defRPr>
-            </a:pPr>
-            <a:r>
-              <a:t>• Cloud-Based (Darktrace, etc.): Too heavy, high latency. (LambdaIDS wins on Speed/Size).</a:t>
+              <a:defRPr sz="2000" b="0" i="0">
+                <a:solidFill>
+                  <a:srgbClr val="333333"/>
+                </a:solidFill>
+                <a:latin typeface="Segoe UI"/>
+              </a:defRPr>
+            </a:pPr>
+            <a:r>
+              <a:t>Cloud-Based (Darktrace, etc.): Too heavy, high latency. (LambdaIDS wins on Speed/Size).</a:t>
             </a:r>
           </a:p>
           <a:p>
             <a:pPr>
               <a:spcAft>
-                <a:spcPts val="1400"/>
+                <a:spcPts val="1000"/>
               </a:spcAft>
-              <a:defRPr sz="2000">
-                <a:solidFill>
-                  <a:srgbClr val="333333"/>
-                </a:solidFill>
-                <a:latin typeface="Arial"/>
-              </a:defRPr>
-            </a:pPr>
-            <a:r>
-              <a:t>• Embedded Legacy (Firewalls): Static rules, can't stop zero-days. (LambdaIDS wins on Adaptability).</a:t>
+              <a:defRPr sz="2000" b="0" i="0">
+                <a:solidFill>
+                  <a:srgbClr val="333333"/>
+                </a:solidFill>
+                <a:latin typeface="Segoe UI"/>
+              </a:defRPr>
+            </a:pPr>
+            <a:r>
+              <a:t>Embedded Legacy (Firewalls): Static rules, can't stop zero-days. (LambdaIDS wins on Adaptability).</a:t>
             </a:r>
           </a:p>
           <a:p>
             <a:pPr>
               <a:spcAft>
-                <a:spcPts val="1400"/>
+                <a:spcPts val="1000"/>
               </a:spcAft>
-              <a:defRPr sz="2000">
-                <a:solidFill>
-                  <a:srgbClr val="333333"/>
-                </a:solidFill>
-                <a:latin typeface="Arial"/>
-              </a:defRPr>
-            </a:pPr>
-            <a:r>
-              <a:t>• The LambdaIDS Advantage: The only solution combining TinyML + IEC 62443 Compliance + &lt;100KB Footprint.</a:t>
+              <a:defRPr sz="2000" b="0" i="0">
+                <a:solidFill>
+                  <a:srgbClr val="333333"/>
+                </a:solidFill>
+                <a:latin typeface="Segoe UI"/>
+              </a:defRPr>
+            </a:pPr>
+            <a:r>
+              <a:t>The LambdaIDS Advantage: The only solution combining TinyML + IEC 62443 Compliance + &lt;100KB Footprint.</a:t>
             </a:r>
           </a:p>
           <a:p>
             <a:pPr>
               <a:spcAft>
-                <a:spcPts val="1400"/>
+                <a:spcPts val="1000"/>
               </a:spcAft>
-              <a:defRPr sz="2000">
-                <a:solidFill>
-                  <a:srgbClr val="333333"/>
-                </a:solidFill>
-                <a:latin typeface="Arial"/>
-              </a:defRPr>
-            </a:pPr>
-            <a:r>
-              <a:t>• Moat: Proprietary quantization algorithms &amp; curated attack datasets.</a:t>
+              <a:defRPr sz="2000" b="0" i="0">
+                <a:solidFill>
+                  <a:srgbClr val="333333"/>
+                </a:solidFill>
+                <a:latin typeface="Segoe UI"/>
+              </a:defRPr>
+            </a:pPr>
+            <a:r>
+              <a:t>Moat: Proprietary quantization algorithms &amp; curated attack datasets.</a:t>
             </a:r>
           </a:p>
         </p:txBody>
